--- a/Docs/HARMONI.pptx
+++ b/Docs/HARMONI.pptx
@@ -144,7 +144,7 @@
   </p:defaultTextStyle>
   <p:extLst>
     <p:ext uri="{EFAFB233-063F-42B5-8137-9DF3F51BA10A}">
-      <p15:sldGuideLst xmlns:p15="http://schemas.microsoft.com/office/powerpoint/2012/main" xmlns="">
+      <p15:sldGuideLst xmlns="" xmlns:p15="http://schemas.microsoft.com/office/powerpoint/2012/main">
         <p15:guide id="1" orient="horz" pos="2160" userDrawn="1">
           <p15:clr>
             <a:srgbClr val="A4A3A4"/>
@@ -256,11 +256,11 @@
         <c:dLbls>
           <c:showVal val="1"/>
         </c:dLbls>
-        <c:axId val="162792192"/>
-        <c:axId val="162793728"/>
+        <c:axId val="160051968"/>
+        <c:axId val="160053504"/>
       </c:barChart>
       <c:catAx>
-        <c:axId val="162792192"/>
+        <c:axId val="160051968"/>
         <c:scaling>
           <c:orientation val="minMax"/>
         </c:scaling>
@@ -291,7 +291,7 @@
             <a:endParaRPr lang="en-US"/>
           </a:p>
         </c:txPr>
-        <c:crossAx val="162793728"/>
+        <c:crossAx val="160053504"/>
         <c:crosses val="autoZero"/>
         <c:auto val="1"/>
         <c:lblAlgn val="ctr"/>
@@ -299,7 +299,7 @@
         <c:noMultiLvlLbl val="1"/>
       </c:catAx>
       <c:valAx>
-        <c:axId val="162793728"/>
+        <c:axId val="160053504"/>
         <c:scaling>
           <c:orientation val="minMax"/>
         </c:scaling>
@@ -369,7 +369,7 @@
             <a:endParaRPr lang="en-US"/>
           </a:p>
         </c:txPr>
-        <c:crossAx val="162792192"/>
+        <c:crossAx val="160051968"/>
         <c:crosses val="autoZero"/>
         <c:crossBetween val="between"/>
       </c:valAx>
@@ -495,7 +495,7 @@
             <a:fld id="{C4D5ADD5-2BBC-4A94-8F86-D9013941F742}" type="datetimeFigureOut">
               <a:rPr lang="en-US"/>
               <a:pPr/>
-              <a:t>9/7/2026</a:t>
+              <a:t>9/8/2026</a:t>
             </a:fld>
             <a:endParaRPr lang="en-US"/>
           </a:p>
@@ -683,7 +683,7 @@
     </p:spTree>
     <p:extLst>
       <p:ext uri="{BB962C8B-B14F-4D97-AF65-F5344CB8AC3E}">
-        <p14:creationId xmlns:p14="http://schemas.microsoft.com/office/powerpoint/2010/main" xmlns="" val="235749454"/>
+        <p14:creationId xmlns="" xmlns:p14="http://schemas.microsoft.com/office/powerpoint/2010/main" val="235749454"/>
       </p:ext>
     </p:extLst>
   </p:cSld>
@@ -922,7 +922,7 @@
     </p:spTree>
     <p:extLst>
       <p:ext uri="{BB962C8B-B14F-4D97-AF65-F5344CB8AC3E}">
-        <p14:creationId xmlns:p14="http://schemas.microsoft.com/office/powerpoint/2010/main" xmlns="" val="2904073229"/>
+        <p14:creationId xmlns="" xmlns:p14="http://schemas.microsoft.com/office/powerpoint/2010/main" val="2904073229"/>
       </p:ext>
     </p:extLst>
   </p:cSld>
@@ -1041,7 +1041,7 @@
     </p:spTree>
     <p:extLst>
       <p:ext uri="{BB962C8B-B14F-4D97-AF65-F5344CB8AC3E}">
-        <p14:creationId xmlns:p14="http://schemas.microsoft.com/office/powerpoint/2010/main" xmlns="" val="2335206292"/>
+        <p14:creationId xmlns="" xmlns:p14="http://schemas.microsoft.com/office/powerpoint/2010/main" val="2335206292"/>
       </p:ext>
     </p:extLst>
   </p:cSld>
@@ -1219,7 +1219,7 @@
     </p:spTree>
     <p:extLst>
       <p:ext uri="{BB962C8B-B14F-4D97-AF65-F5344CB8AC3E}">
-        <p14:creationId xmlns:p14="http://schemas.microsoft.com/office/powerpoint/2010/main" xmlns="" val="3773505461"/>
+        <p14:creationId xmlns="" xmlns:p14="http://schemas.microsoft.com/office/powerpoint/2010/main" val="3773505461"/>
       </p:ext>
     </p:extLst>
   </p:cSld>
@@ -1397,7 +1397,7 @@
     </p:spTree>
     <p:extLst>
       <p:ext uri="{BB962C8B-B14F-4D97-AF65-F5344CB8AC3E}">
-        <p14:creationId xmlns:p14="http://schemas.microsoft.com/office/powerpoint/2010/main" xmlns="" val="2641722845"/>
+        <p14:creationId xmlns="" xmlns:p14="http://schemas.microsoft.com/office/powerpoint/2010/main" val="2641722845"/>
       </p:ext>
     </p:extLst>
   </p:cSld>
@@ -1575,7 +1575,7 @@
     </p:spTree>
     <p:extLst>
       <p:ext uri="{BB962C8B-B14F-4D97-AF65-F5344CB8AC3E}">
-        <p14:creationId xmlns:p14="http://schemas.microsoft.com/office/powerpoint/2010/main" xmlns="" val="1908672725"/>
+        <p14:creationId xmlns="" xmlns:p14="http://schemas.microsoft.com/office/powerpoint/2010/main" val="1908672725"/>
       </p:ext>
     </p:extLst>
   </p:cSld>
@@ -1769,7 +1769,7 @@
             <a:fld id="{E60792E3-D524-454C-8AFD-A91972900BCB}" type="datetime1">
               <a:rPr lang="en-US" smtClean="0"/>
               <a:pPr/>
-              <a:t>9/7/2026</a:t>
+              <a:t>9/8/2026</a:t>
             </a:fld>
             <a:endParaRPr lang="en-US"/>
           </a:p>
@@ -1952,7 +1952,7 @@
             <a:fld id="{053C3A68-6922-42D3-8905-ECC2D82A3469}" type="datetime1">
               <a:rPr lang="en-US" smtClean="0"/>
               <a:pPr/>
-              <a:t>9/7/2026</a:t>
+              <a:t>9/8/2026</a:t>
             </a:fld>
             <a:endParaRPr lang="en-US"/>
           </a:p>
@@ -2145,7 +2145,7 @@
             <a:fld id="{CB69E9F4-7604-4950-A8B2-8ACDEDB1506E}" type="datetime1">
               <a:rPr lang="en-US" smtClean="0"/>
               <a:pPr/>
-              <a:t>9/7/2026</a:t>
+              <a:t>9/8/2026</a:t>
             </a:fld>
             <a:endParaRPr lang="en-US"/>
           </a:p>
@@ -2328,7 +2328,7 @@
             <a:fld id="{708B7524-32A2-4C20-A58C-BC3BAA1042FC}" type="datetime1">
               <a:rPr lang="en-US" smtClean="0"/>
               <a:pPr/>
-              <a:t>9/7/2026</a:t>
+              <a:t>9/8/2026</a:t>
             </a:fld>
             <a:endParaRPr lang="en-US"/>
           </a:p>
@@ -2588,7 +2588,7 @@
             <a:fld id="{1E994447-D6B2-43BB-A877-57F1A267B999}" type="datetime1">
               <a:rPr lang="en-US" smtClean="0"/>
               <a:pPr/>
-              <a:t>9/7/2026</a:t>
+              <a:t>9/8/2026</a:t>
             </a:fld>
             <a:endParaRPr lang="en-US"/>
           </a:p>
@@ -2888,7 +2888,7 @@
             <a:fld id="{68920E16-BD35-483C-AA6B-346FC7E46DEA}" type="datetime1">
               <a:rPr lang="en-US" smtClean="0"/>
               <a:pPr/>
-              <a:t>9/7/2026</a:t>
+              <a:t>9/8/2026</a:t>
             </a:fld>
             <a:endParaRPr lang="en-US"/>
           </a:p>
@@ -3322,7 +3322,7 @@
             <a:fld id="{2FEAC6F8-5103-4FC0-A69E-5C6AE6469DA8}" type="datetime1">
               <a:rPr lang="en-US" smtClean="0"/>
               <a:pPr/>
-              <a:t>9/7/2026</a:t>
+              <a:t>9/8/2026</a:t>
             </a:fld>
             <a:endParaRPr lang="en-US"/>
           </a:p>
@@ -3454,7 +3454,7 @@
             <a:fld id="{C60C6921-0627-4C8F-83D5-0CF936D2FFDD}" type="datetime1">
               <a:rPr lang="en-US" smtClean="0"/>
               <a:pPr/>
-              <a:t>9/7/2026</a:t>
+              <a:t>9/8/2026</a:t>
             </a:fld>
             <a:endParaRPr lang="en-US"/>
           </a:p>
@@ -3564,7 +3564,7 @@
             <a:fld id="{2FF08AD7-8103-40F8-983C-E2BA6BB9CBE0}" type="datetime1">
               <a:rPr lang="en-US" smtClean="0"/>
               <a:pPr/>
-              <a:t>9/7/2026</a:t>
+              <a:t>9/8/2026</a:t>
             </a:fld>
             <a:endParaRPr lang="en-US"/>
           </a:p>
@@ -3854,7 +3854,7 @@
             <a:fld id="{DF8C06B4-9380-4A4D-AF49-A3596E17DAF5}" type="datetime1">
               <a:rPr lang="en-US" smtClean="0"/>
               <a:pPr/>
-              <a:t>9/7/2026</a:t>
+              <a:t>9/8/2026</a:t>
             </a:fld>
             <a:endParaRPr lang="en-US"/>
           </a:p>
@@ -4124,7 +4124,7 @@
             <a:fld id="{EF7FDEF1-C582-4E22-9E77-D68326471F28}" type="datetime1">
               <a:rPr lang="en-US" smtClean="0"/>
               <a:pPr/>
-              <a:t>9/7/2026</a:t>
+              <a:t>9/8/2026</a:t>
             </a:fld>
             <a:endParaRPr lang="en-US"/>
           </a:p>
@@ -4368,7 +4368,7 @@
             <a:fld id="{780A9602-A9A9-453F-AEF1-37B5837E02CD}" type="datetime1">
               <a:rPr lang="en-US" smtClean="0"/>
               <a:pPr/>
-              <a:t>9/7/2026</a:t>
+              <a:t>9/8/2026</a:t>
             </a:fld>
             <a:endParaRPr lang="en-US"/>
           </a:p>
@@ -4916,10 +4916,10 @@
           <p:cNvPr id="36" name="Rectangle 24">
             <a:extLst>
               <a:ext uri="{FF2B5EF4-FFF2-40B4-BE49-F238E27FC236}">
-                <a16:creationId xmlns:a16="http://schemas.microsoft.com/office/drawing/2014/main" xmlns="" id="{3E443FD7-A66B-4AA0-872D-B088B9BC5F17}"/>
+                <a16:creationId xmlns="" xmlns:a16="http://schemas.microsoft.com/office/drawing/2014/main" id="{3E443FD7-A66B-4AA0-872D-B088B9BC5F17}"/>
               </a:ext>
               <a:ext uri="{C183D7F6-B498-43B3-948B-1728B52AA6E4}">
-                <adec:decorative xmlns="" xmlns:adec="http://schemas.microsoft.com/office/drawing/2017/decorative" val="1"/>
+                <adec:decorative xmlns:adec="http://schemas.microsoft.com/office/drawing/2017/decorative" xmlns="" val="1"/>
               </a:ext>
             </a:extLst>
           </p:cNvPr>
@@ -4929,7 +4929,7 @@
           <p:nvPr>
             <p:extLst>
               <p:ext uri="{386F3935-93C4-4BCD-93E2-E3B085C9AB24}">
-                <p16:designElem xmlns:p16="http://schemas.microsoft.com/office/powerpoint/2015/main" xmlns="" val="1"/>
+                <p16:designElem xmlns="" xmlns:p16="http://schemas.microsoft.com/office/powerpoint/2015/main" val="1"/>
               </p:ext>
             </p:extLst>
           </p:nvPr>
@@ -4976,10 +4976,10 @@
           <p:cNvPr id="37" name="Freeform: Shape 26">
             <a:extLst>
               <a:ext uri="{FF2B5EF4-FFF2-40B4-BE49-F238E27FC236}">
-                <a16:creationId xmlns:a16="http://schemas.microsoft.com/office/drawing/2014/main" xmlns="" id="{C04BE0EF-3561-49B4-9A29-F283168A91C7}"/>
+                <a16:creationId xmlns="" xmlns:a16="http://schemas.microsoft.com/office/drawing/2014/main" id="{C04BE0EF-3561-49B4-9A29-F283168A91C7}"/>
               </a:ext>
               <a:ext uri="{C183D7F6-B498-43B3-948B-1728B52AA6E4}">
-                <adec:decorative xmlns="" xmlns:adec="http://schemas.microsoft.com/office/drawing/2017/decorative" val="1"/>
+                <adec:decorative xmlns:adec="http://schemas.microsoft.com/office/drawing/2017/decorative" xmlns="" val="1"/>
               </a:ext>
             </a:extLst>
           </p:cNvPr>
@@ -4989,7 +4989,7 @@
           <p:nvPr>
             <p:extLst>
               <p:ext uri="{386F3935-93C4-4BCD-93E2-E3B085C9AB24}">
-                <p16:designElem xmlns:p16="http://schemas.microsoft.com/office/powerpoint/2015/main" xmlns="" val="1"/>
+                <p16:designElem xmlns="" xmlns:p16="http://schemas.microsoft.com/office/powerpoint/2015/main" val="1"/>
               </p:ext>
             </p:extLst>
           </p:nvPr>
@@ -5750,7 +5750,7 @@
           <p:cNvPr id="5" name="Picture 4">
             <a:extLst>
               <a:ext uri="{FF2B5EF4-FFF2-40B4-BE49-F238E27FC236}">
-                <a16:creationId xmlns:a16="http://schemas.microsoft.com/office/drawing/2014/main" xmlns="" id="{9120848B-B2B4-45BE-A961-AEC0B06CF41B}"/>
+                <a16:creationId xmlns="" xmlns:a16="http://schemas.microsoft.com/office/drawing/2014/main" id="{9120848B-B2B4-45BE-A961-AEC0B06CF41B}"/>
               </a:ext>
             </a:extLst>
           </p:cNvPr>
@@ -6065,7 +6065,7 @@
           <a:blip r:embed="rId3">
             <a:extLst>
               <a:ext uri="{28A0092B-C50C-407E-A947-70E740481C1C}">
-                <a14:useLocalDpi xmlns:a14="http://schemas.microsoft.com/office/drawing/2010/main" xmlns="" val="0"/>
+                <a14:useLocalDpi xmlns="" xmlns:a14="http://schemas.microsoft.com/office/drawing/2010/main" val="0"/>
               </a:ext>
             </a:extLst>
           </a:blip>
@@ -6121,6 +6121,13 @@
   <p:clrMapOvr>
     <a:masterClrMapping/>
   </p:clrMapOvr>
+  <p:timing>
+    <p:tnLst>
+      <p:par>
+        <p:cTn id="1" dur="indefinite" restart="never" nodeType="tmRoot"/>
+      </p:par>
+    </p:tnLst>
+  </p:timing>
 </p:sld>
 </file>
 
@@ -6337,10 +6344,10 @@
           <p:cNvPr id="10" name="Oval 9" descr="Your startup LOGO">
             <a:extLst>
               <a:ext uri="{FF2B5EF4-FFF2-40B4-BE49-F238E27FC236}">
-                <a16:creationId xmlns:a16="http://schemas.microsoft.com/office/drawing/2014/main" xmlns="" id="{5DBCE864-823D-4A13-9607-5DA1F0ED5FB8}"/>
+                <a16:creationId xmlns="" xmlns:a16="http://schemas.microsoft.com/office/drawing/2014/main" id="{5DBCE864-823D-4A13-9607-5DA1F0ED5FB8}"/>
               </a:ext>
               <a:ext uri="{C183D7F6-B498-43B3-948B-1728B52AA6E4}">
-                <adec:decorative xmlns="" xmlns:adec="http://schemas.microsoft.com/office/drawing/2017/decorative" val="0"/>
+                <adec:decorative xmlns:adec="http://schemas.microsoft.com/office/drawing/2017/decorative" xmlns="" val="0"/>
               </a:ext>
             </a:extLst>
           </p:cNvPr>
@@ -6395,7 +6402,7 @@
           <a:blip r:embed="rId3">
             <a:extLst>
               <a:ext uri="{28A0092B-C50C-407E-A947-70E740481C1C}">
-                <a14:useLocalDpi xmlns:a14="http://schemas.microsoft.com/office/drawing/2010/main" xmlns="" val="0"/>
+                <a14:useLocalDpi xmlns="" xmlns:a14="http://schemas.microsoft.com/office/drawing/2010/main" val="0"/>
               </a:ext>
             </a:extLst>
           </a:blip>
@@ -6413,1611 +6420,1230 @@
           </a:prstGeom>
         </p:spPr>
       </p:pic>
-      <p:grpSp>
-        <p:nvGrpSpPr>
-          <p:cNvPr id="21" name="Group 20"/>
-          <p:cNvGrpSpPr/>
+      <p:sp>
+        <p:nvSpPr>
+          <p:cNvPr id="20" name="TextBox 19"/>
+          <p:cNvSpPr txBox="1"/>
           <p:nvPr/>
-        </p:nvGrpSpPr>
-        <p:grpSpPr>
-          <a:xfrm>
-            <a:off x="137160" y="1141948"/>
-            <a:ext cx="6592752" cy="395152"/>
-            <a:chOff x="137160" y="1226624"/>
-            <a:chExt cx="6592752" cy="395152"/>
-          </a:xfrm>
-        </p:grpSpPr>
-        <p:grpSp>
-          <p:nvGrpSpPr>
-            <p:cNvPr id="14" name="Group 13"/>
-            <p:cNvGrpSpPr/>
-            <p:nvPr/>
-          </p:nvGrpSpPr>
-          <p:grpSpPr>
-            <a:xfrm>
-              <a:off x="137160" y="1226624"/>
-              <a:ext cx="395152" cy="395152"/>
-              <a:chOff x="457200" y="320040"/>
-              <a:chExt cx="640080" cy="640080"/>
-            </a:xfrm>
-          </p:grpSpPr>
-          <p:sp>
-            <p:nvSpPr>
-              <p:cNvPr id="15" name="Shape 0"/>
-              <p:cNvSpPr/>
-              <p:nvPr/>
-            </p:nvSpPr>
-            <p:spPr>
-              <a:xfrm>
-                <a:off x="457200" y="320040"/>
-                <a:ext cx="640080" cy="640080"/>
-              </a:xfrm>
-              <a:prstGeom prst="ellipse">
-                <a:avLst/>
-              </a:prstGeom>
+        </p:nvSpPr>
+        <p:spPr>
+          <a:xfrm>
+            <a:off x="386427" y="1240920"/>
+            <a:ext cx="6343485" cy="369332"/>
+          </a:xfrm>
+          <a:prstGeom prst="rect">
+            <a:avLst/>
+          </a:prstGeom>
+          <a:noFill/>
+        </p:spPr>
+        <p:txBody>
+          <a:bodyPr wrap="square" rtlCol="0">
+            <a:spAutoFit/>
+          </a:bodyPr>
+          <a:lstStyle/>
+          <a:p>
+            <a:pPr>
+              <a:buFont typeface="Wingdings" pitchFamily="2" charset="2"/>
+              <a:buChar char="v"/>
+            </a:pPr>
+            <a:r>
+              <a:rPr lang="en-US" b="1" dirty="0" smtClean="0">
+                <a:solidFill>
+                  <a:schemeClr val="accent3">
+                    <a:lumMod val="75000"/>
+                  </a:schemeClr>
+                </a:solidFill>
+                <a:latin typeface="Cambria" pitchFamily="34" charset="0"/>
+                <a:ea typeface="Cambria" pitchFamily="34" charset="-122"/>
+                <a:cs typeface="Cambria" pitchFamily="34" charset="-120"/>
+              </a:rPr>
+              <a:t> Proposed </a:t>
+            </a:r>
+            <a:r>
+              <a:rPr lang="en-US" b="1" dirty="0" smtClean="0">
+                <a:solidFill>
+                  <a:schemeClr val="accent3">
+                    <a:lumMod val="75000"/>
+                  </a:schemeClr>
+                </a:solidFill>
+                <a:latin typeface="Cambria" pitchFamily="34" charset="0"/>
+                <a:ea typeface="Cambria" pitchFamily="34" charset="-122"/>
+                <a:cs typeface="Cambria" pitchFamily="34" charset="-120"/>
+              </a:rPr>
+              <a:t>Solution</a:t>
+            </a:r>
+            <a:endParaRPr lang="en-US" dirty="0" smtClean="0">
               <a:solidFill>
-                <a:srgbClr val="1D9E75"/>
+                <a:schemeClr val="accent3">
+                  <a:lumMod val="75000"/>
+                </a:schemeClr>
               </a:solidFill>
-              <a:ln/>
-            </p:spPr>
-          </p:sp>
-          <p:pic>
-            <p:nvPicPr>
-              <p:cNvPr id="16" name="Image 0" descr="/home/claude/harmoni_ppt/icons/lightbulb.png"/>
-              <p:cNvPicPr>
-                <a:picLocks noChangeAspect="1"/>
-              </p:cNvPicPr>
-              <p:nvPr/>
-            </p:nvPicPr>
-            <p:blipFill>
-              <a:blip r:embed="rId4"/>
-              <a:stretch>
-                <a:fillRect/>
-              </a:stretch>
-            </p:blipFill>
-            <p:spPr>
-              <a:xfrm>
-                <a:off x="594360" y="457200"/>
-                <a:ext cx="365760" cy="365760"/>
-              </a:xfrm>
-              <a:prstGeom prst="rect">
-                <a:avLst/>
-              </a:prstGeom>
-            </p:spPr>
-          </p:pic>
-        </p:grpSp>
-        <p:sp>
-          <p:nvSpPr>
-            <p:cNvPr id="20" name="TextBox 19"/>
-            <p:cNvSpPr txBox="1"/>
-            <p:nvPr/>
-          </p:nvSpPr>
-          <p:spPr>
-            <a:xfrm>
-              <a:off x="532312" y="1226624"/>
-              <a:ext cx="6197600" cy="369332"/>
-            </a:xfrm>
-            <a:prstGeom prst="rect">
-              <a:avLst/>
-            </a:prstGeom>
-            <a:noFill/>
-          </p:spPr>
-          <p:txBody>
-            <a:bodyPr wrap="square" rtlCol="0">
-              <a:spAutoFit/>
-            </a:bodyPr>
-            <a:lstStyle/>
-            <a:p>
-              <a:r>
-                <a:rPr lang="en-US" b="1" dirty="0" smtClean="0">
-                  <a:solidFill>
-                    <a:srgbClr val="12213B"/>
-                  </a:solidFill>
-                  <a:latin typeface="Cambria" pitchFamily="34" charset="0"/>
-                  <a:ea typeface="Cambria" pitchFamily="34" charset="-122"/>
-                  <a:cs typeface="Cambria" pitchFamily="34" charset="-120"/>
-                </a:rPr>
-                <a:t>Proposed Solution</a:t>
-              </a:r>
-              <a:endParaRPr lang="en-US" dirty="0" smtClean="0"/>
-            </a:p>
-          </p:txBody>
-        </p:sp>
-      </p:grpSp>
-      <p:grpSp>
-        <p:nvGrpSpPr>
-          <p:cNvPr id="23" name="Group 22"/>
-          <p:cNvGrpSpPr/>
+            </a:endParaRPr>
+          </a:p>
+        </p:txBody>
+      </p:sp>
+      <p:sp>
+        <p:nvSpPr>
+          <p:cNvPr id="25" name="Text 4"/>
+          <p:cNvSpPr txBox="1"/>
           <p:nvPr/>
-        </p:nvGrpSpPr>
-        <p:grpSpPr>
-          <a:xfrm>
-            <a:off x="137160" y="1573676"/>
-            <a:ext cx="11892776" cy="566928"/>
-            <a:chOff x="457200" y="1051560"/>
-            <a:chExt cx="11274552" cy="566928"/>
-          </a:xfrm>
-        </p:grpSpPr>
-        <p:sp>
-          <p:nvSpPr>
-            <p:cNvPr id="24" name="Shape 3"/>
-            <p:cNvSpPr/>
-            <p:nvPr/>
-          </p:nvSpPr>
-          <p:spPr>
-            <a:xfrm>
-              <a:off x="457200" y="1051560"/>
-              <a:ext cx="11274552" cy="566928"/>
-            </a:xfrm>
-            <a:prstGeom prst="roundRect">
-              <a:avLst>
-                <a:gd name="adj" fmla="val 9677"/>
-              </a:avLst>
-            </a:prstGeom>
+        </p:nvSpPr>
+        <p:spPr>
+          <a:xfrm>
+            <a:off x="551912" y="1601108"/>
+            <a:ext cx="11478024" cy="256032"/>
+          </a:xfrm>
+          <a:prstGeom prst="rect">
+            <a:avLst/>
+          </a:prstGeom>
+          <a:noFill/>
+          <a:ln/>
+        </p:spPr>
+        <p:txBody>
+          <a:bodyPr wrap="square" lIns="0" tIns="0" rIns="0" bIns="0" rtlCol="0" anchor="ctr"/>
+          <a:lstStyle/>
+          <a:p>
+            <a:pPr marL="0" indent="0">
+              <a:buNone/>
+            </a:pPr>
+            <a:r>
+              <a:rPr lang="en-US" sz="1250" b="1" kern="0" spc="50" dirty="0">
+                <a:latin typeface="Calibri" pitchFamily="34" charset="0"/>
+                <a:ea typeface="Calibri" pitchFamily="34" charset="-122"/>
+                <a:cs typeface="Calibri" pitchFamily="34" charset="-120"/>
+              </a:rPr>
+              <a:t>CORE </a:t>
+            </a:r>
+            <a:r>
+              <a:rPr lang="en-US" sz="1250" b="1" kern="0" spc="50" dirty="0" smtClean="0">
+                <a:ea typeface="Calibri" pitchFamily="34" charset="-122"/>
+                <a:cs typeface="Calibri" pitchFamily="34" charset="-120"/>
+              </a:rPr>
+              <a:t>UNIQUENESS</a:t>
+            </a:r>
+            <a:r>
+              <a:rPr lang="en-US" sz="1250" b="1" kern="0" spc="50" dirty="0" smtClean="0">
+                <a:latin typeface="Calibri" pitchFamily="34" charset="0"/>
+                <a:ea typeface="Calibri" pitchFamily="34" charset="-122"/>
+                <a:cs typeface="Calibri" pitchFamily="34" charset="-120"/>
+              </a:rPr>
+              <a:t> </a:t>
+            </a:r>
+            <a:r>
+              <a:rPr lang="en-US" sz="1250" b="1" kern="0" spc="50" dirty="0">
+                <a:latin typeface="Calibri" pitchFamily="34" charset="0"/>
+                <a:ea typeface="Calibri" pitchFamily="34" charset="-122"/>
+                <a:cs typeface="Calibri" pitchFamily="34" charset="-120"/>
+              </a:rPr>
+              <a:t>— DECENTRALIZED, EDGE-FIRST COORDINATION</a:t>
+            </a:r>
+            <a:endParaRPr lang="en-US" sz="1250" dirty="0"/>
+          </a:p>
+        </p:txBody>
+      </p:sp>
+      <p:sp>
+        <p:nvSpPr>
+          <p:cNvPr id="26" name="Text 5"/>
+          <p:cNvSpPr txBox="1"/>
+          <p:nvPr/>
+        </p:nvSpPr>
+        <p:spPr>
+          <a:xfrm>
+            <a:off x="578971" y="1857140"/>
+            <a:ext cx="11003429" cy="256032"/>
+          </a:xfrm>
+          <a:prstGeom prst="rect">
+            <a:avLst/>
+          </a:prstGeom>
+          <a:noFill/>
+          <a:ln/>
+        </p:spPr>
+        <p:txBody>
+          <a:bodyPr wrap="square" lIns="0" tIns="0" rIns="0" bIns="0" rtlCol="0" anchor="ctr"/>
+          <a:lstStyle/>
+          <a:p>
+            <a:pPr marL="0" indent="0">
+              <a:buNone/>
+            </a:pPr>
+            <a:r>
+              <a:rPr lang="en-US" sz="1100" dirty="0">
+                <a:latin typeface="Calibri" pitchFamily="34" charset="0"/>
+                <a:ea typeface="Calibri" pitchFamily="34" charset="-122"/>
+                <a:cs typeface="Calibri" pitchFamily="34" charset="-120"/>
+              </a:rPr>
+              <a:t>Every AMR carries the full coordination + autonomy stack — no central server sits in the control or safety loop, at any operating tier.</a:t>
+            </a:r>
+            <a:endParaRPr lang="en-US" sz="1100" dirty="0"/>
+          </a:p>
+        </p:txBody>
+      </p:sp>
+      <p:sp>
+        <p:nvSpPr>
+          <p:cNvPr id="28" name="Text 6"/>
+          <p:cNvSpPr txBox="1"/>
+          <p:nvPr/>
+        </p:nvSpPr>
+        <p:spPr>
+          <a:xfrm>
+            <a:off x="713975" y="2367638"/>
+            <a:ext cx="4994260" cy="254614"/>
+          </a:xfrm>
+          <a:prstGeom prst="rect">
+            <a:avLst/>
+          </a:prstGeom>
+          <a:noFill/>
+          <a:ln/>
+        </p:spPr>
+        <p:txBody>
+          <a:bodyPr wrap="square" lIns="0" tIns="0" rIns="0" bIns="0" rtlCol="0" anchor="ctr"/>
+          <a:lstStyle/>
+          <a:p>
+            <a:pPr marL="0" indent="0">
+              <a:buNone/>
+            </a:pPr>
+            <a:r>
+              <a:rPr lang="en-US" sz="1100" b="1" kern="0" spc="100" dirty="0">
+                <a:solidFill>
+                  <a:schemeClr val="accent3">
+                    <a:lumMod val="50000"/>
+                  </a:schemeClr>
+                </a:solidFill>
+                <a:latin typeface="Calibri" pitchFamily="34" charset="0"/>
+                <a:ea typeface="Calibri" pitchFamily="34" charset="-122"/>
+                <a:cs typeface="Calibri" pitchFamily="34" charset="-120"/>
+              </a:rPr>
+              <a:t>CORE COORDINATION MECHANISMS</a:t>
+            </a:r>
+            <a:endParaRPr lang="en-US" sz="1100" dirty="0">
+              <a:solidFill>
+                <a:schemeClr val="accent3">
+                  <a:lumMod val="50000"/>
+                </a:schemeClr>
+              </a:solidFill>
+            </a:endParaRPr>
+          </a:p>
+        </p:txBody>
+      </p:sp>
+      <p:sp>
+        <p:nvSpPr>
+          <p:cNvPr id="43" name="Shape 7"/>
+          <p:cNvSpPr/>
+          <p:nvPr/>
+        </p:nvSpPr>
+        <p:spPr>
+          <a:xfrm>
+            <a:off x="681487" y="2667718"/>
+            <a:ext cx="5026748" cy="909334"/>
+          </a:xfrm>
+          <a:prstGeom prst="roundRect">
+            <a:avLst>
+              <a:gd name="adj" fmla="val 7000"/>
+            </a:avLst>
+          </a:prstGeom>
+          <a:solidFill>
+            <a:schemeClr val="accent6">
+              <a:lumMod val="20000"/>
+              <a:lumOff val="80000"/>
+            </a:schemeClr>
+          </a:solidFill>
+          <a:ln w="9525">
+            <a:solidFill>
+              <a:schemeClr val="accent6">
+                <a:lumMod val="50000"/>
+              </a:schemeClr>
+            </a:solidFill>
+            <a:prstDash val="solid"/>
+          </a:ln>
+        </p:spPr>
+      </p:sp>
+      <p:sp>
+        <p:nvSpPr>
+          <p:cNvPr id="46" name="Text 9"/>
+          <p:cNvSpPr txBox="1"/>
+          <p:nvPr/>
+        </p:nvSpPr>
+        <p:spPr>
+          <a:xfrm>
+            <a:off x="1026507" y="2776838"/>
+            <a:ext cx="4526280" cy="254614"/>
+          </a:xfrm>
+          <a:prstGeom prst="rect">
+            <a:avLst/>
+          </a:prstGeom>
+          <a:noFill/>
+          <a:ln/>
+        </p:spPr>
+        <p:txBody>
+          <a:bodyPr wrap="square" lIns="0" tIns="0" rIns="0" bIns="0" rtlCol="0" anchor="ctr"/>
+          <a:lstStyle/>
+          <a:p>
+            <a:pPr marL="0" indent="0">
+              <a:buNone/>
+            </a:pPr>
+            <a:r>
+              <a:rPr lang="en-US" sz="1250" b="1" dirty="0">
+                <a:solidFill>
+                  <a:srgbClr val="12213B"/>
+                </a:solidFill>
+                <a:latin typeface="Calibri" pitchFamily="34" charset="0"/>
+                <a:ea typeface="Calibri" pitchFamily="34" charset="-122"/>
+                <a:cs typeface="Calibri" pitchFamily="34" charset="-120"/>
+              </a:rPr>
+              <a:t>Space-time </a:t>
+            </a:r>
+            <a:r>
+              <a:rPr lang="en-US" sz="1250" b="1" dirty="0" smtClean="0">
+                <a:solidFill>
+                  <a:srgbClr val="12213B"/>
+                </a:solidFill>
+                <a:latin typeface="Calibri" pitchFamily="34" charset="0"/>
+                <a:ea typeface="Calibri" pitchFamily="34" charset="-122"/>
+                <a:cs typeface="Calibri" pitchFamily="34" charset="-120"/>
+              </a:rPr>
+              <a:t>reservations</a:t>
+            </a:r>
+            <a:endParaRPr lang="en-US" sz="1250" dirty="0"/>
+          </a:p>
+        </p:txBody>
+      </p:sp>
+      <p:sp>
+        <p:nvSpPr>
+          <p:cNvPr id="47" name="Text 10"/>
+          <p:cNvSpPr txBox="1"/>
+          <p:nvPr/>
+        </p:nvSpPr>
+        <p:spPr>
+          <a:xfrm>
+            <a:off x="1026507" y="2981979"/>
+            <a:ext cx="4526280" cy="472854"/>
+          </a:xfrm>
+          <a:prstGeom prst="rect">
+            <a:avLst/>
+          </a:prstGeom>
+          <a:noFill/>
+          <a:ln/>
+        </p:spPr>
+        <p:txBody>
+          <a:bodyPr wrap="square" lIns="0" tIns="0" rIns="0" bIns="0" rtlCol="0" anchor="ctr"/>
+          <a:lstStyle/>
+          <a:p>
+            <a:pPr marL="0" indent="0">
+              <a:buNone/>
+            </a:pPr>
+            <a:r>
+              <a:rPr lang="en-US" sz="1000" dirty="0" smtClean="0">
+                <a:solidFill>
+                  <a:srgbClr val="6B7280"/>
+                </a:solidFill>
+                <a:latin typeface="Calibri" pitchFamily="34" charset="0"/>
+                <a:ea typeface="Calibri" pitchFamily="34" charset="-122"/>
+                <a:cs typeface="Calibri" pitchFamily="34" charset="-120"/>
+              </a:rPr>
+              <a:t>Robots claim shared cells/aisles for specific time windows; conflicts break by a deterministic priority order.</a:t>
+            </a:r>
+            <a:endParaRPr lang="en-US" sz="1000" dirty="0"/>
+          </a:p>
+        </p:txBody>
+      </p:sp>
+      <p:sp>
+        <p:nvSpPr>
+          <p:cNvPr id="37" name="Shape 11"/>
+          <p:cNvSpPr/>
+          <p:nvPr/>
+        </p:nvSpPr>
+        <p:spPr>
+          <a:xfrm>
+            <a:off x="681487" y="3704359"/>
+            <a:ext cx="5026748" cy="909334"/>
+          </a:xfrm>
+          <a:prstGeom prst="roundRect">
+            <a:avLst>
+              <a:gd name="adj" fmla="val 7000"/>
+            </a:avLst>
+          </a:prstGeom>
+          <a:solidFill>
+            <a:schemeClr val="accent6">
+              <a:lumMod val="20000"/>
+              <a:lumOff val="80000"/>
+            </a:schemeClr>
+          </a:solidFill>
+          <a:ln w="9525">
+            <a:solidFill>
+              <a:schemeClr val="accent6">
+                <a:lumMod val="50000"/>
+              </a:schemeClr>
+            </a:solidFill>
+            <a:prstDash val="solid"/>
+          </a:ln>
+        </p:spPr>
+      </p:sp>
+      <p:sp>
+        <p:nvSpPr>
+          <p:cNvPr id="39" name="Text 13"/>
+          <p:cNvSpPr txBox="1"/>
+          <p:nvPr/>
+        </p:nvSpPr>
+        <p:spPr>
+          <a:xfrm>
+            <a:off x="1026507" y="3795292"/>
+            <a:ext cx="4526280" cy="254614"/>
+          </a:xfrm>
+          <a:prstGeom prst="rect">
+            <a:avLst/>
+          </a:prstGeom>
+          <a:noFill/>
+          <a:ln/>
+        </p:spPr>
+        <p:txBody>
+          <a:bodyPr wrap="square" lIns="0" tIns="0" rIns="0" bIns="0" rtlCol="0" anchor="ctr"/>
+          <a:lstStyle/>
+          <a:p>
+            <a:pPr marL="0" indent="0">
+              <a:buNone/>
+            </a:pPr>
+            <a:r>
+              <a:rPr lang="en-US" sz="1250" b="1" dirty="0">
+                <a:solidFill>
+                  <a:srgbClr val="12213B"/>
+                </a:solidFill>
+                <a:latin typeface="Calibri" pitchFamily="34" charset="0"/>
+                <a:ea typeface="Calibri" pitchFamily="34" charset="-122"/>
+                <a:cs typeface="Calibri" pitchFamily="34" charset="-120"/>
+              </a:rPr>
+              <a:t>Deadlock detection &amp; resolution</a:t>
+            </a:r>
+            <a:endParaRPr lang="en-US" sz="1250" dirty="0"/>
+          </a:p>
+        </p:txBody>
+      </p:sp>
+      <p:sp>
+        <p:nvSpPr>
+          <p:cNvPr id="40" name="Text 14"/>
+          <p:cNvSpPr txBox="1"/>
+          <p:nvPr/>
+        </p:nvSpPr>
+        <p:spPr>
+          <a:xfrm>
+            <a:off x="1026507" y="4021061"/>
+            <a:ext cx="4526280" cy="472854"/>
+          </a:xfrm>
+          <a:prstGeom prst="rect">
+            <a:avLst/>
+          </a:prstGeom>
+          <a:noFill/>
+          <a:ln/>
+        </p:spPr>
+        <p:txBody>
+          <a:bodyPr wrap="square" lIns="0" tIns="0" rIns="0" bIns="0" rtlCol="0" anchor="ctr"/>
+          <a:lstStyle/>
+          <a:p>
+            <a:pPr marL="0" indent="0">
+              <a:buNone/>
+            </a:pPr>
+            <a:r>
+              <a:rPr lang="en-US" sz="1000" dirty="0">
+                <a:solidFill>
+                  <a:srgbClr val="6B7280"/>
+                </a:solidFill>
+                <a:latin typeface="Calibri" pitchFamily="34" charset="0"/>
+                <a:ea typeface="Calibri" pitchFamily="34" charset="-122"/>
+                <a:cs typeface="Calibri" pitchFamily="34" charset="-120"/>
+              </a:rPr>
+              <a:t>A wait-for-graph flags cyclic waits across robots; the lowest-priority robot yields to break the cycle.</a:t>
+            </a:r>
+            <a:endParaRPr lang="en-US" sz="1000" dirty="0"/>
+          </a:p>
+        </p:txBody>
+      </p:sp>
+      <p:sp>
+        <p:nvSpPr>
+          <p:cNvPr id="32" name="Shape 15"/>
+          <p:cNvSpPr/>
+          <p:nvPr/>
+        </p:nvSpPr>
+        <p:spPr>
+          <a:xfrm>
+            <a:off x="681487" y="4741000"/>
+            <a:ext cx="5026748" cy="909334"/>
+          </a:xfrm>
+          <a:prstGeom prst="roundRect">
+            <a:avLst>
+              <a:gd name="adj" fmla="val 7000"/>
+            </a:avLst>
+          </a:prstGeom>
+          <a:solidFill>
+            <a:schemeClr val="accent6">
+              <a:lumMod val="20000"/>
+              <a:lumOff val="80000"/>
+            </a:schemeClr>
+          </a:solidFill>
+          <a:ln w="9525">
+            <a:solidFill>
+              <a:schemeClr val="accent6">
+                <a:lumMod val="50000"/>
+              </a:schemeClr>
+            </a:solidFill>
+            <a:prstDash val="solid"/>
+          </a:ln>
+        </p:spPr>
+      </p:sp>
+      <p:sp>
+        <p:nvSpPr>
+          <p:cNvPr id="35" name="Text 17"/>
+          <p:cNvSpPr txBox="1"/>
+          <p:nvPr/>
+        </p:nvSpPr>
+        <p:spPr>
+          <a:xfrm>
+            <a:off x="1026507" y="4831933"/>
+            <a:ext cx="4526280" cy="254614"/>
+          </a:xfrm>
+          <a:prstGeom prst="rect">
+            <a:avLst/>
+          </a:prstGeom>
+          <a:noFill/>
+          <a:ln/>
+        </p:spPr>
+        <p:txBody>
+          <a:bodyPr wrap="square" lIns="0" tIns="0" rIns="0" bIns="0" rtlCol="0" anchor="ctr"/>
+          <a:lstStyle/>
+          <a:p>
+            <a:pPr marL="0" indent="0">
+              <a:buNone/>
+            </a:pPr>
+            <a:r>
+              <a:rPr lang="en-US" sz="1250" b="1" dirty="0">
+                <a:solidFill>
+                  <a:srgbClr val="12213B"/>
+                </a:solidFill>
+                <a:latin typeface="Calibri" pitchFamily="34" charset="0"/>
+                <a:ea typeface="Calibri" pitchFamily="34" charset="-122"/>
+                <a:cs typeface="Calibri" pitchFamily="34" charset="-120"/>
+              </a:rPr>
+              <a:t>Distributed task allocation</a:t>
+            </a:r>
+            <a:endParaRPr lang="en-US" sz="1250" dirty="0"/>
+          </a:p>
+        </p:txBody>
+      </p:sp>
+      <p:sp>
+        <p:nvSpPr>
+          <p:cNvPr id="36" name="Text 18"/>
+          <p:cNvSpPr txBox="1"/>
+          <p:nvPr/>
+        </p:nvSpPr>
+        <p:spPr>
+          <a:xfrm>
+            <a:off x="1026507" y="5086547"/>
+            <a:ext cx="4526280" cy="472854"/>
+          </a:xfrm>
+          <a:prstGeom prst="rect">
+            <a:avLst/>
+          </a:prstGeom>
+          <a:noFill/>
+          <a:ln/>
+        </p:spPr>
+        <p:txBody>
+          <a:bodyPr wrap="square" lIns="0" tIns="0" rIns="0" bIns="0" rtlCol="0" anchor="ctr"/>
+          <a:lstStyle/>
+          <a:p>
+            <a:pPr marL="0" indent="0">
+              <a:buNone/>
+            </a:pPr>
+            <a:r>
+              <a:rPr lang="en-US" sz="1000" dirty="0">
+                <a:solidFill>
+                  <a:srgbClr val="6B7280"/>
+                </a:solidFill>
+                <a:latin typeface="Calibri" pitchFamily="34" charset="0"/>
+                <a:ea typeface="Calibri" pitchFamily="34" charset="-122"/>
+                <a:cs typeface="Calibri" pitchFamily="34" charset="-120"/>
+              </a:rPr>
+              <a:t>Robots bid for tasks via a decentralized auction; tasks are leased and reassigned automatically on timeout or failure.</a:t>
+            </a:r>
+            <a:endParaRPr lang="en-US" sz="1000" dirty="0"/>
+          </a:p>
+        </p:txBody>
+      </p:sp>
+      <p:sp>
+        <p:nvSpPr>
+          <p:cNvPr id="48" name="Text 19"/>
+          <p:cNvSpPr txBox="1"/>
+          <p:nvPr/>
+        </p:nvSpPr>
+        <p:spPr>
+          <a:xfrm>
+            <a:off x="6263640" y="2367638"/>
+            <a:ext cx="5572471" cy="261329"/>
+          </a:xfrm>
+          <a:prstGeom prst="rect">
+            <a:avLst/>
+          </a:prstGeom>
+          <a:noFill/>
+          <a:ln/>
+        </p:spPr>
+        <p:txBody>
+          <a:bodyPr wrap="square" lIns="0" tIns="0" rIns="0" bIns="0" rtlCol="0" anchor="ctr"/>
+          <a:lstStyle/>
+          <a:p>
+            <a:pPr marL="0" indent="0">
+              <a:buNone/>
+            </a:pPr>
+            <a:r>
+              <a:rPr lang="en-US" sz="1100" b="1" kern="0" spc="100" dirty="0">
+                <a:solidFill>
+                  <a:srgbClr val="0F6E56"/>
+                </a:solidFill>
+                <a:latin typeface="Calibri" pitchFamily="34" charset="0"/>
+                <a:ea typeface="Calibri" pitchFamily="34" charset="-122"/>
+                <a:cs typeface="Calibri" pitchFamily="34" charset="-120"/>
+              </a:rPr>
+              <a:t>RESILIENCE LADDER</a:t>
+            </a:r>
+            <a:endParaRPr lang="en-US" sz="1100" dirty="0"/>
+          </a:p>
+        </p:txBody>
+      </p:sp>
+      <p:sp>
+        <p:nvSpPr>
+          <p:cNvPr id="50" name="Shape 20"/>
+          <p:cNvSpPr/>
+          <p:nvPr/>
+        </p:nvSpPr>
+        <p:spPr>
+          <a:xfrm>
+            <a:off x="6263640" y="2677081"/>
+            <a:ext cx="5572471" cy="541325"/>
+          </a:xfrm>
+          <a:prstGeom prst="roundRect">
+            <a:avLst>
+              <a:gd name="adj" fmla="val 10345"/>
+            </a:avLst>
+          </a:prstGeom>
+          <a:solidFill>
+            <a:schemeClr val="bg1"/>
+          </a:solidFill>
+          <a:ln>
             <a:solidFill>
               <a:schemeClr val="tx1"/>
             </a:solidFill>
-            <a:ln/>
-          </p:spPr>
-        </p:sp>
-        <p:sp>
-          <p:nvSpPr>
-            <p:cNvPr id="25" name="Text 4"/>
-            <p:cNvSpPr txBox="1"/>
-            <p:nvPr/>
-          </p:nvSpPr>
-          <p:spPr>
-            <a:xfrm>
-              <a:off x="640080" y="1088136"/>
-              <a:ext cx="10881360" cy="256032"/>
-            </a:xfrm>
-            <a:prstGeom prst="rect">
-              <a:avLst/>
-            </a:prstGeom>
-            <a:noFill/>
-            <a:ln/>
-          </p:spPr>
-          <p:txBody>
-            <a:bodyPr wrap="square" lIns="0" tIns="0" rIns="0" bIns="0" rtlCol="0" anchor="ctr"/>
-            <a:lstStyle/>
-            <a:p>
-              <a:pPr marL="0" indent="0">
-                <a:buNone/>
-              </a:pPr>
-              <a:r>
-                <a:rPr lang="en-US" sz="1250" b="1" kern="0" spc="50" dirty="0">
-                  <a:solidFill>
-                    <a:srgbClr val="E2B93B"/>
-                  </a:solidFill>
-                  <a:latin typeface="Calibri" pitchFamily="34" charset="0"/>
-                  <a:ea typeface="Calibri" pitchFamily="34" charset="-122"/>
-                  <a:cs typeface="Calibri" pitchFamily="34" charset="-120"/>
-                </a:rPr>
-                <a:t>CORE </a:t>
-              </a:r>
-              <a:r>
-                <a:rPr lang="en-US" sz="1250" b="1" kern="0" spc="50" dirty="0" smtClean="0">
-                  <a:solidFill>
-                    <a:srgbClr val="E2B93B"/>
-                  </a:solidFill>
-                  <a:ea typeface="Calibri" pitchFamily="34" charset="-122"/>
-                  <a:cs typeface="Calibri" pitchFamily="34" charset="-120"/>
-                </a:rPr>
-                <a:t>UNIQUENESS</a:t>
-              </a:r>
-              <a:r>
-                <a:rPr lang="en-US" sz="1250" b="1" kern="0" spc="50" dirty="0" smtClean="0">
-                  <a:solidFill>
-                    <a:srgbClr val="E2B93B"/>
-                  </a:solidFill>
-                  <a:latin typeface="Calibri" pitchFamily="34" charset="0"/>
-                  <a:ea typeface="Calibri" pitchFamily="34" charset="-122"/>
-                  <a:cs typeface="Calibri" pitchFamily="34" charset="-120"/>
-                </a:rPr>
-                <a:t> </a:t>
-              </a:r>
-              <a:r>
-                <a:rPr lang="en-US" sz="1250" b="1" kern="0" spc="50" dirty="0">
-                  <a:solidFill>
-                    <a:srgbClr val="E2B93B"/>
-                  </a:solidFill>
-                  <a:latin typeface="Calibri" pitchFamily="34" charset="0"/>
-                  <a:ea typeface="Calibri" pitchFamily="34" charset="-122"/>
-                  <a:cs typeface="Calibri" pitchFamily="34" charset="-120"/>
-                </a:rPr>
-                <a:t>— DECENTRALIZED, EDGE-FIRST COORDINATION</a:t>
-              </a:r>
-              <a:endParaRPr lang="en-US" sz="1250" dirty="0"/>
-            </a:p>
-          </p:txBody>
-        </p:sp>
-        <p:sp>
-          <p:nvSpPr>
-            <p:cNvPr id="26" name="Text 5"/>
-            <p:cNvSpPr txBox="1"/>
-            <p:nvPr/>
-          </p:nvSpPr>
-          <p:spPr>
-            <a:xfrm>
-              <a:off x="640080" y="1335024"/>
-              <a:ext cx="10881360" cy="256032"/>
-            </a:xfrm>
-            <a:prstGeom prst="rect">
-              <a:avLst/>
-            </a:prstGeom>
-            <a:noFill/>
-            <a:ln/>
-          </p:spPr>
-          <p:txBody>
-            <a:bodyPr wrap="square" lIns="0" tIns="0" rIns="0" bIns="0" rtlCol="0" anchor="ctr"/>
-            <a:lstStyle/>
-            <a:p>
-              <a:pPr marL="0" indent="0">
-                <a:buNone/>
-              </a:pPr>
-              <a:r>
-                <a:rPr lang="en-US" sz="1100" dirty="0">
-                  <a:solidFill>
-                    <a:srgbClr val="E8ECF3"/>
-                  </a:solidFill>
-                  <a:latin typeface="Calibri" pitchFamily="34" charset="0"/>
-                  <a:ea typeface="Calibri" pitchFamily="34" charset="-122"/>
-                  <a:cs typeface="Calibri" pitchFamily="34" charset="-120"/>
-                </a:rPr>
-                <a:t>Every AMR carries the full coordination + autonomy stack — no central server sits in the control or safety loop, at any operating tier.</a:t>
-              </a:r>
-              <a:endParaRPr lang="en-US" sz="1100" dirty="0"/>
-            </a:p>
-          </p:txBody>
-        </p:sp>
-      </p:grpSp>
-      <p:grpSp>
-        <p:nvGrpSpPr>
-          <p:cNvPr id="27" name="Group 26"/>
-          <p:cNvGrpSpPr/>
+          </a:ln>
+        </p:spPr>
+        <p:txBody>
+          <a:bodyPr/>
+          <a:lstStyle/>
+          <a:p>
+            <a:endParaRPr lang="en-US" dirty="0"/>
+          </a:p>
+        </p:txBody>
+      </p:sp>
+      <p:sp>
+        <p:nvSpPr>
+          <p:cNvPr id="51" name="Text 21"/>
+          <p:cNvSpPr txBox="1"/>
           <p:nvPr/>
-        </p:nvGrpSpPr>
-        <p:grpSpPr>
-          <a:xfrm>
-            <a:off x="221835" y="2367638"/>
-            <a:ext cx="5486400" cy="3282696"/>
-            <a:chOff x="457200" y="1783080"/>
-            <a:chExt cx="5486400" cy="3300984"/>
-          </a:xfrm>
-        </p:grpSpPr>
-        <p:sp>
-          <p:nvSpPr>
-            <p:cNvPr id="28" name="Text 6"/>
-            <p:cNvSpPr txBox="1"/>
-            <p:nvPr/>
-          </p:nvSpPr>
-          <p:spPr>
-            <a:xfrm>
-              <a:off x="457200" y="1783080"/>
-              <a:ext cx="5486400" cy="256032"/>
-            </a:xfrm>
-            <a:prstGeom prst="rect">
-              <a:avLst/>
-            </a:prstGeom>
-            <a:noFill/>
-            <a:ln/>
-          </p:spPr>
-          <p:txBody>
-            <a:bodyPr wrap="square" lIns="0" tIns="0" rIns="0" bIns="0" rtlCol="0" anchor="ctr"/>
-            <a:lstStyle/>
-            <a:p>
-              <a:pPr marL="0" indent="0">
-                <a:buNone/>
-              </a:pPr>
-              <a:r>
-                <a:rPr lang="en-US" sz="1100" b="1" kern="0" spc="100" dirty="0">
-                  <a:solidFill>
-                    <a:srgbClr val="0F6E56"/>
-                  </a:solidFill>
-                  <a:latin typeface="Calibri" pitchFamily="34" charset="0"/>
-                  <a:ea typeface="Calibri" pitchFamily="34" charset="-122"/>
-                  <a:cs typeface="Calibri" pitchFamily="34" charset="-120"/>
-                </a:rPr>
-                <a:t>CORE COORDINATION MECHANISMS</a:t>
-              </a:r>
-              <a:endParaRPr lang="en-US" sz="1100" dirty="0"/>
-            </a:p>
-          </p:txBody>
-        </p:sp>
-        <p:grpSp>
-          <p:nvGrpSpPr>
-            <p:cNvPr id="29" name="Group 49"/>
-            <p:cNvGrpSpPr/>
-            <p:nvPr/>
-          </p:nvGrpSpPr>
-          <p:grpSpPr>
-            <a:xfrm>
-              <a:off x="457200" y="2084832"/>
-              <a:ext cx="5486400" cy="914400"/>
-              <a:chOff x="457200" y="2084832"/>
-              <a:chExt cx="5486400" cy="914400"/>
-            </a:xfrm>
-          </p:grpSpPr>
-          <p:sp>
-            <p:nvSpPr>
-              <p:cNvPr id="43" name="Shape 7"/>
-              <p:cNvSpPr/>
-              <p:nvPr/>
-            </p:nvSpPr>
-            <p:spPr>
-              <a:xfrm>
-                <a:off x="457200" y="2084832"/>
-                <a:ext cx="5486400" cy="914400"/>
-              </a:xfrm>
-              <a:prstGeom prst="roundRect">
-                <a:avLst>
-                  <a:gd name="adj" fmla="val 7000"/>
-                </a:avLst>
-              </a:prstGeom>
-              <a:solidFill>
-                <a:srgbClr val="FFFFFF"/>
-              </a:solidFill>
-              <a:ln w="9525">
-                <a:solidFill>
-                  <a:srgbClr val="E2E5EA"/>
-                </a:solidFill>
-                <a:prstDash val="solid"/>
-              </a:ln>
-            </p:spPr>
-          </p:sp>
-          <p:sp>
-            <p:nvSpPr>
-              <p:cNvPr id="44" name="Shape 8"/>
-              <p:cNvSpPr/>
-              <p:nvPr/>
-            </p:nvSpPr>
-            <p:spPr>
-              <a:xfrm>
-                <a:off x="621792" y="2249424"/>
-                <a:ext cx="457200" cy="457200"/>
-              </a:xfrm>
-              <a:prstGeom prst="ellipse">
-                <a:avLst/>
-              </a:prstGeom>
-              <a:solidFill>
-                <a:srgbClr val="1D9E75"/>
-              </a:solidFill>
-              <a:ln/>
-            </p:spPr>
-          </p:sp>
-          <p:pic>
-            <p:nvPicPr>
-              <p:cNvPr id="45" name="Image 1" descr="/home/claude/harmoni_ppt/icons/route.png"/>
-              <p:cNvPicPr>
-                <a:picLocks noChangeAspect="1"/>
-              </p:cNvPicPr>
-              <p:nvPr/>
-            </p:nvPicPr>
-            <p:blipFill>
-              <a:blip r:embed="rId5"/>
-              <a:stretch>
-                <a:fillRect/>
-              </a:stretch>
-            </p:blipFill>
-            <p:spPr>
-              <a:xfrm>
-                <a:off x="740664" y="2368296"/>
-                <a:ext cx="219456" cy="219456"/>
-              </a:xfrm>
-              <a:prstGeom prst="rect">
-                <a:avLst/>
-              </a:prstGeom>
-            </p:spPr>
-          </p:pic>
-          <p:sp>
-            <p:nvSpPr>
-              <p:cNvPr id="46" name="Text 9"/>
-              <p:cNvSpPr txBox="1"/>
-              <p:nvPr/>
-            </p:nvSpPr>
-            <p:spPr>
-              <a:xfrm>
-                <a:off x="1261872" y="2176272"/>
-                <a:ext cx="4526280" cy="256032"/>
-              </a:xfrm>
-              <a:prstGeom prst="rect">
-                <a:avLst/>
-              </a:prstGeom>
-              <a:noFill/>
-              <a:ln/>
-            </p:spPr>
-            <p:txBody>
-              <a:bodyPr wrap="square" lIns="0" tIns="0" rIns="0" bIns="0" rtlCol="0" anchor="ctr"/>
-              <a:lstStyle/>
-              <a:p>
-                <a:pPr marL="0" indent="0">
-                  <a:buNone/>
-                </a:pPr>
-                <a:r>
-                  <a:rPr lang="en-US" sz="1250" b="1" dirty="0">
-                    <a:solidFill>
-                      <a:srgbClr val="12213B"/>
-                    </a:solidFill>
-                    <a:latin typeface="Calibri" pitchFamily="34" charset="0"/>
-                    <a:ea typeface="Calibri" pitchFamily="34" charset="-122"/>
-                    <a:cs typeface="Calibri" pitchFamily="34" charset="-120"/>
-                  </a:rPr>
-                  <a:t>Space-time </a:t>
-                </a:r>
-                <a:r>
-                  <a:rPr lang="en-US" sz="1250" b="1" dirty="0" smtClean="0">
-                    <a:solidFill>
-                      <a:srgbClr val="12213B"/>
-                    </a:solidFill>
-                    <a:latin typeface="Calibri" pitchFamily="34" charset="0"/>
-                    <a:ea typeface="Calibri" pitchFamily="34" charset="-122"/>
-                    <a:cs typeface="Calibri" pitchFamily="34" charset="-120"/>
-                  </a:rPr>
-                  <a:t>reservations</a:t>
-                </a:r>
-                <a:endParaRPr lang="en-US" sz="1250" dirty="0"/>
-              </a:p>
-            </p:txBody>
-          </p:sp>
-          <p:sp>
-            <p:nvSpPr>
-              <p:cNvPr id="47" name="Text 10"/>
-              <p:cNvSpPr txBox="1"/>
-              <p:nvPr/>
-            </p:nvSpPr>
-            <p:spPr>
-              <a:xfrm>
-                <a:off x="1261872" y="2450592"/>
-                <a:ext cx="4526280" cy="475488"/>
-              </a:xfrm>
-              <a:prstGeom prst="rect">
-                <a:avLst/>
-              </a:prstGeom>
-              <a:noFill/>
-              <a:ln/>
-            </p:spPr>
-            <p:txBody>
-              <a:bodyPr wrap="square" lIns="0" tIns="0" rIns="0" bIns="0" rtlCol="0" anchor="ctr"/>
-              <a:lstStyle/>
-              <a:p>
-                <a:pPr marL="0" indent="0">
-                  <a:buNone/>
-                </a:pPr>
-                <a:r>
-                  <a:rPr lang="en-US" sz="1000" dirty="0" smtClean="0">
-                    <a:solidFill>
-                      <a:srgbClr val="6B7280"/>
-                    </a:solidFill>
-                    <a:latin typeface="Calibri" pitchFamily="34" charset="0"/>
-                    <a:ea typeface="Calibri" pitchFamily="34" charset="-122"/>
-                    <a:cs typeface="Calibri" pitchFamily="34" charset="-120"/>
-                  </a:rPr>
-                  <a:t>Robots claim shared cells/aisles for specific time windows; conflicts break by a deterministic priority order.</a:t>
-                </a:r>
-                <a:endParaRPr lang="en-US" sz="1000" dirty="0"/>
-              </a:p>
-            </p:txBody>
-          </p:sp>
-        </p:grpSp>
-        <p:grpSp>
-          <p:nvGrpSpPr>
-            <p:cNvPr id="30" name="Group 51"/>
-            <p:cNvGrpSpPr/>
-            <p:nvPr/>
-          </p:nvGrpSpPr>
-          <p:grpSpPr>
-            <a:xfrm>
-              <a:off x="457200" y="3127248"/>
-              <a:ext cx="5486400" cy="914400"/>
-              <a:chOff x="457200" y="3127248"/>
-              <a:chExt cx="5486400" cy="914400"/>
-            </a:xfrm>
-          </p:grpSpPr>
-          <p:sp>
-            <p:nvSpPr>
-              <p:cNvPr id="37" name="Shape 11"/>
-              <p:cNvSpPr/>
-              <p:nvPr/>
-            </p:nvSpPr>
-            <p:spPr>
-              <a:xfrm>
-                <a:off x="457200" y="3127248"/>
-                <a:ext cx="5486400" cy="914400"/>
-              </a:xfrm>
-              <a:prstGeom prst="roundRect">
-                <a:avLst>
-                  <a:gd name="adj" fmla="val 7000"/>
-                </a:avLst>
-              </a:prstGeom>
-              <a:solidFill>
-                <a:srgbClr val="FFFFFF"/>
-              </a:solidFill>
-              <a:ln w="9525">
-                <a:solidFill>
-                  <a:srgbClr val="E2E5EA"/>
-                </a:solidFill>
-                <a:prstDash val="solid"/>
-              </a:ln>
-            </p:spPr>
-          </p:sp>
-          <p:grpSp>
-            <p:nvGrpSpPr>
-              <p:cNvPr id="38" name="Group 50"/>
-              <p:cNvGrpSpPr/>
-              <p:nvPr/>
-            </p:nvGrpSpPr>
-            <p:grpSpPr>
-              <a:xfrm>
-                <a:off x="621792" y="3291840"/>
-                <a:ext cx="457200" cy="457200"/>
-                <a:chOff x="621792" y="3291840"/>
-                <a:chExt cx="457200" cy="457200"/>
-              </a:xfrm>
-            </p:grpSpPr>
-            <p:sp>
-              <p:nvSpPr>
-                <p:cNvPr id="41" name="Shape 12"/>
-                <p:cNvSpPr/>
-                <p:nvPr/>
-              </p:nvSpPr>
-              <p:spPr>
-                <a:xfrm>
-                  <a:off x="621792" y="3291840"/>
-                  <a:ext cx="457200" cy="457200"/>
-                </a:xfrm>
-                <a:prstGeom prst="ellipse">
-                  <a:avLst/>
-                </a:prstGeom>
-                <a:solidFill>
-                  <a:srgbClr val="1D9E75"/>
-                </a:solidFill>
-                <a:ln/>
-              </p:spPr>
-            </p:sp>
-            <p:pic>
-              <p:nvPicPr>
-                <p:cNvPr id="42" name="Image 2" descr="/home/claude/harmoni_ppt/icons/ban.png"/>
-                <p:cNvPicPr>
-                  <a:picLocks noChangeAspect="1"/>
-                </p:cNvPicPr>
-                <p:nvPr/>
-              </p:nvPicPr>
-              <p:blipFill>
-                <a:blip r:embed="rId6"/>
-                <a:stretch>
-                  <a:fillRect/>
-                </a:stretch>
-              </p:blipFill>
-              <p:spPr>
-                <a:xfrm>
-                  <a:off x="740664" y="3410712"/>
-                  <a:ext cx="219456" cy="219456"/>
-                </a:xfrm>
-                <a:prstGeom prst="rect">
-                  <a:avLst/>
-                </a:prstGeom>
-              </p:spPr>
-            </p:pic>
-          </p:grpSp>
-          <p:sp>
-            <p:nvSpPr>
-              <p:cNvPr id="39" name="Text 13"/>
-              <p:cNvSpPr txBox="1"/>
-              <p:nvPr/>
-            </p:nvSpPr>
-            <p:spPr>
-              <a:xfrm>
-                <a:off x="1261872" y="3218688"/>
-                <a:ext cx="4526280" cy="256032"/>
-              </a:xfrm>
-              <a:prstGeom prst="rect">
-                <a:avLst/>
-              </a:prstGeom>
-              <a:noFill/>
-              <a:ln/>
-            </p:spPr>
-            <p:txBody>
-              <a:bodyPr wrap="square" lIns="0" tIns="0" rIns="0" bIns="0" rtlCol="0" anchor="ctr"/>
-              <a:lstStyle/>
-              <a:p>
-                <a:pPr marL="0" indent="0">
-                  <a:buNone/>
-                </a:pPr>
-                <a:r>
-                  <a:rPr lang="en-US" sz="1250" b="1" dirty="0">
-                    <a:solidFill>
-                      <a:srgbClr val="12213B"/>
-                    </a:solidFill>
-                    <a:latin typeface="Calibri" pitchFamily="34" charset="0"/>
-                    <a:ea typeface="Calibri" pitchFamily="34" charset="-122"/>
-                    <a:cs typeface="Calibri" pitchFamily="34" charset="-120"/>
-                  </a:rPr>
-                  <a:t>Deadlock detection &amp; resolution</a:t>
-                </a:r>
-                <a:endParaRPr lang="en-US" sz="1250" dirty="0"/>
-              </a:p>
-            </p:txBody>
-          </p:sp>
-          <p:sp>
-            <p:nvSpPr>
-              <p:cNvPr id="40" name="Text 14"/>
-              <p:cNvSpPr txBox="1"/>
-              <p:nvPr/>
-            </p:nvSpPr>
-            <p:spPr>
-              <a:xfrm>
-                <a:off x="1261872" y="3493008"/>
-                <a:ext cx="4526280" cy="475488"/>
-              </a:xfrm>
-              <a:prstGeom prst="rect">
-                <a:avLst/>
-              </a:prstGeom>
-              <a:noFill/>
-              <a:ln/>
-            </p:spPr>
-            <p:txBody>
-              <a:bodyPr wrap="square" lIns="0" tIns="0" rIns="0" bIns="0" rtlCol="0" anchor="ctr"/>
-              <a:lstStyle/>
-              <a:p>
-                <a:pPr marL="0" indent="0">
-                  <a:buNone/>
-                </a:pPr>
-                <a:r>
-                  <a:rPr lang="en-US" sz="1000" dirty="0">
-                    <a:solidFill>
-                      <a:srgbClr val="6B7280"/>
-                    </a:solidFill>
-                    <a:latin typeface="Calibri" pitchFamily="34" charset="0"/>
-                    <a:ea typeface="Calibri" pitchFamily="34" charset="-122"/>
-                    <a:cs typeface="Calibri" pitchFamily="34" charset="-120"/>
-                  </a:rPr>
-                  <a:t>A wait-for-graph flags cyclic waits across robots; the lowest-priority robot yields to break the cycle.</a:t>
-                </a:r>
-                <a:endParaRPr lang="en-US" sz="1000" dirty="0"/>
-              </a:p>
-            </p:txBody>
-          </p:sp>
-        </p:grpSp>
-        <p:grpSp>
-          <p:nvGrpSpPr>
-            <p:cNvPr id="31" name="Group 52"/>
-            <p:cNvGrpSpPr/>
-            <p:nvPr/>
-          </p:nvGrpSpPr>
-          <p:grpSpPr>
-            <a:xfrm>
-              <a:off x="457200" y="4169664"/>
-              <a:ext cx="5486400" cy="914400"/>
-              <a:chOff x="457200" y="4169664"/>
-              <a:chExt cx="5486400" cy="914400"/>
-            </a:xfrm>
-          </p:grpSpPr>
-          <p:sp>
-            <p:nvSpPr>
-              <p:cNvPr id="32" name="Shape 15"/>
-              <p:cNvSpPr/>
-              <p:nvPr/>
-            </p:nvSpPr>
-            <p:spPr>
-              <a:xfrm>
-                <a:off x="457200" y="4169664"/>
-                <a:ext cx="5486400" cy="914400"/>
-              </a:xfrm>
-              <a:prstGeom prst="roundRect">
-                <a:avLst>
-                  <a:gd name="adj" fmla="val 7000"/>
-                </a:avLst>
-              </a:prstGeom>
-              <a:solidFill>
-                <a:srgbClr val="FFFFFF"/>
-              </a:solidFill>
-              <a:ln w="9525">
-                <a:solidFill>
-                  <a:srgbClr val="E2E5EA"/>
-                </a:solidFill>
-                <a:prstDash val="solid"/>
-              </a:ln>
-            </p:spPr>
-          </p:sp>
-          <p:sp>
-            <p:nvSpPr>
-              <p:cNvPr id="33" name="Shape 16"/>
-              <p:cNvSpPr/>
-              <p:nvPr/>
-            </p:nvSpPr>
-            <p:spPr>
-              <a:xfrm>
-                <a:off x="621792" y="4334256"/>
-                <a:ext cx="457200" cy="457200"/>
-              </a:xfrm>
-              <a:prstGeom prst="ellipse">
-                <a:avLst/>
-              </a:prstGeom>
-              <a:solidFill>
-                <a:srgbClr val="1D9E75"/>
-              </a:solidFill>
-              <a:ln/>
-            </p:spPr>
-          </p:sp>
-          <p:pic>
-            <p:nvPicPr>
-              <p:cNvPr id="34" name="Image 3" descr="/home/claude/harmoni_ppt/icons/network.png"/>
-              <p:cNvPicPr>
-                <a:picLocks noChangeAspect="1"/>
-              </p:cNvPicPr>
-              <p:nvPr/>
-            </p:nvPicPr>
-            <p:blipFill>
-              <a:blip r:embed="rId7"/>
-              <a:stretch>
-                <a:fillRect/>
-              </a:stretch>
-            </p:blipFill>
-            <p:spPr>
-              <a:xfrm>
-                <a:off x="740664" y="4453128"/>
-                <a:ext cx="219456" cy="219456"/>
-              </a:xfrm>
-              <a:prstGeom prst="rect">
-                <a:avLst/>
-              </a:prstGeom>
-            </p:spPr>
-          </p:pic>
-          <p:sp>
-            <p:nvSpPr>
-              <p:cNvPr id="35" name="Text 17"/>
-              <p:cNvSpPr txBox="1"/>
-              <p:nvPr/>
-            </p:nvSpPr>
-            <p:spPr>
-              <a:xfrm>
-                <a:off x="1261872" y="4261104"/>
-                <a:ext cx="4526280" cy="256032"/>
-              </a:xfrm>
-              <a:prstGeom prst="rect">
-                <a:avLst/>
-              </a:prstGeom>
-              <a:noFill/>
-              <a:ln/>
-            </p:spPr>
-            <p:txBody>
-              <a:bodyPr wrap="square" lIns="0" tIns="0" rIns="0" bIns="0" rtlCol="0" anchor="ctr"/>
-              <a:lstStyle/>
-              <a:p>
-                <a:pPr marL="0" indent="0">
-                  <a:buNone/>
-                </a:pPr>
-                <a:r>
-                  <a:rPr lang="en-US" sz="1250" b="1" dirty="0">
-                    <a:solidFill>
-                      <a:srgbClr val="12213B"/>
-                    </a:solidFill>
-                    <a:latin typeface="Calibri" pitchFamily="34" charset="0"/>
-                    <a:ea typeface="Calibri" pitchFamily="34" charset="-122"/>
-                    <a:cs typeface="Calibri" pitchFamily="34" charset="-120"/>
-                  </a:rPr>
-                  <a:t>Distributed task allocation</a:t>
-                </a:r>
-                <a:endParaRPr lang="en-US" sz="1250" dirty="0"/>
-              </a:p>
-            </p:txBody>
-          </p:sp>
-          <p:sp>
-            <p:nvSpPr>
-              <p:cNvPr id="36" name="Text 18"/>
-              <p:cNvSpPr txBox="1"/>
-              <p:nvPr/>
-            </p:nvSpPr>
-            <p:spPr>
-              <a:xfrm>
-                <a:off x="1261872" y="4535424"/>
-                <a:ext cx="4526280" cy="475488"/>
-              </a:xfrm>
-              <a:prstGeom prst="rect">
-                <a:avLst/>
-              </a:prstGeom>
-              <a:noFill/>
-              <a:ln/>
-            </p:spPr>
-            <p:txBody>
-              <a:bodyPr wrap="square" lIns="0" tIns="0" rIns="0" bIns="0" rtlCol="0" anchor="ctr"/>
-              <a:lstStyle/>
-              <a:p>
-                <a:pPr marL="0" indent="0">
-                  <a:buNone/>
-                </a:pPr>
-                <a:r>
-                  <a:rPr lang="en-US" sz="1000" dirty="0">
-                    <a:solidFill>
-                      <a:srgbClr val="6B7280"/>
-                    </a:solidFill>
-                    <a:latin typeface="Calibri" pitchFamily="34" charset="0"/>
-                    <a:ea typeface="Calibri" pitchFamily="34" charset="-122"/>
-                    <a:cs typeface="Calibri" pitchFamily="34" charset="-120"/>
-                  </a:rPr>
-                  <a:t>Robots bid for tasks via a decentralized auction; tasks are leased and reassigned automatically on timeout or failure.</a:t>
-                </a:r>
-                <a:endParaRPr lang="en-US" sz="1000" dirty="0"/>
-              </a:p>
-            </p:txBody>
-          </p:sp>
-        </p:grpSp>
-      </p:grpSp>
-      <p:grpSp>
-        <p:nvGrpSpPr>
-          <p:cNvPr id="73" name="Group 72"/>
-          <p:cNvGrpSpPr/>
+        </p:nvSpPr>
+        <p:spPr>
+          <a:xfrm>
+            <a:off x="6497777" y="2705081"/>
+            <a:ext cx="5151024" cy="251996"/>
+          </a:xfrm>
+          <a:prstGeom prst="rect">
+            <a:avLst/>
+          </a:prstGeom>
+          <a:noFill/>
+          <a:ln/>
+        </p:spPr>
+        <p:txBody>
+          <a:bodyPr wrap="square" lIns="0" tIns="0" rIns="0" bIns="0" rtlCol="0" anchor="ctr"/>
+          <a:lstStyle/>
+          <a:p>
+            <a:pPr marL="0" indent="0">
+              <a:buNone/>
+            </a:pPr>
+            <a:r>
+              <a:rPr lang="en-US" sz="1200" b="1" dirty="0">
+                <a:latin typeface="Calibri" pitchFamily="34" charset="0"/>
+                <a:ea typeface="Calibri" pitchFamily="34" charset="-122"/>
+                <a:cs typeface="Calibri" pitchFamily="34" charset="-120"/>
+              </a:rPr>
+              <a:t>1 · Infrastructure mode</a:t>
+            </a:r>
+            <a:endParaRPr lang="en-US" sz="1200" dirty="0"/>
+          </a:p>
+        </p:txBody>
+      </p:sp>
+      <p:sp>
+        <p:nvSpPr>
+          <p:cNvPr id="52" name="Text 22"/>
+          <p:cNvSpPr txBox="1"/>
           <p:nvPr/>
-        </p:nvGrpSpPr>
-        <p:grpSpPr>
-          <a:xfrm>
-            <a:off x="6263640" y="2367638"/>
-            <a:ext cx="5572471" cy="3538728"/>
-            <a:chOff x="6263640" y="2321158"/>
-            <a:chExt cx="5440680" cy="3466994"/>
-          </a:xfrm>
-        </p:grpSpPr>
-        <p:sp>
-          <p:nvSpPr>
-            <p:cNvPr id="48" name="Text 19"/>
-            <p:cNvSpPr txBox="1"/>
-            <p:nvPr/>
-          </p:nvSpPr>
-          <p:spPr>
-            <a:xfrm>
-              <a:off x="6263640" y="2321158"/>
-              <a:ext cx="5440680" cy="256032"/>
-            </a:xfrm>
-            <a:prstGeom prst="rect">
-              <a:avLst/>
-            </a:prstGeom>
-            <a:noFill/>
-            <a:ln/>
-          </p:spPr>
-          <p:txBody>
-            <a:bodyPr wrap="square" lIns="0" tIns="0" rIns="0" bIns="0" rtlCol="0" anchor="ctr"/>
-            <a:lstStyle/>
-            <a:p>
-              <a:pPr marL="0" indent="0">
-                <a:buNone/>
-              </a:pPr>
-              <a:r>
-                <a:rPr lang="en-US" sz="1100" b="1" kern="0" spc="100" dirty="0">
-                  <a:solidFill>
-                    <a:srgbClr val="0F6E56"/>
-                  </a:solidFill>
-                  <a:latin typeface="Calibri" pitchFamily="34" charset="0"/>
-                  <a:ea typeface="Calibri" pitchFamily="34" charset="-122"/>
-                  <a:cs typeface="Calibri" pitchFamily="34" charset="-120"/>
-                </a:rPr>
-                <a:t>RESILIENCE LADDER</a:t>
-              </a:r>
-              <a:endParaRPr lang="en-US" sz="1100" dirty="0"/>
-            </a:p>
-          </p:txBody>
-        </p:sp>
-        <p:grpSp>
-          <p:nvGrpSpPr>
-            <p:cNvPr id="49" name="Group 48"/>
-            <p:cNvGrpSpPr/>
-            <p:nvPr/>
-          </p:nvGrpSpPr>
-          <p:grpSpPr>
-            <a:xfrm>
-              <a:off x="6263640" y="2624328"/>
-              <a:ext cx="5440680" cy="530352"/>
-              <a:chOff x="6263640" y="2084832"/>
-              <a:chExt cx="5440680" cy="530352"/>
-            </a:xfrm>
-          </p:grpSpPr>
-          <p:sp>
-            <p:nvSpPr>
-              <p:cNvPr id="50" name="Shape 20"/>
-              <p:cNvSpPr/>
-              <p:nvPr/>
-            </p:nvSpPr>
-            <p:spPr>
-              <a:xfrm>
-                <a:off x="6263640" y="2084832"/>
-                <a:ext cx="5440680" cy="530352"/>
-              </a:xfrm>
-              <a:prstGeom prst="roundRect">
-                <a:avLst>
-                  <a:gd name="adj" fmla="val 10345"/>
-                </a:avLst>
-              </a:prstGeom>
-              <a:solidFill>
-                <a:srgbClr val="1D9E75"/>
-              </a:solidFill>
-              <a:ln/>
-            </p:spPr>
-            <p:txBody>
-              <a:bodyPr/>
-              <a:lstStyle/>
-              <a:p>
-                <a:endParaRPr lang="en-US" dirty="0"/>
-              </a:p>
-            </p:txBody>
-          </p:sp>
-          <p:sp>
-            <p:nvSpPr>
-              <p:cNvPr id="51" name="Text 21"/>
-              <p:cNvSpPr txBox="1"/>
-              <p:nvPr/>
-            </p:nvSpPr>
-            <p:spPr>
-              <a:xfrm>
-                <a:off x="6492240" y="2112264"/>
-                <a:ext cx="5029200" cy="246888"/>
-              </a:xfrm>
-              <a:prstGeom prst="rect">
-                <a:avLst/>
-              </a:prstGeom>
-              <a:noFill/>
-              <a:ln/>
-            </p:spPr>
-            <p:txBody>
-              <a:bodyPr wrap="square" lIns="0" tIns="0" rIns="0" bIns="0" rtlCol="0" anchor="ctr"/>
-              <a:lstStyle/>
-              <a:p>
-                <a:pPr marL="0" indent="0">
-                  <a:buNone/>
-                </a:pPr>
-                <a:r>
-                  <a:rPr lang="en-US" sz="1200" b="1" dirty="0">
-                    <a:solidFill>
-                      <a:srgbClr val="FFFFFF"/>
-                    </a:solidFill>
-                    <a:latin typeface="Calibri" pitchFamily="34" charset="0"/>
-                    <a:ea typeface="Calibri" pitchFamily="34" charset="-122"/>
-                    <a:cs typeface="Calibri" pitchFamily="34" charset="-120"/>
-                  </a:rPr>
-                  <a:t>1 · Infrastructure mode</a:t>
-                </a:r>
-                <a:endParaRPr lang="en-US" sz="1200" dirty="0"/>
-              </a:p>
-            </p:txBody>
-          </p:sp>
-          <p:sp>
-            <p:nvSpPr>
-              <p:cNvPr id="52" name="Text 22"/>
-              <p:cNvSpPr txBox="1"/>
-              <p:nvPr/>
-            </p:nvSpPr>
-            <p:spPr>
-              <a:xfrm>
-                <a:off x="6492240" y="2359152"/>
-                <a:ext cx="5029200" cy="219456"/>
-              </a:xfrm>
-              <a:prstGeom prst="rect">
-                <a:avLst/>
-              </a:prstGeom>
-              <a:noFill/>
-              <a:ln/>
-            </p:spPr>
-            <p:txBody>
-              <a:bodyPr wrap="square" lIns="0" tIns="0" rIns="0" bIns="0" rtlCol="0" anchor="ctr"/>
-              <a:lstStyle/>
-              <a:p>
-                <a:pPr marL="0" indent="0">
-                  <a:buNone/>
-                </a:pPr>
-                <a:r>
-                  <a:rPr lang="en-US" sz="950" dirty="0">
-                    <a:solidFill>
-                      <a:srgbClr val="EAF3EE"/>
-                    </a:solidFill>
-                    <a:latin typeface="Calibri" pitchFamily="34" charset="0"/>
-                    <a:ea typeface="Calibri" pitchFamily="34" charset="-122"/>
-                    <a:cs typeface="Calibri" pitchFamily="34" charset="-120"/>
-                  </a:rPr>
-                  <a:t>Wi-Fi + WMS — full fleet visibility</a:t>
-                </a:r>
-                <a:endParaRPr lang="en-US" sz="950" dirty="0"/>
-              </a:p>
-            </p:txBody>
-          </p:sp>
-        </p:grpSp>
-        <p:sp>
-          <p:nvSpPr>
-            <p:cNvPr id="53" name="Shape 23"/>
-            <p:cNvSpPr/>
-            <p:nvPr/>
-          </p:nvSpPr>
-          <p:spPr>
-            <a:xfrm>
-              <a:off x="8887968" y="3154680"/>
-              <a:ext cx="237744" cy="128016"/>
-            </a:xfrm>
-            <a:prstGeom prst="downArrow">
-              <a:avLst/>
-            </a:prstGeom>
+        </p:nvSpPr>
+        <p:spPr>
+          <a:xfrm>
+            <a:off x="6497777" y="2957077"/>
+            <a:ext cx="5151024" cy="223997"/>
+          </a:xfrm>
+          <a:prstGeom prst="rect">
+            <a:avLst/>
+          </a:prstGeom>
+          <a:noFill/>
+          <a:ln/>
+        </p:spPr>
+        <p:txBody>
+          <a:bodyPr wrap="square" lIns="0" tIns="0" rIns="0" bIns="0" rtlCol="0" anchor="ctr"/>
+          <a:lstStyle/>
+          <a:p>
+            <a:pPr marL="0" indent="0">
+              <a:buNone/>
+            </a:pPr>
+            <a:r>
+              <a:rPr lang="en-US" sz="950" dirty="0">
+                <a:latin typeface="Calibri" pitchFamily="34" charset="0"/>
+                <a:ea typeface="Calibri" pitchFamily="34" charset="-122"/>
+                <a:cs typeface="Calibri" pitchFamily="34" charset="-120"/>
+              </a:rPr>
+              <a:t>Wi-Fi + WMS — full fleet visibility</a:t>
+            </a:r>
+            <a:endParaRPr lang="en-US" sz="950" dirty="0"/>
+          </a:p>
+        </p:txBody>
+      </p:sp>
+      <p:sp>
+        <p:nvSpPr>
+          <p:cNvPr id="53" name="Shape 23"/>
+          <p:cNvSpPr/>
+          <p:nvPr/>
+        </p:nvSpPr>
+        <p:spPr>
+          <a:xfrm>
+            <a:off x="8951538" y="3218406"/>
+            <a:ext cx="243503" cy="130665"/>
+          </a:xfrm>
+          <a:prstGeom prst="downArrow">
+            <a:avLst/>
+          </a:prstGeom>
+          <a:solidFill>
+            <a:srgbClr val="6B7280"/>
+          </a:solidFill>
+          <a:ln/>
+        </p:spPr>
+      </p:sp>
+      <p:sp>
+        <p:nvSpPr>
+          <p:cNvPr id="55" name="Shape 24"/>
+          <p:cNvSpPr/>
+          <p:nvPr/>
+        </p:nvSpPr>
+        <p:spPr>
+          <a:xfrm>
+            <a:off x="6263640" y="3349071"/>
+            <a:ext cx="5572471" cy="541325"/>
+          </a:xfrm>
+          <a:prstGeom prst="roundRect">
+            <a:avLst>
+              <a:gd name="adj" fmla="val 10345"/>
+            </a:avLst>
+          </a:prstGeom>
+          <a:solidFill>
+            <a:schemeClr val="bg1"/>
+          </a:solidFill>
+          <a:ln>
             <a:solidFill>
-              <a:srgbClr val="6B7280"/>
+              <a:schemeClr val="tx1"/>
             </a:solidFill>
-            <a:ln/>
-          </p:spPr>
-        </p:sp>
-        <p:grpSp>
-          <p:nvGrpSpPr>
-            <p:cNvPr id="54" name="Group 53"/>
-            <p:cNvGrpSpPr/>
-            <p:nvPr/>
-          </p:nvGrpSpPr>
-          <p:grpSpPr>
-            <a:xfrm>
-              <a:off x="6263640" y="3282696"/>
-              <a:ext cx="5440680" cy="530352"/>
-              <a:chOff x="6263640" y="2743200"/>
-              <a:chExt cx="5440680" cy="530352"/>
-            </a:xfrm>
-          </p:grpSpPr>
-          <p:sp>
-            <p:nvSpPr>
-              <p:cNvPr id="55" name="Shape 24"/>
-              <p:cNvSpPr/>
-              <p:nvPr/>
-            </p:nvSpPr>
-            <p:spPr>
-              <a:xfrm>
-                <a:off x="6263640" y="2743200"/>
-                <a:ext cx="5440680" cy="530352"/>
-              </a:xfrm>
-              <a:prstGeom prst="roundRect">
-                <a:avLst>
-                  <a:gd name="adj" fmla="val 10345"/>
-                </a:avLst>
-              </a:prstGeom>
-              <a:solidFill>
-                <a:srgbClr val="0F6E56"/>
-              </a:solidFill>
-              <a:ln/>
-            </p:spPr>
-          </p:sp>
-          <p:sp>
-            <p:nvSpPr>
-              <p:cNvPr id="56" name="Text 25"/>
-              <p:cNvSpPr txBox="1"/>
-              <p:nvPr/>
-            </p:nvSpPr>
-            <p:spPr>
-              <a:xfrm>
-                <a:off x="6492240" y="2770632"/>
-                <a:ext cx="5029200" cy="246888"/>
-              </a:xfrm>
-              <a:prstGeom prst="rect">
-                <a:avLst/>
-              </a:prstGeom>
-              <a:noFill/>
-              <a:ln/>
-            </p:spPr>
-            <p:txBody>
-              <a:bodyPr wrap="square" lIns="0" tIns="0" rIns="0" bIns="0" rtlCol="0" anchor="ctr"/>
-              <a:lstStyle/>
-              <a:p>
-                <a:pPr marL="0" indent="0">
-                  <a:buNone/>
-                </a:pPr>
-                <a:r>
-                  <a:rPr lang="en-US" sz="1200" b="1" dirty="0">
-                    <a:solidFill>
-                      <a:srgbClr val="FFFFFF"/>
-                    </a:solidFill>
-                    <a:latin typeface="Calibri" pitchFamily="34" charset="0"/>
-                    <a:ea typeface="Calibri" pitchFamily="34" charset="-122"/>
-                    <a:cs typeface="Calibri" pitchFamily="34" charset="-120"/>
-                  </a:rPr>
-                  <a:t>2 · Local P2P mode</a:t>
-                </a:r>
-                <a:endParaRPr lang="en-US" sz="1200" dirty="0"/>
-              </a:p>
-            </p:txBody>
-          </p:sp>
-          <p:sp>
-            <p:nvSpPr>
-              <p:cNvPr id="57" name="Text 26"/>
-              <p:cNvSpPr txBox="1"/>
-              <p:nvPr/>
-            </p:nvSpPr>
-            <p:spPr>
-              <a:xfrm>
-                <a:off x="6492240" y="3017520"/>
-                <a:ext cx="5029200" cy="219456"/>
-              </a:xfrm>
-              <a:prstGeom prst="rect">
-                <a:avLst/>
-              </a:prstGeom>
-              <a:noFill/>
-              <a:ln/>
-            </p:spPr>
-            <p:txBody>
-              <a:bodyPr wrap="square" lIns="0" tIns="0" rIns="0" bIns="0" rtlCol="0" anchor="ctr"/>
-              <a:lstStyle/>
-              <a:p>
-                <a:pPr marL="0" indent="0">
-                  <a:buNone/>
-                </a:pPr>
-                <a:r>
-                  <a:rPr lang="en-US" sz="950" dirty="0">
-                    <a:solidFill>
-                      <a:srgbClr val="EAF3EE"/>
-                    </a:solidFill>
-                    <a:latin typeface="Calibri" pitchFamily="34" charset="0"/>
-                    <a:ea typeface="Calibri" pitchFamily="34" charset="-122"/>
-                    <a:cs typeface="Calibri" pitchFamily="34" charset="-120"/>
-                  </a:rPr>
-                  <a:t>Zenoh pub/sub over Wi-Fi Direct / local AP</a:t>
-                </a:r>
-                <a:endParaRPr lang="en-US" sz="950" dirty="0"/>
-              </a:p>
-            </p:txBody>
-          </p:sp>
-        </p:grpSp>
-        <p:sp>
-          <p:nvSpPr>
-            <p:cNvPr id="58" name="Shape 27"/>
-            <p:cNvSpPr/>
-            <p:nvPr/>
-          </p:nvSpPr>
-          <p:spPr>
-            <a:xfrm>
-              <a:off x="8887968" y="3813048"/>
-              <a:ext cx="237744" cy="128016"/>
-            </a:xfrm>
-            <a:prstGeom prst="downArrow">
-              <a:avLst/>
-            </a:prstGeom>
+          </a:ln>
+        </p:spPr>
+      </p:sp>
+      <p:sp>
+        <p:nvSpPr>
+          <p:cNvPr id="56" name="Text 25"/>
+          <p:cNvSpPr txBox="1"/>
+          <p:nvPr/>
+        </p:nvSpPr>
+        <p:spPr>
+          <a:xfrm>
+            <a:off x="6497777" y="3377071"/>
+            <a:ext cx="5151024" cy="251996"/>
+          </a:xfrm>
+          <a:prstGeom prst="rect">
+            <a:avLst/>
+          </a:prstGeom>
+          <a:noFill/>
+          <a:ln/>
+        </p:spPr>
+        <p:txBody>
+          <a:bodyPr wrap="square" lIns="0" tIns="0" rIns="0" bIns="0" rtlCol="0" anchor="ctr"/>
+          <a:lstStyle/>
+          <a:p>
+            <a:pPr marL="0" indent="0">
+              <a:buNone/>
+            </a:pPr>
+            <a:r>
+              <a:rPr lang="en-US" sz="1200" b="1" dirty="0">
+                <a:latin typeface="Calibri" pitchFamily="34" charset="0"/>
+                <a:ea typeface="Calibri" pitchFamily="34" charset="-122"/>
+                <a:cs typeface="Calibri" pitchFamily="34" charset="-120"/>
+              </a:rPr>
+              <a:t>2 · Local P2P mode</a:t>
+            </a:r>
+            <a:endParaRPr lang="en-US" sz="1200" dirty="0"/>
+          </a:p>
+        </p:txBody>
+      </p:sp>
+      <p:sp>
+        <p:nvSpPr>
+          <p:cNvPr id="57" name="Text 26"/>
+          <p:cNvSpPr txBox="1"/>
+          <p:nvPr/>
+        </p:nvSpPr>
+        <p:spPr>
+          <a:xfrm>
+            <a:off x="6497777" y="3629067"/>
+            <a:ext cx="5151024" cy="223997"/>
+          </a:xfrm>
+          <a:prstGeom prst="rect">
+            <a:avLst/>
+          </a:prstGeom>
+          <a:noFill/>
+          <a:ln/>
+        </p:spPr>
+        <p:txBody>
+          <a:bodyPr wrap="square" lIns="0" tIns="0" rIns="0" bIns="0" rtlCol="0" anchor="ctr"/>
+          <a:lstStyle/>
+          <a:p>
+            <a:pPr marL="0" indent="0">
+              <a:buNone/>
+            </a:pPr>
+            <a:r>
+              <a:rPr lang="en-US" sz="950" dirty="0">
+                <a:latin typeface="Calibri" pitchFamily="34" charset="0"/>
+                <a:ea typeface="Calibri" pitchFamily="34" charset="-122"/>
+                <a:cs typeface="Calibri" pitchFamily="34" charset="-120"/>
+              </a:rPr>
+              <a:t>Zenoh pub/sub over Wi-Fi Direct / local AP</a:t>
+            </a:r>
+            <a:endParaRPr lang="en-US" sz="950" dirty="0"/>
+          </a:p>
+        </p:txBody>
+      </p:sp>
+      <p:sp>
+        <p:nvSpPr>
+          <p:cNvPr id="58" name="Shape 27"/>
+          <p:cNvSpPr/>
+          <p:nvPr/>
+        </p:nvSpPr>
+        <p:spPr>
+          <a:xfrm>
+            <a:off x="8951538" y="3890396"/>
+            <a:ext cx="243503" cy="130665"/>
+          </a:xfrm>
+          <a:prstGeom prst="downArrow">
+            <a:avLst/>
+          </a:prstGeom>
+          <a:solidFill>
+            <a:srgbClr val="6B7280"/>
+          </a:solidFill>
+          <a:ln/>
+        </p:spPr>
+      </p:sp>
+      <p:sp>
+        <p:nvSpPr>
+          <p:cNvPr id="60" name="Shape 28"/>
+          <p:cNvSpPr/>
+          <p:nvPr/>
+        </p:nvSpPr>
+        <p:spPr>
+          <a:xfrm>
+            <a:off x="6263640" y="4021061"/>
+            <a:ext cx="5572471" cy="541325"/>
+          </a:xfrm>
+          <a:prstGeom prst="roundRect">
+            <a:avLst>
+              <a:gd name="adj" fmla="val 10345"/>
+            </a:avLst>
+          </a:prstGeom>
+          <a:solidFill>
+            <a:schemeClr val="bg1"/>
+          </a:solidFill>
+          <a:ln>
             <a:solidFill>
-              <a:srgbClr val="6B7280"/>
+              <a:schemeClr val="tx1"/>
             </a:solidFill>
-            <a:ln/>
-          </p:spPr>
-        </p:sp>
-        <p:grpSp>
-          <p:nvGrpSpPr>
-            <p:cNvPr id="59" name="Group 58"/>
-            <p:cNvGrpSpPr/>
-            <p:nvPr/>
-          </p:nvGrpSpPr>
-          <p:grpSpPr>
-            <a:xfrm>
-              <a:off x="6263640" y="3941064"/>
-              <a:ext cx="5440680" cy="530352"/>
-              <a:chOff x="6263640" y="3401568"/>
-              <a:chExt cx="5440680" cy="530352"/>
-            </a:xfrm>
-          </p:grpSpPr>
-          <p:sp>
-            <p:nvSpPr>
-              <p:cNvPr id="60" name="Shape 28"/>
-              <p:cNvSpPr/>
-              <p:nvPr/>
-            </p:nvSpPr>
-            <p:spPr>
-              <a:xfrm>
-                <a:off x="6263640" y="3401568"/>
-                <a:ext cx="5440680" cy="530352"/>
-              </a:xfrm>
-              <a:prstGeom prst="roundRect">
-                <a:avLst>
-                  <a:gd name="adj" fmla="val 10345"/>
-                </a:avLst>
-              </a:prstGeom>
-              <a:solidFill>
-                <a:srgbClr val="D85A30"/>
-              </a:solidFill>
-              <a:ln/>
-            </p:spPr>
-          </p:sp>
-          <p:sp>
-            <p:nvSpPr>
-              <p:cNvPr id="61" name="Text 29"/>
-              <p:cNvSpPr txBox="1"/>
-              <p:nvPr/>
-            </p:nvSpPr>
-            <p:spPr>
-              <a:xfrm>
-                <a:off x="6492240" y="3429000"/>
-                <a:ext cx="5029200" cy="246888"/>
-              </a:xfrm>
-              <a:prstGeom prst="rect">
-                <a:avLst/>
-              </a:prstGeom>
-              <a:noFill/>
-              <a:ln/>
-            </p:spPr>
-            <p:txBody>
-              <a:bodyPr wrap="square" lIns="0" tIns="0" rIns="0" bIns="0" rtlCol="0" anchor="ctr"/>
-              <a:lstStyle/>
-              <a:p>
-                <a:pPr marL="0" indent="0">
-                  <a:buNone/>
-                </a:pPr>
-                <a:r>
-                  <a:rPr lang="en-US" sz="1200" b="1" dirty="0">
-                    <a:solidFill>
-                      <a:srgbClr val="FFFFFF"/>
-                    </a:solidFill>
-                    <a:latin typeface="Calibri" pitchFamily="34" charset="0"/>
-                    <a:ea typeface="Calibri" pitchFamily="34" charset="-122"/>
-                    <a:cs typeface="Calibri" pitchFamily="34" charset="-120"/>
-                  </a:rPr>
-                  <a:t>3 · Isolated autonomy</a:t>
-                </a:r>
-                <a:endParaRPr lang="en-US" sz="1200" dirty="0"/>
-              </a:p>
-            </p:txBody>
-          </p:sp>
-          <p:sp>
-            <p:nvSpPr>
-              <p:cNvPr id="62" name="Text 30"/>
-              <p:cNvSpPr txBox="1"/>
-              <p:nvPr/>
-            </p:nvSpPr>
-            <p:spPr>
-              <a:xfrm>
-                <a:off x="6492240" y="3675888"/>
-                <a:ext cx="5029200" cy="219456"/>
-              </a:xfrm>
-              <a:prstGeom prst="rect">
-                <a:avLst/>
-              </a:prstGeom>
-              <a:noFill/>
-              <a:ln/>
-            </p:spPr>
-            <p:txBody>
-              <a:bodyPr wrap="square" lIns="0" tIns="0" rIns="0" bIns="0" rtlCol="0" anchor="ctr"/>
-              <a:lstStyle/>
-              <a:p>
-                <a:pPr marL="0" indent="0">
-                  <a:buNone/>
-                </a:pPr>
-                <a:r>
-                  <a:rPr lang="en-US" sz="950" dirty="0">
-                    <a:solidFill>
-                      <a:srgbClr val="EAF3EE"/>
-                    </a:solidFill>
-                    <a:latin typeface="Calibri" pitchFamily="34" charset="0"/>
-                    <a:ea typeface="Calibri" pitchFamily="34" charset="-122"/>
-                    <a:cs typeface="Calibri" pitchFamily="34" charset="-120"/>
-                  </a:rPr>
-                  <a:t>LiDAR/camera only; other robots treated as obstacles</a:t>
-                </a:r>
-                <a:endParaRPr lang="en-US" sz="950" dirty="0"/>
-              </a:p>
-            </p:txBody>
-          </p:sp>
-        </p:grpSp>
-        <p:sp>
-          <p:nvSpPr>
-            <p:cNvPr id="63" name="Shape 31"/>
-            <p:cNvSpPr/>
-            <p:nvPr/>
-          </p:nvSpPr>
-          <p:spPr>
-            <a:xfrm>
-              <a:off x="8887968" y="4471416"/>
-              <a:ext cx="237744" cy="128016"/>
-            </a:xfrm>
-            <a:prstGeom prst="downArrow">
-              <a:avLst/>
-            </a:prstGeom>
+          </a:ln>
+        </p:spPr>
+      </p:sp>
+      <p:sp>
+        <p:nvSpPr>
+          <p:cNvPr id="61" name="Text 29"/>
+          <p:cNvSpPr txBox="1"/>
+          <p:nvPr/>
+        </p:nvSpPr>
+        <p:spPr>
+          <a:xfrm>
+            <a:off x="6497777" y="4049061"/>
+            <a:ext cx="5151024" cy="251996"/>
+          </a:xfrm>
+          <a:prstGeom prst="rect">
+            <a:avLst/>
+          </a:prstGeom>
+          <a:solidFill>
+            <a:schemeClr val="bg1"/>
+          </a:solidFill>
+          <a:ln>
             <a:solidFill>
-              <a:srgbClr val="6B7280"/>
+              <a:schemeClr val="bg1"/>
             </a:solidFill>
-            <a:ln/>
-          </p:spPr>
-        </p:sp>
-        <p:grpSp>
-          <p:nvGrpSpPr>
-            <p:cNvPr id="64" name="Group 63"/>
-            <p:cNvGrpSpPr/>
-            <p:nvPr/>
-          </p:nvGrpSpPr>
-          <p:grpSpPr>
-            <a:xfrm>
-              <a:off x="6263640" y="4599432"/>
-              <a:ext cx="5440680" cy="530352"/>
-              <a:chOff x="6263640" y="4059936"/>
-              <a:chExt cx="5440680" cy="530352"/>
-            </a:xfrm>
-          </p:grpSpPr>
-          <p:sp>
-            <p:nvSpPr>
-              <p:cNvPr id="65" name="Shape 32"/>
-              <p:cNvSpPr/>
-              <p:nvPr/>
-            </p:nvSpPr>
-            <p:spPr>
-              <a:xfrm>
-                <a:off x="6263640" y="4059936"/>
-                <a:ext cx="5440680" cy="530352"/>
-              </a:xfrm>
-              <a:prstGeom prst="roundRect">
-                <a:avLst>
-                  <a:gd name="adj" fmla="val 10345"/>
-                </a:avLst>
-              </a:prstGeom>
-              <a:solidFill>
-                <a:srgbClr val="12213B"/>
-              </a:solidFill>
-              <a:ln/>
-            </p:spPr>
-          </p:sp>
-          <p:sp>
-            <p:nvSpPr>
-              <p:cNvPr id="66" name="Text 33"/>
-              <p:cNvSpPr txBox="1"/>
-              <p:nvPr/>
-            </p:nvSpPr>
-            <p:spPr>
-              <a:xfrm>
-                <a:off x="6492240" y="4087368"/>
-                <a:ext cx="5029200" cy="246888"/>
-              </a:xfrm>
-              <a:prstGeom prst="rect">
-                <a:avLst/>
-              </a:prstGeom>
-              <a:noFill/>
-              <a:ln/>
-            </p:spPr>
-            <p:txBody>
-              <a:bodyPr wrap="square" lIns="0" tIns="0" rIns="0" bIns="0" rtlCol="0" anchor="ctr"/>
-              <a:lstStyle/>
-              <a:p>
-                <a:pPr marL="0" indent="0">
-                  <a:buNone/>
-                </a:pPr>
-                <a:r>
-                  <a:rPr lang="en-US" sz="1200" b="1" dirty="0">
-                    <a:solidFill>
-                      <a:srgbClr val="FFFFFF"/>
-                    </a:solidFill>
-                    <a:latin typeface="Calibri" pitchFamily="34" charset="0"/>
-                    <a:ea typeface="Calibri" pitchFamily="34" charset="-122"/>
-                    <a:cs typeface="Calibri" pitchFamily="34" charset="-120"/>
-                  </a:rPr>
-                  <a:t>4 · Safe mode</a:t>
-                </a:r>
-                <a:endParaRPr lang="en-US" sz="1200" dirty="0"/>
-              </a:p>
-            </p:txBody>
-          </p:sp>
-          <p:sp>
-            <p:nvSpPr>
-              <p:cNvPr id="67" name="Text 34"/>
-              <p:cNvSpPr txBox="1"/>
-              <p:nvPr/>
-            </p:nvSpPr>
-            <p:spPr>
-              <a:xfrm>
-                <a:off x="6492240" y="4334256"/>
-                <a:ext cx="5029200" cy="219456"/>
-              </a:xfrm>
-              <a:prstGeom prst="rect">
-                <a:avLst/>
-              </a:prstGeom>
-              <a:noFill/>
-              <a:ln/>
-            </p:spPr>
-            <p:txBody>
-              <a:bodyPr wrap="square" lIns="0" tIns="0" rIns="0" bIns="0" rtlCol="0" anchor="ctr"/>
-              <a:lstStyle/>
-              <a:p>
-                <a:pPr marL="0" indent="0">
-                  <a:buNone/>
-                </a:pPr>
-                <a:r>
-                  <a:rPr lang="en-US" sz="950" dirty="0">
-                    <a:solidFill>
-                      <a:srgbClr val="EAF3EE"/>
-                    </a:solidFill>
-                    <a:latin typeface="Calibri" pitchFamily="34" charset="0"/>
-                    <a:ea typeface="Calibri" pitchFamily="34" charset="-122"/>
-                    <a:cs typeface="Calibri" pitchFamily="34" charset="-120"/>
-                  </a:rPr>
-                  <a:t>Stop / crawl if on-board perception also degrades</a:t>
-                </a:r>
-                <a:endParaRPr lang="en-US" sz="950" dirty="0"/>
-              </a:p>
-            </p:txBody>
-          </p:sp>
-        </p:grpSp>
-        <p:sp>
-          <p:nvSpPr>
-            <p:cNvPr id="68" name="Shape 35"/>
-            <p:cNvSpPr/>
-            <p:nvPr/>
-          </p:nvSpPr>
-          <p:spPr>
-            <a:xfrm>
-              <a:off x="8887968" y="5129784"/>
-              <a:ext cx="237744" cy="128016"/>
-            </a:xfrm>
-            <a:prstGeom prst="downArrow">
-              <a:avLst/>
-            </a:prstGeom>
+          </a:ln>
+        </p:spPr>
+        <p:txBody>
+          <a:bodyPr wrap="square" lIns="0" tIns="0" rIns="0" bIns="0" rtlCol="0" anchor="ctr"/>
+          <a:lstStyle/>
+          <a:p>
+            <a:pPr marL="0" indent="0">
+              <a:buNone/>
+            </a:pPr>
+            <a:r>
+              <a:rPr lang="en-US" sz="1200" b="1" dirty="0">
+                <a:latin typeface="Calibri" pitchFamily="34" charset="0"/>
+                <a:ea typeface="Calibri" pitchFamily="34" charset="-122"/>
+                <a:cs typeface="Calibri" pitchFamily="34" charset="-120"/>
+              </a:rPr>
+              <a:t>3 · Isolated autonomy</a:t>
+            </a:r>
+            <a:endParaRPr lang="en-US" sz="1200" dirty="0"/>
+          </a:p>
+        </p:txBody>
+      </p:sp>
+      <p:sp>
+        <p:nvSpPr>
+          <p:cNvPr id="62" name="Text 30"/>
+          <p:cNvSpPr txBox="1"/>
+          <p:nvPr/>
+        </p:nvSpPr>
+        <p:spPr>
+          <a:xfrm>
+            <a:off x="6497777" y="4301057"/>
+            <a:ext cx="5151024" cy="223997"/>
+          </a:xfrm>
+          <a:prstGeom prst="rect">
+            <a:avLst/>
+          </a:prstGeom>
+          <a:solidFill>
+            <a:schemeClr val="bg1"/>
+          </a:solidFill>
+          <a:ln>
             <a:solidFill>
-              <a:srgbClr val="6B7280"/>
+              <a:schemeClr val="bg1"/>
             </a:solidFill>
-            <a:ln/>
-          </p:spPr>
-        </p:sp>
-        <p:grpSp>
-          <p:nvGrpSpPr>
-            <p:cNvPr id="69" name="Group 68"/>
-            <p:cNvGrpSpPr/>
-            <p:nvPr/>
-          </p:nvGrpSpPr>
-          <p:grpSpPr>
-            <a:xfrm>
-              <a:off x="6263640" y="5257800"/>
-              <a:ext cx="5440680" cy="530352"/>
-              <a:chOff x="6263640" y="4718304"/>
-              <a:chExt cx="5440680" cy="530352"/>
-            </a:xfrm>
-          </p:grpSpPr>
-          <p:sp>
-            <p:nvSpPr>
-              <p:cNvPr id="70" name="Shape 36"/>
-              <p:cNvSpPr/>
-              <p:nvPr/>
-            </p:nvSpPr>
-            <p:spPr>
-              <a:xfrm>
-                <a:off x="6263640" y="4718304"/>
-                <a:ext cx="5440680" cy="530352"/>
-              </a:xfrm>
-              <a:prstGeom prst="roundRect">
-                <a:avLst>
-                  <a:gd name="adj" fmla="val 10345"/>
-                </a:avLst>
-              </a:prstGeom>
-              <a:solidFill>
-                <a:srgbClr val="E2B93B"/>
-              </a:solidFill>
-              <a:ln/>
-            </p:spPr>
-          </p:sp>
-          <p:sp>
-            <p:nvSpPr>
-              <p:cNvPr id="71" name="Text 37"/>
-              <p:cNvSpPr txBox="1"/>
-              <p:nvPr/>
-            </p:nvSpPr>
-            <p:spPr>
-              <a:xfrm>
-                <a:off x="6492240" y="4745736"/>
-                <a:ext cx="5029200" cy="246888"/>
-              </a:xfrm>
-              <a:prstGeom prst="rect">
-                <a:avLst/>
-              </a:prstGeom>
-              <a:noFill/>
-              <a:ln/>
-            </p:spPr>
-            <p:txBody>
-              <a:bodyPr wrap="square" lIns="0" tIns="0" rIns="0" bIns="0" rtlCol="0" anchor="ctr"/>
-              <a:lstStyle/>
-              <a:p>
-                <a:pPr marL="0" indent="0">
-                  <a:buNone/>
-                </a:pPr>
-                <a:r>
-                  <a:rPr lang="en-US" sz="1200" b="1" dirty="0">
-                    <a:solidFill>
-                      <a:srgbClr val="12213B"/>
-                    </a:solidFill>
-                    <a:latin typeface="Calibri" pitchFamily="34" charset="0"/>
-                    <a:ea typeface="Calibri" pitchFamily="34" charset="-122"/>
-                    <a:cs typeface="Calibri" pitchFamily="34" charset="-120"/>
-                  </a:rPr>
-                  <a:t>5 · Recovery &amp; resync</a:t>
-                </a:r>
-                <a:endParaRPr lang="en-US" sz="1200" dirty="0"/>
-              </a:p>
-            </p:txBody>
-          </p:sp>
-          <p:sp>
-            <p:nvSpPr>
-              <p:cNvPr id="72" name="Text 38"/>
-              <p:cNvSpPr txBox="1"/>
-              <p:nvPr/>
-            </p:nvSpPr>
-            <p:spPr>
-              <a:xfrm>
-                <a:off x="6492240" y="4992624"/>
-                <a:ext cx="5029200" cy="219456"/>
-              </a:xfrm>
-              <a:prstGeom prst="rect">
-                <a:avLst/>
-              </a:prstGeom>
-              <a:noFill/>
-              <a:ln/>
-            </p:spPr>
-            <p:txBody>
-              <a:bodyPr wrap="square" lIns="0" tIns="0" rIns="0" bIns="0" rtlCol="0" anchor="ctr"/>
-              <a:lstStyle/>
-              <a:p>
-                <a:pPr marL="0" indent="0">
-                  <a:buNone/>
-                </a:pPr>
-                <a:r>
-                  <a:rPr lang="en-US" sz="950" dirty="0">
-                    <a:solidFill>
-                      <a:srgbClr val="3A2E0A"/>
-                    </a:solidFill>
-                    <a:latin typeface="Calibri" pitchFamily="34" charset="0"/>
-                    <a:ea typeface="Calibri" pitchFamily="34" charset="-122"/>
-                    <a:cs typeface="Calibri" pitchFamily="34" charset="-120"/>
-                  </a:rPr>
-                  <a:t>Resyncs state, resumes infra mode </a:t>
-                </a:r>
-                <a:r>
-                  <a:rPr lang="en-US" sz="950" dirty="0" smtClean="0">
-                    <a:solidFill>
-                      <a:srgbClr val="3A2E0A"/>
-                    </a:solidFill>
-                    <a:latin typeface="Calibri" pitchFamily="34" charset="0"/>
-                    <a:ea typeface="Calibri" pitchFamily="34" charset="-122"/>
-                    <a:cs typeface="Calibri" pitchFamily="34" charset="-120"/>
-                  </a:rPr>
-                  <a:t>(</a:t>
-                </a:r>
-                <a:r>
-                  <a:rPr lang="en-US" sz="950" dirty="0" err="1" smtClean="0">
-                    <a:solidFill>
-                      <a:srgbClr val="3A2E0A"/>
-                    </a:solidFill>
-                    <a:ea typeface="Calibri" pitchFamily="34" charset="-122"/>
-                    <a:cs typeface="Calibri" pitchFamily="34" charset="-120"/>
-                  </a:rPr>
-                  <a:t>W</a:t>
-                </a:r>
-                <a:r>
-                  <a:rPr lang="en-US" sz="950" dirty="0" err="1" smtClean="0">
-                    <a:solidFill>
-                      <a:srgbClr val="3A2E0A"/>
-                    </a:solidFill>
-                    <a:latin typeface="Calibri" pitchFamily="34" charset="0"/>
-                    <a:ea typeface="Calibri" pitchFamily="34" charset="-122"/>
-                    <a:cs typeface="Calibri" pitchFamily="34" charset="-120"/>
-                  </a:rPr>
-                  <a:t>iFi</a:t>
-                </a:r>
-                <a:r>
-                  <a:rPr lang="en-US" sz="950" dirty="0" smtClean="0">
-                    <a:solidFill>
-                      <a:srgbClr val="3A2E0A"/>
-                    </a:solidFill>
-                    <a:latin typeface="Calibri" pitchFamily="34" charset="0"/>
-                    <a:ea typeface="Calibri" pitchFamily="34" charset="-122"/>
-                    <a:cs typeface="Calibri" pitchFamily="34" charset="-120"/>
-                  </a:rPr>
-                  <a:t> connection restored)— </a:t>
-                </a:r>
-                <a:r>
-                  <a:rPr lang="en-US" sz="950" dirty="0">
-                    <a:solidFill>
-                      <a:srgbClr val="3A2E0A"/>
-                    </a:solidFill>
-                    <a:latin typeface="Calibri" pitchFamily="34" charset="0"/>
-                    <a:ea typeface="Calibri" pitchFamily="34" charset="-122"/>
-                    <a:cs typeface="Calibri" pitchFamily="34" charset="-120"/>
-                  </a:rPr>
-                  <a:t>loops back to stage 1</a:t>
-                </a:r>
-                <a:endParaRPr lang="en-US" sz="950" dirty="0"/>
-              </a:p>
-            </p:txBody>
-          </p:sp>
-        </p:grpSp>
-      </p:grpSp>
+          </a:ln>
+        </p:spPr>
+        <p:txBody>
+          <a:bodyPr wrap="square" lIns="0" tIns="0" rIns="0" bIns="0" rtlCol="0" anchor="ctr"/>
+          <a:lstStyle/>
+          <a:p>
+            <a:pPr marL="0" indent="0">
+              <a:buNone/>
+            </a:pPr>
+            <a:r>
+              <a:rPr lang="en-US" sz="950" dirty="0">
+                <a:latin typeface="Calibri" pitchFamily="34" charset="0"/>
+                <a:ea typeface="Calibri" pitchFamily="34" charset="-122"/>
+                <a:cs typeface="Calibri" pitchFamily="34" charset="-120"/>
+              </a:rPr>
+              <a:t>LiDAR/camera only; other robots treated as obstacles</a:t>
+            </a:r>
+            <a:endParaRPr lang="en-US" sz="950" dirty="0"/>
+          </a:p>
+        </p:txBody>
+      </p:sp>
+      <p:sp>
+        <p:nvSpPr>
+          <p:cNvPr id="63" name="Shape 31"/>
+          <p:cNvSpPr/>
+          <p:nvPr/>
+        </p:nvSpPr>
+        <p:spPr>
+          <a:xfrm>
+            <a:off x="8951538" y="4562386"/>
+            <a:ext cx="243503" cy="130665"/>
+          </a:xfrm>
+          <a:prstGeom prst="downArrow">
+            <a:avLst/>
+          </a:prstGeom>
+          <a:solidFill>
+            <a:srgbClr val="6B7280"/>
+          </a:solidFill>
+          <a:ln/>
+        </p:spPr>
+      </p:sp>
+      <p:sp>
+        <p:nvSpPr>
+          <p:cNvPr id="65" name="Shape 32"/>
+          <p:cNvSpPr/>
+          <p:nvPr/>
+        </p:nvSpPr>
+        <p:spPr>
+          <a:xfrm>
+            <a:off x="6263640" y="4693051"/>
+            <a:ext cx="5572471" cy="541325"/>
+          </a:xfrm>
+          <a:prstGeom prst="roundRect">
+            <a:avLst>
+              <a:gd name="adj" fmla="val 10345"/>
+            </a:avLst>
+          </a:prstGeom>
+          <a:solidFill>
+            <a:schemeClr val="bg1"/>
+          </a:solidFill>
+          <a:ln>
+            <a:solidFill>
+              <a:schemeClr val="tx1"/>
+            </a:solidFill>
+          </a:ln>
+        </p:spPr>
+      </p:sp>
+      <p:sp>
+        <p:nvSpPr>
+          <p:cNvPr id="66" name="Text 33"/>
+          <p:cNvSpPr txBox="1"/>
+          <p:nvPr/>
+        </p:nvSpPr>
+        <p:spPr>
+          <a:xfrm>
+            <a:off x="6497777" y="4721051"/>
+            <a:ext cx="5151024" cy="251996"/>
+          </a:xfrm>
+          <a:prstGeom prst="rect">
+            <a:avLst/>
+          </a:prstGeom>
+          <a:noFill/>
+          <a:ln/>
+        </p:spPr>
+        <p:txBody>
+          <a:bodyPr wrap="square" lIns="0" tIns="0" rIns="0" bIns="0" rtlCol="0" anchor="ctr"/>
+          <a:lstStyle/>
+          <a:p>
+            <a:pPr marL="0" indent="0">
+              <a:buNone/>
+            </a:pPr>
+            <a:r>
+              <a:rPr lang="en-US" sz="1200" b="1" dirty="0">
+                <a:latin typeface="Calibri" pitchFamily="34" charset="0"/>
+                <a:ea typeface="Calibri" pitchFamily="34" charset="-122"/>
+                <a:cs typeface="Calibri" pitchFamily="34" charset="-120"/>
+              </a:rPr>
+              <a:t>4 · Safe mode</a:t>
+            </a:r>
+            <a:endParaRPr lang="en-US" sz="1200" dirty="0"/>
+          </a:p>
+        </p:txBody>
+      </p:sp>
+      <p:sp>
+        <p:nvSpPr>
+          <p:cNvPr id="67" name="Text 34"/>
+          <p:cNvSpPr txBox="1"/>
+          <p:nvPr/>
+        </p:nvSpPr>
+        <p:spPr>
+          <a:xfrm>
+            <a:off x="6497777" y="4973047"/>
+            <a:ext cx="5151024" cy="223997"/>
+          </a:xfrm>
+          <a:prstGeom prst="rect">
+            <a:avLst/>
+          </a:prstGeom>
+          <a:noFill/>
+          <a:ln/>
+        </p:spPr>
+        <p:txBody>
+          <a:bodyPr wrap="square" lIns="0" tIns="0" rIns="0" bIns="0" rtlCol="0" anchor="ctr"/>
+          <a:lstStyle/>
+          <a:p>
+            <a:pPr marL="0" indent="0">
+              <a:buNone/>
+            </a:pPr>
+            <a:r>
+              <a:rPr lang="en-US" sz="950" dirty="0">
+                <a:latin typeface="Calibri" pitchFamily="34" charset="0"/>
+                <a:ea typeface="Calibri" pitchFamily="34" charset="-122"/>
+                <a:cs typeface="Calibri" pitchFamily="34" charset="-120"/>
+              </a:rPr>
+              <a:t>Stop / crawl if on-board perception also degrades</a:t>
+            </a:r>
+            <a:endParaRPr lang="en-US" sz="950" dirty="0"/>
+          </a:p>
+        </p:txBody>
+      </p:sp>
+      <p:sp>
+        <p:nvSpPr>
+          <p:cNvPr id="68" name="Shape 35"/>
+          <p:cNvSpPr/>
+          <p:nvPr/>
+        </p:nvSpPr>
+        <p:spPr>
+          <a:xfrm>
+            <a:off x="8951538" y="5234376"/>
+            <a:ext cx="243503" cy="130665"/>
+          </a:xfrm>
+          <a:prstGeom prst="downArrow">
+            <a:avLst/>
+          </a:prstGeom>
+          <a:solidFill>
+            <a:srgbClr val="6B7280"/>
+          </a:solidFill>
+          <a:ln/>
+        </p:spPr>
+      </p:sp>
+      <p:sp>
+        <p:nvSpPr>
+          <p:cNvPr id="70" name="Shape 36"/>
+          <p:cNvSpPr/>
+          <p:nvPr/>
+        </p:nvSpPr>
+        <p:spPr>
+          <a:xfrm>
+            <a:off x="6263640" y="5365041"/>
+            <a:ext cx="5572471" cy="541325"/>
+          </a:xfrm>
+          <a:prstGeom prst="roundRect">
+            <a:avLst>
+              <a:gd name="adj" fmla="val 10345"/>
+            </a:avLst>
+          </a:prstGeom>
+          <a:solidFill>
+            <a:schemeClr val="bg1"/>
+          </a:solidFill>
+          <a:ln>
+            <a:solidFill>
+              <a:schemeClr val="tx1"/>
+            </a:solidFill>
+          </a:ln>
+        </p:spPr>
+      </p:sp>
+      <p:sp>
+        <p:nvSpPr>
+          <p:cNvPr id="71" name="Text 37"/>
+          <p:cNvSpPr txBox="1"/>
+          <p:nvPr/>
+        </p:nvSpPr>
+        <p:spPr>
+          <a:xfrm>
+            <a:off x="6497777" y="5393041"/>
+            <a:ext cx="5151024" cy="251996"/>
+          </a:xfrm>
+          <a:prstGeom prst="rect">
+            <a:avLst/>
+          </a:prstGeom>
+          <a:noFill/>
+          <a:ln/>
+        </p:spPr>
+        <p:txBody>
+          <a:bodyPr wrap="square" lIns="0" tIns="0" rIns="0" bIns="0" rtlCol="0" anchor="ctr"/>
+          <a:lstStyle/>
+          <a:p>
+            <a:pPr marL="0" indent="0">
+              <a:buNone/>
+            </a:pPr>
+            <a:r>
+              <a:rPr lang="en-US" sz="1200" b="1" dirty="0">
+                <a:latin typeface="Calibri" pitchFamily="34" charset="0"/>
+                <a:ea typeface="Calibri" pitchFamily="34" charset="-122"/>
+                <a:cs typeface="Calibri" pitchFamily="34" charset="-120"/>
+              </a:rPr>
+              <a:t>5 · Recovery &amp; resync</a:t>
+            </a:r>
+            <a:endParaRPr lang="en-US" sz="1200" dirty="0"/>
+          </a:p>
+        </p:txBody>
+      </p:sp>
+      <p:sp>
+        <p:nvSpPr>
+          <p:cNvPr id="72" name="Text 38"/>
+          <p:cNvSpPr txBox="1"/>
+          <p:nvPr/>
+        </p:nvSpPr>
+        <p:spPr>
+          <a:xfrm>
+            <a:off x="6497777" y="5645037"/>
+            <a:ext cx="5151024" cy="223997"/>
+          </a:xfrm>
+          <a:prstGeom prst="rect">
+            <a:avLst/>
+          </a:prstGeom>
+          <a:noFill/>
+          <a:ln/>
+        </p:spPr>
+        <p:txBody>
+          <a:bodyPr wrap="square" lIns="0" tIns="0" rIns="0" bIns="0" rtlCol="0" anchor="ctr"/>
+          <a:lstStyle/>
+          <a:p>
+            <a:pPr marL="0" indent="0">
+              <a:buNone/>
+            </a:pPr>
+            <a:r>
+              <a:rPr lang="en-US" sz="950" dirty="0">
+                <a:latin typeface="Calibri" pitchFamily="34" charset="0"/>
+                <a:ea typeface="Calibri" pitchFamily="34" charset="-122"/>
+                <a:cs typeface="Calibri" pitchFamily="34" charset="-120"/>
+              </a:rPr>
+              <a:t>Resyncs state, resumes infra mode </a:t>
+            </a:r>
+            <a:r>
+              <a:rPr lang="en-US" sz="950" dirty="0" smtClean="0">
+                <a:latin typeface="Calibri" pitchFamily="34" charset="0"/>
+                <a:ea typeface="Calibri" pitchFamily="34" charset="-122"/>
+                <a:cs typeface="Calibri" pitchFamily="34" charset="-120"/>
+              </a:rPr>
+              <a:t>(</a:t>
+            </a:r>
+            <a:r>
+              <a:rPr lang="en-US" sz="950" dirty="0" err="1" smtClean="0">
+                <a:ea typeface="Calibri" pitchFamily="34" charset="-122"/>
+                <a:cs typeface="Calibri" pitchFamily="34" charset="-120"/>
+              </a:rPr>
+              <a:t>W</a:t>
+            </a:r>
+            <a:r>
+              <a:rPr lang="en-US" sz="950" dirty="0" err="1" smtClean="0">
+                <a:latin typeface="Calibri" pitchFamily="34" charset="0"/>
+                <a:ea typeface="Calibri" pitchFamily="34" charset="-122"/>
+                <a:cs typeface="Calibri" pitchFamily="34" charset="-120"/>
+              </a:rPr>
+              <a:t>iFi</a:t>
+            </a:r>
+            <a:r>
+              <a:rPr lang="en-US" sz="950" dirty="0" smtClean="0">
+                <a:latin typeface="Calibri" pitchFamily="34" charset="0"/>
+                <a:ea typeface="Calibri" pitchFamily="34" charset="-122"/>
+                <a:cs typeface="Calibri" pitchFamily="34" charset="-120"/>
+              </a:rPr>
+              <a:t> connection restored)— </a:t>
+            </a:r>
+            <a:r>
+              <a:rPr lang="en-US" sz="950" dirty="0">
+                <a:latin typeface="Calibri" pitchFamily="34" charset="0"/>
+                <a:ea typeface="Calibri" pitchFamily="34" charset="-122"/>
+                <a:cs typeface="Calibri" pitchFamily="34" charset="-120"/>
+              </a:rPr>
+              <a:t>loops back to stage 1</a:t>
+            </a:r>
+            <a:endParaRPr lang="en-US" sz="950" dirty="0"/>
+          </a:p>
+        </p:txBody>
+      </p:sp>
     </p:spTree>
   </p:cSld>
   <p:clrMapOvr>
     <a:masterClrMapping/>
   </p:clrMapOvr>
+  <p:timing>
+    <p:tnLst>
+      <p:par>
+        <p:cTn id="1" dur="indefinite" restart="never" nodeType="tmRoot"/>
+      </p:par>
+    </p:tnLst>
+  </p:timing>
 </p:sld>
 </file>
 
@@ -8043,7 +7669,7 @@
           <p:cNvPr id="10" name="Rectangle 9">
             <a:extLst>
               <a:ext uri="{FF2B5EF4-FFF2-40B4-BE49-F238E27FC236}">
-                <a16:creationId xmlns:a16="http://schemas.microsoft.com/office/drawing/2014/main" xmlns="" id="{AD4F69D3-EEB0-4C4C-9434-B9960FB5854C}"/>
+                <a16:creationId xmlns="" xmlns:a16="http://schemas.microsoft.com/office/drawing/2014/main" id="{AD4F69D3-EEB0-4C4C-9434-B9960FB5854C}"/>
               </a:ext>
             </a:extLst>
           </p:cNvPr>
@@ -8210,10 +7836,10 @@
           <p:cNvPr id="11" name="Oval 10" descr="Your startup LOGO">
             <a:extLst>
               <a:ext uri="{FF2B5EF4-FFF2-40B4-BE49-F238E27FC236}">
-                <a16:creationId xmlns:a16="http://schemas.microsoft.com/office/drawing/2014/main" xmlns="" id="{5DBCE864-823D-4A13-9607-5DA1F0ED5FB8}"/>
+                <a16:creationId xmlns="" xmlns:a16="http://schemas.microsoft.com/office/drawing/2014/main" id="{5DBCE864-823D-4A13-9607-5DA1F0ED5FB8}"/>
               </a:ext>
               <a:ext uri="{C183D7F6-B498-43B3-948B-1728B52AA6E4}">
-                <adec:decorative xmlns="" xmlns:adec="http://schemas.microsoft.com/office/drawing/2017/decorative" val="0"/>
+                <adec:decorative xmlns:adec="http://schemas.microsoft.com/office/drawing/2017/decorative" xmlns="" val="0"/>
               </a:ext>
             </a:extLst>
           </p:cNvPr>
@@ -8268,7 +7894,7 @@
           <a:blip r:embed="rId3">
             <a:extLst>
               <a:ext uri="{28A0092B-C50C-407E-A947-70E740481C1C}">
-                <a14:useLocalDpi xmlns:a14="http://schemas.microsoft.com/office/drawing/2010/main" xmlns="" val="0"/>
+                <a14:useLocalDpi xmlns="" xmlns:a14="http://schemas.microsoft.com/office/drawing/2010/main" val="0"/>
               </a:ext>
             </a:extLst>
           </a:blip>
@@ -8286,1210 +7912,124 @@
           </a:prstGeom>
         </p:spPr>
       </p:pic>
-      <p:grpSp>
-        <p:nvGrpSpPr>
-          <p:cNvPr id="25" name="Group 24"/>
-          <p:cNvGrpSpPr/>
+      <p:sp>
+        <p:nvSpPr>
+          <p:cNvPr id="22" name="Shape 10"/>
+          <p:cNvSpPr/>
           <p:nvPr/>
-        </p:nvGrpSpPr>
-        <p:grpSpPr>
-          <a:xfrm>
-            <a:off x="456863" y="1353312"/>
-            <a:ext cx="9323223" cy="603504"/>
-            <a:chOff x="457200" y="1115568"/>
-            <a:chExt cx="9323223" cy="603504"/>
-          </a:xfrm>
-        </p:grpSpPr>
-        <p:sp>
-          <p:nvSpPr>
-            <p:cNvPr id="22" name="Shape 10"/>
-            <p:cNvSpPr/>
-            <p:nvPr/>
-          </p:nvSpPr>
-          <p:spPr>
-            <a:xfrm>
-              <a:off x="1976933" y="1389888"/>
-              <a:ext cx="2432304" cy="329184"/>
-            </a:xfrm>
-            <a:prstGeom prst="roundRect">
-              <a:avLst>
-                <a:gd name="adj" fmla="val 50000"/>
-              </a:avLst>
-            </a:prstGeom>
+        </p:nvSpPr>
+        <p:spPr>
+          <a:xfrm>
+            <a:off x="1976596" y="1627632"/>
+            <a:ext cx="2432304" cy="329184"/>
+          </a:xfrm>
+          <a:prstGeom prst="roundRect">
+            <a:avLst>
+              <a:gd name="adj" fmla="val 50000"/>
+            </a:avLst>
+          </a:prstGeom>
+          <a:solidFill>
+            <a:srgbClr val="FFFFFF"/>
+          </a:solidFill>
+          <a:ln w="12700">
             <a:solidFill>
-              <a:srgbClr val="FFFFFF"/>
+              <a:schemeClr val="bg1">
+                <a:lumMod val="50000"/>
+              </a:schemeClr>
             </a:solidFill>
-            <a:ln w="12700">
-              <a:solidFill>
-                <a:srgbClr val="1D9E75"/>
-              </a:solidFill>
-              <a:prstDash val="solid"/>
-            </a:ln>
-          </p:spPr>
-        </p:sp>
-        <p:sp>
-          <p:nvSpPr>
-            <p:cNvPr id="23" name="Shape 10"/>
-            <p:cNvSpPr/>
-            <p:nvPr/>
-          </p:nvSpPr>
-          <p:spPr>
-            <a:xfrm>
-              <a:off x="1219528" y="1389888"/>
-              <a:ext cx="611102" cy="329184"/>
-            </a:xfrm>
-            <a:prstGeom prst="roundRect">
-              <a:avLst>
-                <a:gd name="adj" fmla="val 50000"/>
-              </a:avLst>
-            </a:prstGeom>
+            <a:prstDash val="solid"/>
+          </a:ln>
+          <a:effectLst>
+            <a:outerShdw blurRad="50800" dist="38100" dir="2700000" algn="tl" rotWithShape="0">
+              <a:prstClr val="black">
+                <a:alpha val="40000"/>
+              </a:prstClr>
+            </a:outerShdw>
+          </a:effectLst>
+        </p:spPr>
+      </p:sp>
+      <p:sp>
+        <p:nvSpPr>
+          <p:cNvPr id="23" name="Shape 10"/>
+          <p:cNvSpPr/>
+          <p:nvPr/>
+        </p:nvSpPr>
+        <p:spPr>
+          <a:xfrm>
+            <a:off x="1219190" y="1627632"/>
+            <a:ext cx="611102" cy="329184"/>
+          </a:xfrm>
+          <a:prstGeom prst="roundRect">
+            <a:avLst>
+              <a:gd name="adj" fmla="val 50000"/>
+            </a:avLst>
+          </a:prstGeom>
+          <a:solidFill>
+            <a:srgbClr val="FFFFFF"/>
+          </a:solidFill>
+          <a:ln w="12700">
             <a:solidFill>
-              <a:srgbClr val="FFFFFF"/>
+              <a:schemeClr val="bg1">
+                <a:lumMod val="50000"/>
+              </a:schemeClr>
             </a:solidFill>
-            <a:ln w="12700">
-              <a:solidFill>
-                <a:srgbClr val="1D9E75"/>
-              </a:solidFill>
-              <a:prstDash val="solid"/>
-            </a:ln>
-          </p:spPr>
-        </p:sp>
-        <p:sp>
-          <p:nvSpPr>
-            <p:cNvPr id="24" name="Shape 10"/>
-            <p:cNvSpPr/>
-            <p:nvPr/>
-          </p:nvSpPr>
-          <p:spPr>
-            <a:xfrm>
-              <a:off x="7496861" y="1371600"/>
-              <a:ext cx="2283562" cy="329184"/>
-            </a:xfrm>
-            <a:prstGeom prst="roundRect">
-              <a:avLst>
-                <a:gd name="adj" fmla="val 50000"/>
-              </a:avLst>
-            </a:prstGeom>
+            <a:prstDash val="solid"/>
+          </a:ln>
+          <a:effectLst>
+            <a:outerShdw blurRad="50800" dist="38100" dir="2700000" algn="tl" rotWithShape="0">
+              <a:prstClr val="black">
+                <a:alpha val="40000"/>
+              </a:prstClr>
+            </a:outerShdw>
+          </a:effectLst>
+        </p:spPr>
+      </p:sp>
+      <p:sp>
+        <p:nvSpPr>
+          <p:cNvPr id="24" name="Shape 10"/>
+          <p:cNvSpPr/>
+          <p:nvPr/>
+        </p:nvSpPr>
+        <p:spPr>
+          <a:xfrm>
+            <a:off x="7490428" y="1625200"/>
+            <a:ext cx="2283562" cy="329184"/>
+          </a:xfrm>
+          <a:prstGeom prst="roundRect">
+            <a:avLst>
+              <a:gd name="adj" fmla="val 50000"/>
+            </a:avLst>
+          </a:prstGeom>
+          <a:solidFill>
+            <a:srgbClr val="FFFFFF"/>
+          </a:solidFill>
+          <a:ln w="12700">
             <a:solidFill>
-              <a:srgbClr val="FFFFFF"/>
+              <a:schemeClr val="bg1">
+                <a:lumMod val="50000"/>
+              </a:schemeClr>
             </a:solidFill>
-            <a:ln w="12700">
-              <a:solidFill>
-                <a:srgbClr val="1D9E75"/>
-              </a:solidFill>
-              <a:prstDash val="solid"/>
-            </a:ln>
-          </p:spPr>
-        </p:sp>
-        <p:grpSp>
-          <p:nvGrpSpPr>
-            <p:cNvPr id="9" name="Group 8"/>
-            <p:cNvGrpSpPr/>
-            <p:nvPr/>
-          </p:nvGrpSpPr>
-          <p:grpSpPr>
-            <a:xfrm>
-              <a:off x="457200" y="1115568"/>
-              <a:ext cx="9323223" cy="603504"/>
-              <a:chOff x="457200" y="1115568"/>
-              <a:chExt cx="9323223" cy="603504"/>
-            </a:xfrm>
-          </p:grpSpPr>
-          <p:sp>
-            <p:nvSpPr>
-              <p:cNvPr id="13" name="Text 3"/>
-              <p:cNvSpPr txBox="1"/>
-              <p:nvPr/>
-            </p:nvSpPr>
-            <p:spPr>
-              <a:xfrm>
-                <a:off x="457200" y="1115568"/>
-                <a:ext cx="5486400" cy="256032"/>
-              </a:xfrm>
-              <a:prstGeom prst="rect">
-                <a:avLst/>
-              </a:prstGeom>
-              <a:noFill/>
-              <a:ln/>
-            </p:spPr>
-            <p:txBody>
-              <a:bodyPr wrap="square" lIns="0" tIns="0" rIns="0" bIns="0" rtlCol="0" anchor="ctr"/>
-              <a:lstStyle/>
-              <a:p>
-                <a:pPr marL="0" indent="0">
-                  <a:buNone/>
-                </a:pPr>
-                <a:r>
-                  <a:rPr lang="en-US" sz="1100" b="1" kern="0" spc="100" dirty="0">
-                    <a:solidFill>
-                      <a:srgbClr val="0F6E56"/>
-                    </a:solidFill>
-                    <a:latin typeface="Calibri" pitchFamily="34" charset="0"/>
-                    <a:ea typeface="Calibri" pitchFamily="34" charset="-122"/>
-                    <a:cs typeface="Calibri" pitchFamily="34" charset="-120"/>
-                  </a:rPr>
-                  <a:t>TECHNOLOGY STACK</a:t>
-                </a:r>
-                <a:endParaRPr lang="en-US" sz="1100" dirty="0"/>
-              </a:p>
-            </p:txBody>
-          </p:sp>
-          <p:sp>
-            <p:nvSpPr>
-              <p:cNvPr id="14" name="Shape 4"/>
-              <p:cNvSpPr/>
-              <p:nvPr/>
-            </p:nvSpPr>
-            <p:spPr>
-              <a:xfrm>
-                <a:off x="457200" y="1389888"/>
-                <a:ext cx="649224" cy="329184"/>
-              </a:xfrm>
-              <a:prstGeom prst="roundRect">
-                <a:avLst>
-                  <a:gd name="adj" fmla="val 50000"/>
-                </a:avLst>
-              </a:prstGeom>
-              <a:solidFill>
-                <a:srgbClr val="FFFFFF"/>
-              </a:solidFill>
-              <a:ln w="12700">
-                <a:solidFill>
-                  <a:srgbClr val="1D9E75"/>
-                </a:solidFill>
-                <a:prstDash val="solid"/>
-              </a:ln>
-            </p:spPr>
-          </p:sp>
-          <p:sp>
-            <p:nvSpPr>
-              <p:cNvPr id="15" name="Text 5"/>
-              <p:cNvSpPr txBox="1"/>
-              <p:nvPr/>
-            </p:nvSpPr>
-            <p:spPr>
-              <a:xfrm>
-                <a:off x="457200" y="1389888"/>
-                <a:ext cx="649224" cy="329184"/>
-              </a:xfrm>
-              <a:prstGeom prst="rect">
-                <a:avLst/>
-              </a:prstGeom>
-              <a:noFill/>
-              <a:ln/>
-            </p:spPr>
-            <p:txBody>
-              <a:bodyPr wrap="square" lIns="0" tIns="0" rIns="0" bIns="0" rtlCol="0" anchor="ctr"/>
-              <a:lstStyle/>
-              <a:p>
-                <a:pPr marL="0" indent="0" algn="ctr">
-                  <a:buNone/>
-                </a:pPr>
-                <a:r>
-                  <a:rPr lang="en-US" sz="1050" b="1" dirty="0">
-                    <a:solidFill>
-                      <a:srgbClr val="0F6E56"/>
-                    </a:solidFill>
-                    <a:latin typeface="Calibri" pitchFamily="34" charset="0"/>
-                    <a:ea typeface="Calibri" pitchFamily="34" charset="-122"/>
-                    <a:cs typeface="Calibri" pitchFamily="34" charset="-120"/>
-                  </a:rPr>
-                  <a:t>ROS 2</a:t>
-                </a:r>
-                <a:endParaRPr lang="en-US" sz="1050" dirty="0"/>
-              </a:p>
-            </p:txBody>
-          </p:sp>
-          <p:sp>
-            <p:nvSpPr>
-              <p:cNvPr id="16" name="Text 7"/>
-              <p:cNvSpPr txBox="1"/>
-              <p:nvPr/>
-            </p:nvSpPr>
-            <p:spPr>
-              <a:xfrm>
-                <a:off x="1252728" y="1389888"/>
-                <a:ext cx="577901" cy="329184"/>
-              </a:xfrm>
-              <a:prstGeom prst="rect">
-                <a:avLst/>
-              </a:prstGeom>
-              <a:noFill/>
-              <a:ln/>
-            </p:spPr>
-            <p:txBody>
-              <a:bodyPr wrap="square" lIns="0" tIns="0" rIns="0" bIns="0" rtlCol="0" anchor="ctr"/>
-              <a:lstStyle/>
-              <a:p>
-                <a:pPr marL="0" indent="0" algn="ctr">
-                  <a:buNone/>
-                </a:pPr>
-                <a:r>
-                  <a:rPr lang="en-US" sz="1050" b="1" dirty="0">
-                    <a:solidFill>
-                      <a:srgbClr val="0F6E56"/>
-                    </a:solidFill>
-                    <a:latin typeface="Calibri" pitchFamily="34" charset="0"/>
-                    <a:ea typeface="Calibri" pitchFamily="34" charset="-122"/>
-                    <a:cs typeface="Calibri" pitchFamily="34" charset="-120"/>
-                  </a:rPr>
-                  <a:t>Nav2</a:t>
-                </a:r>
-                <a:endParaRPr lang="en-US" sz="1050" dirty="0"/>
-              </a:p>
-            </p:txBody>
-          </p:sp>
-          <p:sp>
-            <p:nvSpPr>
-              <p:cNvPr id="17" name="Text 9"/>
-              <p:cNvSpPr txBox="1"/>
-              <p:nvPr/>
-            </p:nvSpPr>
-            <p:spPr>
-              <a:xfrm>
-                <a:off x="1976933" y="1389888"/>
-                <a:ext cx="2432304" cy="329184"/>
-              </a:xfrm>
-              <a:prstGeom prst="rect">
-                <a:avLst/>
-              </a:prstGeom>
-              <a:noFill/>
-              <a:ln/>
-            </p:spPr>
-            <p:txBody>
-              <a:bodyPr wrap="square" lIns="0" tIns="0" rIns="0" bIns="0" rtlCol="0" anchor="ctr"/>
-              <a:lstStyle/>
-              <a:p>
-                <a:pPr marL="0" indent="0" algn="ctr">
-                  <a:buNone/>
-                </a:pPr>
-                <a:r>
-                  <a:rPr lang="en-US" sz="1050" b="1" dirty="0">
-                    <a:solidFill>
-                      <a:srgbClr val="0F6E56"/>
-                    </a:solidFill>
-                    <a:latin typeface="Calibri" pitchFamily="34" charset="0"/>
-                    <a:ea typeface="Calibri" pitchFamily="34" charset="-122"/>
-                    <a:cs typeface="Calibri" pitchFamily="34" charset="-120"/>
-                  </a:rPr>
-                  <a:t>Eclipse Zenoh (P2P middleware)</a:t>
-                </a:r>
-                <a:endParaRPr lang="en-US" sz="1050" dirty="0"/>
-              </a:p>
-            </p:txBody>
-          </p:sp>
-          <p:sp>
-            <p:nvSpPr>
-              <p:cNvPr id="18" name="Shape 10"/>
-              <p:cNvSpPr/>
-              <p:nvPr/>
-            </p:nvSpPr>
-            <p:spPr>
-              <a:xfrm>
-                <a:off x="4555541" y="1389888"/>
-                <a:ext cx="2788920" cy="329184"/>
-              </a:xfrm>
-              <a:prstGeom prst="roundRect">
-                <a:avLst>
-                  <a:gd name="adj" fmla="val 50000"/>
-                </a:avLst>
-              </a:prstGeom>
-              <a:solidFill>
-                <a:srgbClr val="FFFFFF"/>
-              </a:solidFill>
-              <a:ln w="12700">
-                <a:solidFill>
-                  <a:srgbClr val="1D9E75"/>
-                </a:solidFill>
-                <a:prstDash val="solid"/>
-              </a:ln>
-            </p:spPr>
-          </p:sp>
-          <p:sp>
-            <p:nvSpPr>
-              <p:cNvPr id="19" name="Text 11"/>
-              <p:cNvSpPr txBox="1"/>
-              <p:nvPr/>
-            </p:nvSpPr>
-            <p:spPr>
-              <a:xfrm>
-                <a:off x="4555541" y="1389888"/>
-                <a:ext cx="2788920" cy="329184"/>
-              </a:xfrm>
-              <a:prstGeom prst="rect">
-                <a:avLst/>
-              </a:prstGeom>
-              <a:noFill/>
-              <a:ln/>
-            </p:spPr>
-            <p:txBody>
-              <a:bodyPr wrap="square" lIns="0" tIns="0" rIns="0" bIns="0" rtlCol="0" anchor="ctr"/>
-              <a:lstStyle/>
-              <a:p>
-                <a:pPr marL="0" indent="0" algn="ctr">
-                  <a:buNone/>
-                </a:pPr>
-                <a:r>
-                  <a:rPr lang="en-US" sz="1050" b="1" dirty="0">
-                    <a:solidFill>
-                      <a:srgbClr val="0F6E56"/>
-                    </a:solidFill>
-                    <a:latin typeface="Calibri" pitchFamily="34" charset="0"/>
-                    <a:ea typeface="Calibri" pitchFamily="34" charset="-122"/>
-                    <a:cs typeface="Calibri" pitchFamily="34" charset="-120"/>
-                  </a:rPr>
-                  <a:t>Wi-Fi Direct / local AP (simulated)</a:t>
-                </a:r>
-                <a:endParaRPr lang="en-US" sz="1050" dirty="0"/>
-              </a:p>
-            </p:txBody>
-          </p:sp>
-          <p:sp>
-            <p:nvSpPr>
-              <p:cNvPr id="20" name="Text 13"/>
-              <p:cNvSpPr txBox="1"/>
-              <p:nvPr/>
-            </p:nvSpPr>
-            <p:spPr>
-              <a:xfrm>
-                <a:off x="7490765" y="1389888"/>
-                <a:ext cx="2289658" cy="329184"/>
-              </a:xfrm>
-              <a:prstGeom prst="rect">
-                <a:avLst/>
-              </a:prstGeom>
-              <a:noFill/>
-              <a:ln/>
-            </p:spPr>
-            <p:txBody>
-              <a:bodyPr wrap="square" lIns="0" tIns="0" rIns="0" bIns="0" rtlCol="0" anchor="ctr"/>
-              <a:lstStyle/>
-              <a:p>
-                <a:pPr marL="0" indent="0" algn="ctr">
-                  <a:buNone/>
-                </a:pPr>
-                <a:r>
-                  <a:rPr lang="en-US" sz="1050" b="1" dirty="0">
-                    <a:solidFill>
-                      <a:srgbClr val="0F6E56"/>
-                    </a:solidFill>
-                    <a:latin typeface="Calibri" pitchFamily="34" charset="0"/>
-                    <a:ea typeface="Calibri" pitchFamily="34" charset="-122"/>
-                    <a:cs typeface="Calibri" pitchFamily="34" charset="-120"/>
-                  </a:rPr>
-                  <a:t>Gazebo / Ignition simulation</a:t>
-                </a:r>
-                <a:endParaRPr lang="en-US" sz="1050" dirty="0"/>
-              </a:p>
-            </p:txBody>
-          </p:sp>
-        </p:grpSp>
-      </p:grpSp>
-      <p:grpSp>
-        <p:nvGrpSpPr>
-          <p:cNvPr id="26" name="Group 25"/>
-          <p:cNvGrpSpPr/>
-          <p:nvPr/>
-        </p:nvGrpSpPr>
-        <p:grpSpPr>
-          <a:xfrm>
-            <a:off x="7496524" y="2048256"/>
-            <a:ext cx="3931920" cy="3218688"/>
-            <a:chOff x="7772400" y="1965960"/>
-            <a:chExt cx="3931920" cy="3218688"/>
-          </a:xfrm>
-        </p:grpSpPr>
-        <p:sp>
-          <p:nvSpPr>
-            <p:cNvPr id="27" name="Text 45"/>
-            <p:cNvSpPr txBox="1"/>
-            <p:nvPr/>
-          </p:nvSpPr>
-          <p:spPr>
-            <a:xfrm>
-              <a:off x="7772400" y="1965960"/>
-              <a:ext cx="3931920" cy="256032"/>
-            </a:xfrm>
-            <a:prstGeom prst="rect">
-              <a:avLst/>
-            </a:prstGeom>
-            <a:noFill/>
-            <a:ln/>
-          </p:spPr>
-          <p:txBody>
-            <a:bodyPr wrap="square" lIns="0" tIns="0" rIns="0" bIns="0" rtlCol="0" anchor="ctr"/>
-            <a:lstStyle/>
-            <a:p>
-              <a:pPr marL="0" indent="0">
-                <a:buNone/>
-              </a:pPr>
-              <a:r>
-                <a:rPr lang="en-US" sz="1100" b="1" kern="0" spc="100" dirty="0">
-                  <a:solidFill>
-                    <a:srgbClr val="0F6E56"/>
-                  </a:solidFill>
-                  <a:latin typeface="Calibri" pitchFamily="34" charset="0"/>
-                  <a:ea typeface="Calibri" pitchFamily="34" charset="-122"/>
-                  <a:cs typeface="Calibri" pitchFamily="34" charset="-120"/>
-                </a:rPr>
-                <a:t>CORE ALGORITHMS</a:t>
-              </a:r>
-              <a:endParaRPr lang="en-US" sz="1100" dirty="0"/>
-            </a:p>
-          </p:txBody>
-        </p:sp>
-        <p:sp>
-          <p:nvSpPr>
-            <p:cNvPr id="28" name="Text 46"/>
-            <p:cNvSpPr txBox="1"/>
-            <p:nvPr/>
-          </p:nvSpPr>
-          <p:spPr>
-            <a:xfrm>
-              <a:off x="7772400" y="2258568"/>
-              <a:ext cx="3931920" cy="2926080"/>
-            </a:xfrm>
-            <a:prstGeom prst="rect">
-              <a:avLst/>
-            </a:prstGeom>
-            <a:noFill/>
-            <a:ln/>
-          </p:spPr>
-          <p:txBody>
-            <a:bodyPr wrap="square" lIns="0" tIns="0" rIns="0" bIns="0" rtlCol="0" anchor="t"/>
-            <a:lstStyle/>
-            <a:p>
-              <a:pPr marL="177800" indent="-177800">
-                <a:lnSpc>
-                  <a:spcPct val="115000"/>
-                </a:lnSpc>
-                <a:spcAft>
-                  <a:spcPts val="1200"/>
-                </a:spcAft>
-                <a:buSzPct val="100000"/>
-                <a:buChar char="•"/>
-              </a:pPr>
-              <a:r>
-                <a:rPr lang="en-US" sz="1150" dirty="0">
-                  <a:solidFill>
-                    <a:srgbClr val="1F2937"/>
-                  </a:solidFill>
-                  <a:latin typeface="Calibri" pitchFamily="34" charset="0"/>
-                  <a:ea typeface="Calibri" pitchFamily="34" charset="-122"/>
-                  <a:cs typeface="Calibri" pitchFamily="34" charset="-120"/>
-                </a:rPr>
-                <a:t>Path planning: A* with event-driven replanning when costmaps change</a:t>
-              </a:r>
-              <a:endParaRPr lang="en-US" sz="1150" dirty="0"/>
-            </a:p>
-            <a:p>
-              <a:pPr marL="177800" indent="-177800">
-                <a:lnSpc>
-                  <a:spcPct val="115000"/>
-                </a:lnSpc>
-                <a:spcAft>
-                  <a:spcPts val="1200"/>
-                </a:spcAft>
-                <a:buSzPct val="100000"/>
-                <a:buChar char="•"/>
-              </a:pPr>
-              <a:r>
-                <a:rPr lang="en-US" sz="1150" dirty="0">
-                  <a:solidFill>
-                    <a:srgbClr val="1F2937"/>
-                  </a:solidFill>
-                  <a:latin typeface="Calibri" pitchFamily="34" charset="0"/>
-                  <a:ea typeface="Calibri" pitchFamily="34" charset="-122"/>
-                  <a:cs typeface="Calibri" pitchFamily="34" charset="-120"/>
-                </a:rPr>
-                <a:t>Conflict resolution: space-time reservation table, deterministic tie-break</a:t>
-              </a:r>
-              <a:endParaRPr lang="en-US" sz="1150" dirty="0"/>
-            </a:p>
-            <a:p>
-              <a:pPr marL="177800" indent="-177800">
-                <a:lnSpc>
-                  <a:spcPct val="115000"/>
-                </a:lnSpc>
-                <a:spcAft>
-                  <a:spcPts val="1200"/>
-                </a:spcAft>
-                <a:buSzPct val="100000"/>
-                <a:buChar char="•"/>
-              </a:pPr>
-              <a:r>
-                <a:rPr lang="en-US" sz="1150" dirty="0">
-                  <a:solidFill>
-                    <a:srgbClr val="1F2937"/>
-                  </a:solidFill>
-                  <a:latin typeface="Calibri" pitchFamily="34" charset="0"/>
-                  <a:ea typeface="Calibri" pitchFamily="34" charset="-122"/>
-                  <a:cs typeface="Calibri" pitchFamily="34" charset="-120"/>
-                </a:rPr>
-                <a:t>Deadlock handling: wait-for-graph detection, priority-based yield</a:t>
-              </a:r>
-              <a:endParaRPr lang="en-US" sz="1150" dirty="0"/>
-            </a:p>
-            <a:p>
-              <a:pPr marL="177800" indent="-177800">
-                <a:lnSpc>
-                  <a:spcPct val="115000"/>
-                </a:lnSpc>
-                <a:spcAft>
-                  <a:spcPts val="1200"/>
-                </a:spcAft>
-                <a:buSzPct val="100000"/>
-                <a:buChar char="•"/>
-              </a:pPr>
-              <a:r>
-                <a:rPr lang="en-US" sz="1150" dirty="0">
-                  <a:solidFill>
-                    <a:srgbClr val="1F2937"/>
-                  </a:solidFill>
-                  <a:latin typeface="Calibri" pitchFamily="34" charset="0"/>
-                  <a:ea typeface="Calibri" pitchFamily="34" charset="-122"/>
-                  <a:cs typeface="Calibri" pitchFamily="34" charset="-120"/>
-                </a:rPr>
-                <a:t>Task allocation: distributed auction (CBBA-inspired), lease-based reassignment</a:t>
-              </a:r>
-              <a:endParaRPr lang="en-US" sz="1150" dirty="0"/>
-            </a:p>
-          </p:txBody>
-        </p:sp>
-      </p:grpSp>
-      <p:grpSp>
-        <p:nvGrpSpPr>
-          <p:cNvPr id="29" name="Group 28"/>
-          <p:cNvGrpSpPr/>
-          <p:nvPr/>
-        </p:nvGrpSpPr>
-        <p:grpSpPr>
-          <a:xfrm>
-            <a:off x="4244308" y="2066544"/>
-            <a:ext cx="3246120" cy="2487168"/>
-            <a:chOff x="4343400" y="1965960"/>
-            <a:chExt cx="3246120" cy="2487168"/>
-          </a:xfrm>
-        </p:grpSpPr>
-        <p:sp>
-          <p:nvSpPr>
-            <p:cNvPr id="30" name="Text 31"/>
-            <p:cNvSpPr txBox="1"/>
-            <p:nvPr/>
-          </p:nvSpPr>
-          <p:spPr>
-            <a:xfrm>
-              <a:off x="4343400" y="1965960"/>
-              <a:ext cx="3246120" cy="256032"/>
-            </a:xfrm>
-            <a:prstGeom prst="rect">
-              <a:avLst/>
-            </a:prstGeom>
-            <a:noFill/>
-            <a:ln/>
-          </p:spPr>
-          <p:txBody>
-            <a:bodyPr wrap="square" lIns="0" tIns="0" rIns="0" bIns="0" rtlCol="0" anchor="ctr"/>
-            <a:lstStyle/>
-            <a:p>
-              <a:pPr marL="0" indent="0">
-                <a:buNone/>
-              </a:pPr>
-              <a:r>
-                <a:rPr lang="en-US" sz="1100" b="1" kern="0" spc="100" dirty="0">
-                  <a:solidFill>
-                    <a:srgbClr val="0F6E56"/>
-                  </a:solidFill>
-                  <a:latin typeface="Calibri" pitchFamily="34" charset="0"/>
-                  <a:ea typeface="Calibri" pitchFamily="34" charset="-122"/>
-                  <a:cs typeface="Calibri" pitchFamily="34" charset="-120"/>
-                </a:rPr>
-                <a:t>SIMULATION &amp; VALIDATION SETUP</a:t>
-              </a:r>
-              <a:endParaRPr lang="en-US" sz="1100" dirty="0"/>
-            </a:p>
-          </p:txBody>
-        </p:sp>
-        <p:grpSp>
-          <p:nvGrpSpPr>
-            <p:cNvPr id="31" name="Group 67"/>
-            <p:cNvGrpSpPr/>
-            <p:nvPr/>
-          </p:nvGrpSpPr>
-          <p:grpSpPr>
-            <a:xfrm>
-              <a:off x="4343400" y="2240280"/>
-              <a:ext cx="3172968" cy="502920"/>
-              <a:chOff x="4343400" y="2240280"/>
-              <a:chExt cx="3172968" cy="502920"/>
-            </a:xfrm>
-          </p:grpSpPr>
-          <p:grpSp>
-            <p:nvGrpSpPr>
-              <p:cNvPr id="49" name="Group 63"/>
-              <p:cNvGrpSpPr/>
-              <p:nvPr/>
-            </p:nvGrpSpPr>
-            <p:grpSpPr>
-              <a:xfrm>
-                <a:off x="4343400" y="2258568"/>
-                <a:ext cx="384048" cy="384048"/>
-                <a:chOff x="4343400" y="2258568"/>
-                <a:chExt cx="384048" cy="384048"/>
-              </a:xfrm>
-            </p:grpSpPr>
-            <p:sp>
-              <p:nvSpPr>
-                <p:cNvPr id="52" name="Shape 32"/>
-                <p:cNvSpPr/>
-                <p:nvPr/>
-              </p:nvSpPr>
-              <p:spPr>
-                <a:xfrm>
-                  <a:off x="4343400" y="2258568"/>
-                  <a:ext cx="384048" cy="384048"/>
-                </a:xfrm>
-                <a:prstGeom prst="ellipse">
-                  <a:avLst/>
-                </a:prstGeom>
-                <a:solidFill>
-                  <a:srgbClr val="1D9E75"/>
-                </a:solidFill>
-                <a:ln/>
-              </p:spPr>
-            </p:sp>
-            <p:pic>
-              <p:nvPicPr>
-                <p:cNvPr id="53" name="Image 2" descr="/home/claude/harmoni_ppt/icons/route.png"/>
-                <p:cNvPicPr>
-                  <a:picLocks noChangeAspect="1"/>
-                </p:cNvPicPr>
-                <p:nvPr/>
-              </p:nvPicPr>
-              <p:blipFill>
-                <a:blip r:embed="rId4"/>
-                <a:stretch>
-                  <a:fillRect/>
-                </a:stretch>
-              </p:blipFill>
-              <p:spPr>
-                <a:xfrm>
-                  <a:off x="4443984" y="2359152"/>
-                  <a:ext cx="182880" cy="182880"/>
-                </a:xfrm>
-                <a:prstGeom prst="rect">
-                  <a:avLst/>
-                </a:prstGeom>
-              </p:spPr>
-            </p:pic>
-          </p:grpSp>
-          <p:sp>
-            <p:nvSpPr>
-              <p:cNvPr id="50" name="Text 33"/>
-              <p:cNvSpPr txBox="1"/>
-              <p:nvPr/>
-            </p:nvSpPr>
-            <p:spPr>
-              <a:xfrm>
-                <a:off x="4864608" y="2240280"/>
-                <a:ext cx="2651760" cy="219456"/>
-              </a:xfrm>
-              <a:prstGeom prst="rect">
-                <a:avLst/>
-              </a:prstGeom>
-              <a:noFill/>
-              <a:ln/>
-            </p:spPr>
-            <p:txBody>
-              <a:bodyPr wrap="square" lIns="0" tIns="0" rIns="0" bIns="0" rtlCol="0" anchor="ctr"/>
-              <a:lstStyle/>
-              <a:p>
-                <a:pPr marL="0" indent="0">
-                  <a:buNone/>
-                </a:pPr>
-                <a:r>
-                  <a:rPr lang="en-US" sz="1100" b="1" dirty="0">
-                    <a:solidFill>
-                      <a:srgbClr val="12213B"/>
-                    </a:solidFill>
-                    <a:latin typeface="Calibri" pitchFamily="34" charset="0"/>
-                    <a:ea typeface="Calibri" pitchFamily="34" charset="-122"/>
-                    <a:cs typeface="Calibri" pitchFamily="34" charset="-120"/>
-                  </a:rPr>
-                  <a:t>Simulated world</a:t>
-                </a:r>
-                <a:endParaRPr lang="en-US" sz="1100" dirty="0"/>
-              </a:p>
-            </p:txBody>
-          </p:sp>
-          <p:sp>
-            <p:nvSpPr>
-              <p:cNvPr id="51" name="Text 34"/>
-              <p:cNvSpPr txBox="1"/>
-              <p:nvPr/>
-            </p:nvSpPr>
-            <p:spPr>
-              <a:xfrm>
-                <a:off x="4864608" y="2450592"/>
-                <a:ext cx="2651760" cy="292608"/>
-              </a:xfrm>
-              <a:prstGeom prst="rect">
-                <a:avLst/>
-              </a:prstGeom>
-              <a:noFill/>
-              <a:ln/>
-            </p:spPr>
-            <p:txBody>
-              <a:bodyPr wrap="square" lIns="0" tIns="0" rIns="0" bIns="0" rtlCol="0" anchor="ctr"/>
-              <a:lstStyle/>
-              <a:p>
-                <a:pPr marL="0" indent="0">
-                  <a:buNone/>
-                </a:pPr>
-                <a:r>
-                  <a:rPr lang="en-US" sz="900" dirty="0">
-                    <a:solidFill>
-                      <a:srgbClr val="6B7280"/>
-                    </a:solidFill>
-                    <a:latin typeface="Calibri" pitchFamily="34" charset="0"/>
-                    <a:ea typeface="Calibri" pitchFamily="34" charset="-122"/>
-                    <a:cs typeface="Calibri" pitchFamily="34" charset="-120"/>
-                  </a:rPr>
-                  <a:t>Gazebo/Ignition warehouse map — aisles, shelves, dynamic obstacles</a:t>
-                </a:r>
-                <a:endParaRPr lang="en-US" sz="900" dirty="0"/>
-              </a:p>
-            </p:txBody>
-          </p:sp>
-        </p:grpSp>
-        <p:grpSp>
-          <p:nvGrpSpPr>
-            <p:cNvPr id="32" name="Group 68"/>
-            <p:cNvGrpSpPr/>
-            <p:nvPr/>
-          </p:nvGrpSpPr>
-          <p:grpSpPr>
-            <a:xfrm>
-              <a:off x="4343400" y="2843784"/>
-              <a:ext cx="3172968" cy="502920"/>
-              <a:chOff x="4343400" y="2843784"/>
-              <a:chExt cx="3172968" cy="502920"/>
-            </a:xfrm>
-          </p:grpSpPr>
-          <p:grpSp>
-            <p:nvGrpSpPr>
-              <p:cNvPr id="44" name="Group 64"/>
-              <p:cNvGrpSpPr/>
-              <p:nvPr/>
-            </p:nvGrpSpPr>
-            <p:grpSpPr>
-              <a:xfrm>
-                <a:off x="4343400" y="2862072"/>
-                <a:ext cx="384048" cy="384048"/>
-                <a:chOff x="4343400" y="2862072"/>
-                <a:chExt cx="384048" cy="384048"/>
-              </a:xfrm>
-            </p:grpSpPr>
-            <p:sp>
-              <p:nvSpPr>
-                <p:cNvPr id="47" name="Shape 35"/>
-                <p:cNvSpPr/>
-                <p:nvPr/>
-              </p:nvSpPr>
-              <p:spPr>
-                <a:xfrm>
-                  <a:off x="4343400" y="2862072"/>
-                  <a:ext cx="384048" cy="384048"/>
-                </a:xfrm>
-                <a:prstGeom prst="ellipse">
-                  <a:avLst/>
-                </a:prstGeom>
-                <a:solidFill>
-                  <a:srgbClr val="1D9E75"/>
-                </a:solidFill>
-                <a:ln/>
-              </p:spPr>
-            </p:sp>
-            <p:pic>
-              <p:nvPicPr>
-                <p:cNvPr id="48" name="Image 3" descr="/home/claude/harmoni_ppt/icons/robot.png"/>
-                <p:cNvPicPr>
-                  <a:picLocks noChangeAspect="1"/>
-                </p:cNvPicPr>
-                <p:nvPr/>
-              </p:nvPicPr>
-              <p:blipFill>
-                <a:blip r:embed="rId5"/>
-                <a:stretch>
-                  <a:fillRect/>
-                </a:stretch>
-              </p:blipFill>
-              <p:spPr>
-                <a:xfrm>
-                  <a:off x="4443984" y="2962656"/>
-                  <a:ext cx="182880" cy="182880"/>
-                </a:xfrm>
-                <a:prstGeom prst="rect">
-                  <a:avLst/>
-                </a:prstGeom>
-              </p:spPr>
-            </p:pic>
-          </p:grpSp>
-          <p:sp>
-            <p:nvSpPr>
-              <p:cNvPr id="45" name="Text 36"/>
-              <p:cNvSpPr txBox="1"/>
-              <p:nvPr/>
-            </p:nvSpPr>
-            <p:spPr>
-              <a:xfrm>
-                <a:off x="4864608" y="2843784"/>
-                <a:ext cx="2651760" cy="219456"/>
-              </a:xfrm>
-              <a:prstGeom prst="rect">
-                <a:avLst/>
-              </a:prstGeom>
-              <a:noFill/>
-              <a:ln/>
-            </p:spPr>
-            <p:txBody>
-              <a:bodyPr wrap="square" lIns="0" tIns="0" rIns="0" bIns="0" rtlCol="0" anchor="ctr"/>
-              <a:lstStyle/>
-              <a:p>
-                <a:pPr marL="0" indent="0">
-                  <a:buNone/>
-                </a:pPr>
-                <a:r>
-                  <a:rPr lang="en-US" sz="1100" b="1" dirty="0">
-                    <a:solidFill>
-                      <a:srgbClr val="12213B"/>
-                    </a:solidFill>
-                    <a:latin typeface="Calibri" pitchFamily="34" charset="0"/>
-                    <a:ea typeface="Calibri" pitchFamily="34" charset="-122"/>
-                    <a:cs typeface="Calibri" pitchFamily="34" charset="-120"/>
-                  </a:rPr>
-                  <a:t>Simulated agents</a:t>
-                </a:r>
-                <a:endParaRPr lang="en-US" sz="1100" dirty="0"/>
-              </a:p>
-            </p:txBody>
-          </p:sp>
-          <p:sp>
-            <p:nvSpPr>
-              <p:cNvPr id="46" name="Text 37"/>
-              <p:cNvSpPr txBox="1"/>
-              <p:nvPr/>
-            </p:nvSpPr>
-            <p:spPr>
-              <a:xfrm>
-                <a:off x="4864608" y="3054096"/>
-                <a:ext cx="2651760" cy="292608"/>
-              </a:xfrm>
-              <a:prstGeom prst="rect">
-                <a:avLst/>
-              </a:prstGeom>
-              <a:noFill/>
-              <a:ln/>
-            </p:spPr>
-            <p:txBody>
-              <a:bodyPr wrap="square" lIns="0" tIns="0" rIns="0" bIns="0" rtlCol="0" anchor="ctr"/>
-              <a:lstStyle/>
-              <a:p>
-                <a:pPr marL="0" indent="0">
-                  <a:buNone/>
-                </a:pPr>
-                <a:r>
-                  <a:rPr lang="en-US" sz="900" dirty="0">
-                    <a:solidFill>
-                      <a:srgbClr val="6B7280"/>
-                    </a:solidFill>
-                    <a:latin typeface="Calibri" pitchFamily="34" charset="0"/>
-                    <a:ea typeface="Calibri" pitchFamily="34" charset="-122"/>
-                    <a:cs typeface="Calibri" pitchFamily="34" charset="-120"/>
-                  </a:rPr>
-                  <a:t>N AMR instances, each running the full ROS 2 stack</a:t>
-                </a:r>
-                <a:endParaRPr lang="en-US" sz="900" dirty="0"/>
-              </a:p>
-            </p:txBody>
-          </p:sp>
-        </p:grpSp>
-        <p:grpSp>
-          <p:nvGrpSpPr>
-            <p:cNvPr id="33" name="Group 69"/>
-            <p:cNvGrpSpPr/>
-            <p:nvPr/>
-          </p:nvGrpSpPr>
-          <p:grpSpPr>
-            <a:xfrm>
-              <a:off x="4343400" y="3447288"/>
-              <a:ext cx="3172968" cy="502920"/>
-              <a:chOff x="4343400" y="3447288"/>
-              <a:chExt cx="3172968" cy="502920"/>
-            </a:xfrm>
-          </p:grpSpPr>
-          <p:grpSp>
-            <p:nvGrpSpPr>
-              <p:cNvPr id="39" name="Group 65"/>
-              <p:cNvGrpSpPr/>
-              <p:nvPr/>
-            </p:nvGrpSpPr>
-            <p:grpSpPr>
-              <a:xfrm>
-                <a:off x="4343400" y="3465576"/>
-                <a:ext cx="384048" cy="384048"/>
-                <a:chOff x="4343400" y="3465576"/>
-                <a:chExt cx="384048" cy="384048"/>
-              </a:xfrm>
-            </p:grpSpPr>
-            <p:sp>
-              <p:nvSpPr>
-                <p:cNvPr id="42" name="Shape 38"/>
-                <p:cNvSpPr/>
-                <p:nvPr/>
-              </p:nvSpPr>
-              <p:spPr>
-                <a:xfrm>
-                  <a:off x="4343400" y="3465576"/>
-                  <a:ext cx="384048" cy="384048"/>
-                </a:xfrm>
-                <a:prstGeom prst="ellipse">
-                  <a:avLst/>
-                </a:prstGeom>
-                <a:solidFill>
-                  <a:srgbClr val="1D9E75"/>
-                </a:solidFill>
-                <a:ln/>
-              </p:spPr>
-            </p:sp>
-            <p:pic>
-              <p:nvPicPr>
-                <p:cNvPr id="43" name="Image 4" descr="/home/claude/harmoni_ppt/icons/wifi.png"/>
-                <p:cNvPicPr>
-                  <a:picLocks noChangeAspect="1"/>
-                </p:cNvPicPr>
-                <p:nvPr/>
-              </p:nvPicPr>
-              <p:blipFill>
-                <a:blip r:embed="rId6"/>
-                <a:stretch>
-                  <a:fillRect/>
-                </a:stretch>
-              </p:blipFill>
-              <p:spPr>
-                <a:xfrm>
-                  <a:off x="4443984" y="3566160"/>
-                  <a:ext cx="182880" cy="182880"/>
-                </a:xfrm>
-                <a:prstGeom prst="rect">
-                  <a:avLst/>
-                </a:prstGeom>
-              </p:spPr>
-            </p:pic>
-          </p:grpSp>
-          <p:sp>
-            <p:nvSpPr>
-              <p:cNvPr id="40" name="Text 39"/>
-              <p:cNvSpPr txBox="1"/>
-              <p:nvPr/>
-            </p:nvSpPr>
-            <p:spPr>
-              <a:xfrm>
-                <a:off x="4864608" y="3447288"/>
-                <a:ext cx="2651760" cy="219456"/>
-              </a:xfrm>
-              <a:prstGeom prst="rect">
-                <a:avLst/>
-              </a:prstGeom>
-              <a:noFill/>
-              <a:ln/>
-            </p:spPr>
-            <p:txBody>
-              <a:bodyPr wrap="square" lIns="0" tIns="0" rIns="0" bIns="0" rtlCol="0" anchor="ctr"/>
-              <a:lstStyle/>
-              <a:p>
-                <a:pPr marL="0" indent="0">
-                  <a:buNone/>
-                </a:pPr>
-                <a:r>
-                  <a:rPr lang="en-US" sz="1100" b="1" dirty="0">
-                    <a:solidFill>
-                      <a:srgbClr val="12213B"/>
-                    </a:solidFill>
-                    <a:latin typeface="Calibri" pitchFamily="34" charset="0"/>
-                    <a:ea typeface="Calibri" pitchFamily="34" charset="-122"/>
-                    <a:cs typeface="Calibri" pitchFamily="34" charset="-120"/>
-                  </a:rPr>
-                  <a:t>Network emulation</a:t>
-                </a:r>
-                <a:endParaRPr lang="en-US" sz="1100" dirty="0"/>
-              </a:p>
-            </p:txBody>
-          </p:sp>
-          <p:sp>
-            <p:nvSpPr>
-              <p:cNvPr id="41" name="Text 40"/>
-              <p:cNvSpPr txBox="1"/>
-              <p:nvPr/>
-            </p:nvSpPr>
-            <p:spPr>
-              <a:xfrm>
-                <a:off x="4864608" y="3657600"/>
-                <a:ext cx="2651760" cy="292608"/>
-              </a:xfrm>
-              <a:prstGeom prst="rect">
-                <a:avLst/>
-              </a:prstGeom>
-              <a:noFill/>
-              <a:ln/>
-            </p:spPr>
-            <p:txBody>
-              <a:bodyPr wrap="square" lIns="0" tIns="0" rIns="0" bIns="0" rtlCol="0" anchor="ctr"/>
-              <a:lstStyle/>
-              <a:p>
-                <a:pPr marL="0" indent="0">
-                  <a:buNone/>
-                </a:pPr>
-                <a:r>
-                  <a:rPr lang="en-US" sz="900" dirty="0">
-                    <a:solidFill>
-                      <a:srgbClr val="6B7280"/>
-                    </a:solidFill>
-                    <a:latin typeface="Calibri" pitchFamily="34" charset="0"/>
-                    <a:ea typeface="Calibri" pitchFamily="34" charset="-122"/>
-                    <a:cs typeface="Calibri" pitchFamily="34" charset="-120"/>
-                  </a:rPr>
-                  <a:t>Software fault injection triggers P2P / isolated-mode transitions</a:t>
-                </a:r>
-                <a:endParaRPr lang="en-US" sz="900" dirty="0"/>
-              </a:p>
-            </p:txBody>
-          </p:sp>
-        </p:grpSp>
-        <p:grpSp>
-          <p:nvGrpSpPr>
-            <p:cNvPr id="34" name="Group 70"/>
-            <p:cNvGrpSpPr/>
-            <p:nvPr/>
-          </p:nvGrpSpPr>
-          <p:grpSpPr>
-            <a:xfrm>
-              <a:off x="4343400" y="4050792"/>
-              <a:ext cx="3172968" cy="402336"/>
-              <a:chOff x="4343400" y="4050792"/>
-              <a:chExt cx="3172968" cy="402336"/>
-            </a:xfrm>
-          </p:grpSpPr>
-          <p:grpSp>
-            <p:nvGrpSpPr>
-              <p:cNvPr id="35" name="Group 66"/>
-              <p:cNvGrpSpPr/>
-              <p:nvPr/>
-            </p:nvGrpSpPr>
-            <p:grpSpPr>
-              <a:xfrm>
-                <a:off x="4343400" y="4069080"/>
-                <a:ext cx="384048" cy="384048"/>
-                <a:chOff x="4343400" y="4069080"/>
-                <a:chExt cx="384048" cy="384048"/>
-              </a:xfrm>
-            </p:grpSpPr>
-            <p:sp>
-              <p:nvSpPr>
-                <p:cNvPr id="37" name="Shape 41"/>
-                <p:cNvSpPr/>
-                <p:nvPr/>
-              </p:nvSpPr>
-              <p:spPr>
-                <a:xfrm>
-                  <a:off x="4343400" y="4069080"/>
-                  <a:ext cx="384048" cy="384048"/>
-                </a:xfrm>
-                <a:prstGeom prst="ellipse">
-                  <a:avLst/>
-                </a:prstGeom>
-                <a:solidFill>
-                  <a:srgbClr val="1D9E75"/>
-                </a:solidFill>
-                <a:ln/>
-              </p:spPr>
-            </p:sp>
-            <p:pic>
-              <p:nvPicPr>
-                <p:cNvPr id="38" name="Image 5" descr="/home/claude/harmoni_ppt/icons/chart.png"/>
-                <p:cNvPicPr>
-                  <a:picLocks noChangeAspect="1"/>
-                </p:cNvPicPr>
-                <p:nvPr/>
-              </p:nvPicPr>
-              <p:blipFill>
-                <a:blip r:embed="rId7"/>
-                <a:stretch>
-                  <a:fillRect/>
-                </a:stretch>
-              </p:blipFill>
-              <p:spPr>
-                <a:xfrm>
-                  <a:off x="4443984" y="4169664"/>
-                  <a:ext cx="182880" cy="182880"/>
-                </a:xfrm>
-                <a:prstGeom prst="rect">
-                  <a:avLst/>
-                </a:prstGeom>
-              </p:spPr>
-            </p:pic>
-          </p:grpSp>
-          <p:sp>
-            <p:nvSpPr>
-              <p:cNvPr id="36" name="Text 42"/>
-              <p:cNvSpPr txBox="1"/>
-              <p:nvPr/>
-            </p:nvSpPr>
-            <p:spPr>
-              <a:xfrm>
-                <a:off x="4864608" y="4050792"/>
-                <a:ext cx="2651760" cy="219456"/>
-              </a:xfrm>
-              <a:prstGeom prst="rect">
-                <a:avLst/>
-              </a:prstGeom>
-              <a:noFill/>
-              <a:ln/>
-            </p:spPr>
-            <p:txBody>
-              <a:bodyPr wrap="square" lIns="0" tIns="0" rIns="0" bIns="0" rtlCol="0" anchor="ctr"/>
-              <a:lstStyle/>
-              <a:p>
-                <a:pPr marL="0" indent="0">
-                  <a:buNone/>
-                </a:pPr>
-                <a:r>
-                  <a:rPr lang="en-US" sz="1100" b="1" dirty="0">
-                    <a:solidFill>
-                      <a:srgbClr val="12213B"/>
-                    </a:solidFill>
-                    <a:latin typeface="Calibri" pitchFamily="34" charset="0"/>
-                    <a:ea typeface="Calibri" pitchFamily="34" charset="-122"/>
-                    <a:cs typeface="Calibri" pitchFamily="34" charset="-120"/>
-                  </a:rPr>
-                  <a:t>Metrics logging</a:t>
-                </a:r>
-                <a:endParaRPr lang="en-US" sz="1100" dirty="0"/>
-              </a:p>
-            </p:txBody>
-          </p:sp>
-        </p:grpSp>
-      </p:grpSp>
-      <p:sp>
-        <p:nvSpPr>
-          <p:cNvPr id="55" name="Text 14"/>
+            <a:prstDash val="solid"/>
+          </a:ln>
+          <a:effectLst>
+            <a:outerShdw blurRad="50800" dist="38100" dir="2700000" algn="tl" rotWithShape="0">
+              <a:prstClr val="black">
+                <a:alpha val="40000"/>
+              </a:prstClr>
+            </a:outerShdw>
+          </a:effectLst>
+        </p:spPr>
+      </p:sp>
+      <p:sp>
+        <p:nvSpPr>
+          <p:cNvPr id="13" name="Text 3"/>
           <p:cNvSpPr txBox="1"/>
           <p:nvPr/>
         </p:nvSpPr>
         <p:spPr>
           <a:xfrm>
-            <a:off x="365760" y="2066544"/>
-            <a:ext cx="3657600" cy="256032"/>
+            <a:off x="329773" y="1353312"/>
+            <a:ext cx="5613490" cy="256032"/>
           </a:xfrm>
           <a:prstGeom prst="rect">
             <a:avLst/>
@@ -9502,8 +8042,315 @@
           <a:lstStyle/>
           <a:p>
             <a:pPr marL="0" indent="0">
+              <a:buFont typeface="Wingdings" pitchFamily="2" charset="2"/>
+              <a:buChar char="§"/>
+            </a:pPr>
+            <a:r>
+              <a:rPr lang="en-US" sz="1200" b="1" kern="0" spc="100" dirty="0" smtClean="0">
+                <a:solidFill>
+                  <a:srgbClr val="0F6E56"/>
+                </a:solidFill>
+                <a:latin typeface="Calibri" pitchFamily="34" charset="0"/>
+                <a:ea typeface="Calibri" pitchFamily="34" charset="-122"/>
+                <a:cs typeface="Calibri" pitchFamily="34" charset="-120"/>
+              </a:rPr>
+              <a:t> TECHNOLOGY </a:t>
+            </a:r>
+            <a:r>
+              <a:rPr lang="en-US" sz="1200" b="1" kern="0" spc="100" dirty="0">
+                <a:solidFill>
+                  <a:srgbClr val="0F6E56"/>
+                </a:solidFill>
+                <a:latin typeface="Calibri" pitchFamily="34" charset="0"/>
+                <a:ea typeface="Calibri" pitchFamily="34" charset="-122"/>
+                <a:cs typeface="Calibri" pitchFamily="34" charset="-120"/>
+              </a:rPr>
+              <a:t>STACK</a:t>
+            </a:r>
+            <a:endParaRPr lang="en-US" sz="1200" dirty="0"/>
+          </a:p>
+        </p:txBody>
+      </p:sp>
+      <p:sp>
+        <p:nvSpPr>
+          <p:cNvPr id="14" name="Shape 4"/>
+          <p:cNvSpPr/>
+          <p:nvPr/>
+        </p:nvSpPr>
+        <p:spPr>
+          <a:xfrm>
+            <a:off x="456863" y="1627632"/>
+            <a:ext cx="649224" cy="329184"/>
+          </a:xfrm>
+          <a:prstGeom prst="roundRect">
+            <a:avLst>
+              <a:gd name="adj" fmla="val 50000"/>
+            </a:avLst>
+          </a:prstGeom>
+          <a:solidFill>
+            <a:srgbClr val="FFFFFF"/>
+          </a:solidFill>
+          <a:ln w="12700">
+            <a:solidFill>
+              <a:schemeClr val="bg1">
+                <a:lumMod val="50000"/>
+              </a:schemeClr>
+            </a:solidFill>
+            <a:prstDash val="solid"/>
+          </a:ln>
+          <a:effectLst>
+            <a:outerShdw blurRad="50800" dist="38100" dir="2700000" algn="tl" rotWithShape="0">
+              <a:prstClr val="black">
+                <a:alpha val="40000"/>
+              </a:prstClr>
+            </a:outerShdw>
+          </a:effectLst>
+        </p:spPr>
+      </p:sp>
+      <p:sp>
+        <p:nvSpPr>
+          <p:cNvPr id="15" name="Text 5"/>
+          <p:cNvSpPr txBox="1"/>
+          <p:nvPr/>
+        </p:nvSpPr>
+        <p:spPr>
+          <a:xfrm>
+            <a:off x="456863" y="1627632"/>
+            <a:ext cx="649224" cy="329184"/>
+          </a:xfrm>
+          <a:prstGeom prst="rect">
+            <a:avLst/>
+          </a:prstGeom>
+          <a:noFill/>
+          <a:ln/>
+        </p:spPr>
+        <p:txBody>
+          <a:bodyPr wrap="square" lIns="0" tIns="0" rIns="0" bIns="0" rtlCol="0" anchor="ctr"/>
+          <a:lstStyle/>
+          <a:p>
+            <a:pPr marL="0" indent="0" algn="ctr">
               <a:buNone/>
             </a:pPr>
+            <a:r>
+              <a:rPr lang="en-US" sz="1050" b="1" dirty="0">
+                <a:solidFill>
+                  <a:schemeClr val="accent3">
+                    <a:lumMod val="75000"/>
+                  </a:schemeClr>
+                </a:solidFill>
+                <a:latin typeface="Calibri" pitchFamily="34" charset="0"/>
+                <a:ea typeface="Calibri" pitchFamily="34" charset="-122"/>
+                <a:cs typeface="Calibri" pitchFamily="34" charset="-120"/>
+              </a:rPr>
+              <a:t>ROS 2</a:t>
+            </a:r>
+            <a:endParaRPr lang="en-US" sz="1050" dirty="0">
+              <a:solidFill>
+                <a:schemeClr val="accent3">
+                  <a:lumMod val="75000"/>
+                </a:schemeClr>
+              </a:solidFill>
+            </a:endParaRPr>
+          </a:p>
+        </p:txBody>
+      </p:sp>
+      <p:sp>
+        <p:nvSpPr>
+          <p:cNvPr id="16" name="Text 7"/>
+          <p:cNvSpPr txBox="1"/>
+          <p:nvPr/>
+        </p:nvSpPr>
+        <p:spPr>
+          <a:xfrm>
+            <a:off x="1252391" y="1627632"/>
+            <a:ext cx="577901" cy="329184"/>
+          </a:xfrm>
+          <a:prstGeom prst="rect">
+            <a:avLst/>
+          </a:prstGeom>
+          <a:noFill/>
+          <a:ln/>
+        </p:spPr>
+        <p:txBody>
+          <a:bodyPr wrap="square" lIns="0" tIns="0" rIns="0" bIns="0" rtlCol="0" anchor="ctr"/>
+          <a:lstStyle/>
+          <a:p>
+            <a:pPr marL="0" indent="0" algn="ctr">
+              <a:buNone/>
+            </a:pPr>
+            <a:r>
+              <a:rPr lang="en-US" sz="1050" b="1" dirty="0">
+                <a:solidFill>
+                  <a:schemeClr val="accent3">
+                    <a:lumMod val="75000"/>
+                  </a:schemeClr>
+                </a:solidFill>
+                <a:latin typeface="Calibri" pitchFamily="34" charset="0"/>
+                <a:ea typeface="Calibri" pitchFamily="34" charset="-122"/>
+                <a:cs typeface="Calibri" pitchFamily="34" charset="-120"/>
+              </a:rPr>
+              <a:t>Nav2</a:t>
+            </a:r>
+            <a:endParaRPr lang="en-US" sz="1050" dirty="0">
+              <a:solidFill>
+                <a:schemeClr val="accent3">
+                  <a:lumMod val="75000"/>
+                </a:schemeClr>
+              </a:solidFill>
+            </a:endParaRPr>
+          </a:p>
+        </p:txBody>
+      </p:sp>
+      <p:sp>
+        <p:nvSpPr>
+          <p:cNvPr id="18" name="Shape 10"/>
+          <p:cNvSpPr/>
+          <p:nvPr/>
+        </p:nvSpPr>
+        <p:spPr>
+          <a:xfrm>
+            <a:off x="4555204" y="1627632"/>
+            <a:ext cx="2788920" cy="329184"/>
+          </a:xfrm>
+          <a:prstGeom prst="roundRect">
+            <a:avLst>
+              <a:gd name="adj" fmla="val 50000"/>
+            </a:avLst>
+          </a:prstGeom>
+          <a:solidFill>
+            <a:srgbClr val="FFFFFF"/>
+          </a:solidFill>
+          <a:ln w="12700">
+            <a:solidFill>
+              <a:schemeClr val="bg1">
+                <a:lumMod val="50000"/>
+              </a:schemeClr>
+            </a:solidFill>
+            <a:prstDash val="solid"/>
+          </a:ln>
+          <a:effectLst>
+            <a:outerShdw blurRad="50800" dist="38100" dir="2700000" algn="tl" rotWithShape="0">
+              <a:prstClr val="black">
+                <a:alpha val="40000"/>
+              </a:prstClr>
+            </a:outerShdw>
+          </a:effectLst>
+        </p:spPr>
+      </p:sp>
+      <p:sp>
+        <p:nvSpPr>
+          <p:cNvPr id="19" name="Text 11"/>
+          <p:cNvSpPr txBox="1"/>
+          <p:nvPr/>
+        </p:nvSpPr>
+        <p:spPr>
+          <a:xfrm>
+            <a:off x="4555204" y="1627632"/>
+            <a:ext cx="2788920" cy="329184"/>
+          </a:xfrm>
+          <a:prstGeom prst="rect">
+            <a:avLst/>
+          </a:prstGeom>
+          <a:noFill/>
+          <a:ln/>
+        </p:spPr>
+        <p:txBody>
+          <a:bodyPr wrap="square" lIns="0" tIns="0" rIns="0" bIns="0" rtlCol="0" anchor="ctr"/>
+          <a:lstStyle/>
+          <a:p>
+            <a:pPr marL="0" indent="0" algn="ctr">
+              <a:buNone/>
+            </a:pPr>
+            <a:r>
+              <a:rPr lang="en-US" sz="1050" b="1" dirty="0">
+                <a:solidFill>
+                  <a:srgbClr val="0F6E56"/>
+                </a:solidFill>
+                <a:latin typeface="Calibri" pitchFamily="34" charset="0"/>
+                <a:ea typeface="Calibri" pitchFamily="34" charset="-122"/>
+                <a:cs typeface="Calibri" pitchFamily="34" charset="-120"/>
+              </a:rPr>
+              <a:t>Wi-Fi Direct / local AP (simulated)</a:t>
+            </a:r>
+            <a:endParaRPr lang="en-US" sz="1050" dirty="0"/>
+          </a:p>
+        </p:txBody>
+      </p:sp>
+      <p:sp>
+        <p:nvSpPr>
+          <p:cNvPr id="20" name="Text 13"/>
+          <p:cNvSpPr txBox="1"/>
+          <p:nvPr/>
+        </p:nvSpPr>
+        <p:spPr>
+          <a:xfrm>
+            <a:off x="7496524" y="1627632"/>
+            <a:ext cx="2289658" cy="329184"/>
+          </a:xfrm>
+          <a:prstGeom prst="rect">
+            <a:avLst/>
+          </a:prstGeom>
+          <a:noFill/>
+          <a:ln/>
+        </p:spPr>
+        <p:txBody>
+          <a:bodyPr wrap="square" lIns="0" tIns="0" rIns="0" bIns="0" rtlCol="0" anchor="ctr"/>
+          <a:lstStyle/>
+          <a:p>
+            <a:pPr marL="0" indent="0" algn="ctr">
+              <a:buNone/>
+            </a:pPr>
+            <a:r>
+              <a:rPr lang="en-US" sz="1050" b="1" dirty="0">
+                <a:solidFill>
+                  <a:srgbClr val="0F6E56"/>
+                </a:solidFill>
+                <a:latin typeface="Calibri" pitchFamily="34" charset="0"/>
+                <a:ea typeface="Calibri" pitchFamily="34" charset="-122"/>
+                <a:cs typeface="Calibri" pitchFamily="34" charset="-120"/>
+              </a:rPr>
+              <a:t>Gazebo / Ignition simulation</a:t>
+            </a:r>
+            <a:endParaRPr lang="en-US" sz="1050" dirty="0"/>
+          </a:p>
+        </p:txBody>
+      </p:sp>
+      <p:sp>
+        <p:nvSpPr>
+          <p:cNvPr id="27" name="Text 45"/>
+          <p:cNvSpPr txBox="1"/>
+          <p:nvPr/>
+        </p:nvSpPr>
+        <p:spPr>
+          <a:xfrm>
+            <a:off x="7496524" y="2048256"/>
+            <a:ext cx="3931920" cy="256032"/>
+          </a:xfrm>
+          <a:prstGeom prst="rect">
+            <a:avLst/>
+          </a:prstGeom>
+          <a:noFill/>
+          <a:ln/>
+        </p:spPr>
+        <p:txBody>
+          <a:bodyPr wrap="square" lIns="0" tIns="0" rIns="0" bIns="0" rtlCol="0" anchor="ctr"/>
+          <a:lstStyle/>
+          <a:p>
+            <a:pPr marL="0" indent="0">
+              <a:buFont typeface="Wingdings" pitchFamily="2" charset="2"/>
+              <a:buChar char="§"/>
+            </a:pPr>
+            <a:r>
+              <a:rPr lang="en-US" sz="1100" b="1" kern="0" spc="100" dirty="0" smtClean="0">
+                <a:solidFill>
+                  <a:srgbClr val="0F6E56"/>
+                </a:solidFill>
+                <a:latin typeface="Calibri" pitchFamily="34" charset="0"/>
+                <a:ea typeface="Calibri" pitchFamily="34" charset="-122"/>
+                <a:cs typeface="Calibri" pitchFamily="34" charset="-120"/>
+              </a:rPr>
+              <a:t> CORE </a:t>
+            </a:r>
             <a:r>
               <a:rPr lang="en-US" sz="1100" b="1" kern="0" spc="100" dirty="0">
                 <a:solidFill>
@@ -9513,643 +8360,1072 @@
                 <a:ea typeface="Calibri" pitchFamily="34" charset="-122"/>
                 <a:cs typeface="Calibri" pitchFamily="34" charset="-120"/>
               </a:rPr>
-              <a:t>SOFTWARE ARCHITECTURE</a:t>
+              <a:t>ALGORITHMS</a:t>
             </a:r>
             <a:endParaRPr lang="en-US" sz="1100" dirty="0"/>
           </a:p>
         </p:txBody>
       </p:sp>
-      <p:grpSp>
-        <p:nvGrpSpPr>
-          <p:cNvPr id="56" name="Group 58"/>
-          <p:cNvGrpSpPr/>
+      <p:sp>
+        <p:nvSpPr>
+          <p:cNvPr id="28" name="Text 46"/>
+          <p:cNvSpPr txBox="1"/>
           <p:nvPr/>
-        </p:nvGrpSpPr>
-        <p:grpSpPr>
+        </p:nvSpPr>
+        <p:spPr>
+          <a:xfrm>
+            <a:off x="7496524" y="2340864"/>
+            <a:ext cx="3931920" cy="2318538"/>
+          </a:xfrm>
+          <a:prstGeom prst="rect">
+            <a:avLst/>
+          </a:prstGeom>
+          <a:noFill/>
+          <a:ln/>
+        </p:spPr>
+        <p:txBody>
+          <a:bodyPr wrap="square" lIns="0" tIns="0" rIns="0" bIns="0" rtlCol="0" anchor="t"/>
+          <a:lstStyle/>
+          <a:p>
+            <a:pPr marL="177800" indent="-177800">
+              <a:lnSpc>
+                <a:spcPct val="115000"/>
+              </a:lnSpc>
+              <a:spcAft>
+                <a:spcPts val="1200"/>
+              </a:spcAft>
+              <a:buSzPct val="100000"/>
+              <a:buFont typeface="Wingdings" pitchFamily="2" charset="2"/>
+              <a:buChar char="Ø"/>
+            </a:pPr>
+            <a:r>
+              <a:rPr lang="en-US" sz="1150" dirty="0">
+                <a:solidFill>
+                  <a:srgbClr val="1F2937"/>
+                </a:solidFill>
+                <a:latin typeface="Calibri" pitchFamily="34" charset="0"/>
+                <a:ea typeface="Calibri" pitchFamily="34" charset="-122"/>
+                <a:cs typeface="Calibri" pitchFamily="34" charset="-120"/>
+              </a:rPr>
+              <a:t>Path planning: A* with event-driven replanning when costmaps change</a:t>
+            </a:r>
+            <a:endParaRPr lang="en-US" sz="1150" dirty="0"/>
+          </a:p>
+          <a:p>
+            <a:pPr marL="177800" indent="-177800">
+              <a:lnSpc>
+                <a:spcPct val="115000"/>
+              </a:lnSpc>
+              <a:spcAft>
+                <a:spcPts val="1200"/>
+              </a:spcAft>
+              <a:buSzPct val="100000"/>
+              <a:buFont typeface="Wingdings" pitchFamily="2" charset="2"/>
+              <a:buChar char="Ø"/>
+            </a:pPr>
+            <a:r>
+              <a:rPr lang="en-US" sz="1150" dirty="0">
+                <a:solidFill>
+                  <a:srgbClr val="1F2937"/>
+                </a:solidFill>
+                <a:latin typeface="Calibri" pitchFamily="34" charset="0"/>
+                <a:ea typeface="Calibri" pitchFamily="34" charset="-122"/>
+                <a:cs typeface="Calibri" pitchFamily="34" charset="-120"/>
+              </a:rPr>
+              <a:t>Conflict resolution: space-time reservation table, deterministic tie-break</a:t>
+            </a:r>
+            <a:endParaRPr lang="en-US" sz="1150" dirty="0"/>
+          </a:p>
+          <a:p>
+            <a:pPr marL="177800" indent="-177800">
+              <a:lnSpc>
+                <a:spcPct val="115000"/>
+              </a:lnSpc>
+              <a:spcAft>
+                <a:spcPts val="1200"/>
+              </a:spcAft>
+              <a:buSzPct val="100000"/>
+              <a:buFont typeface="Wingdings" pitchFamily="2" charset="2"/>
+              <a:buChar char="Ø"/>
+            </a:pPr>
+            <a:r>
+              <a:rPr lang="en-US" sz="1150" dirty="0">
+                <a:solidFill>
+                  <a:srgbClr val="1F2937"/>
+                </a:solidFill>
+                <a:latin typeface="Calibri" pitchFamily="34" charset="0"/>
+                <a:ea typeface="Calibri" pitchFamily="34" charset="-122"/>
+                <a:cs typeface="Calibri" pitchFamily="34" charset="-120"/>
+              </a:rPr>
+              <a:t>Deadlock handling: wait-for-graph detection, priority-based yield</a:t>
+            </a:r>
+            <a:endParaRPr lang="en-US" sz="1150" dirty="0"/>
+          </a:p>
+          <a:p>
+            <a:pPr marL="177800" indent="-177800">
+              <a:lnSpc>
+                <a:spcPct val="115000"/>
+              </a:lnSpc>
+              <a:spcAft>
+                <a:spcPts val="1200"/>
+              </a:spcAft>
+              <a:buSzPct val="100000"/>
+              <a:buFont typeface="Wingdings" pitchFamily="2" charset="2"/>
+              <a:buChar char="Ø"/>
+            </a:pPr>
+            <a:r>
+              <a:rPr lang="en-US" sz="1150" dirty="0">
+                <a:solidFill>
+                  <a:srgbClr val="1F2937"/>
+                </a:solidFill>
+                <a:latin typeface="Calibri" pitchFamily="34" charset="0"/>
+                <a:ea typeface="Calibri" pitchFamily="34" charset="-122"/>
+                <a:cs typeface="Calibri" pitchFamily="34" charset="-120"/>
+              </a:rPr>
+              <a:t>Task allocation: distributed auction (CBBA-inspired), lease-based reassignment</a:t>
+            </a:r>
+            <a:endParaRPr lang="en-US" sz="1150" dirty="0"/>
+          </a:p>
+        </p:txBody>
+      </p:sp>
+      <p:sp>
+        <p:nvSpPr>
+          <p:cNvPr id="30" name="Text 31"/>
+          <p:cNvSpPr txBox="1"/>
+          <p:nvPr/>
+        </p:nvSpPr>
+        <p:spPr>
+          <a:xfrm>
+            <a:off x="4244308" y="2066544"/>
+            <a:ext cx="3246120" cy="256032"/>
+          </a:xfrm>
+          <a:prstGeom prst="rect">
+            <a:avLst/>
+          </a:prstGeom>
+          <a:noFill/>
+          <a:ln/>
+        </p:spPr>
+        <p:txBody>
+          <a:bodyPr wrap="square" lIns="0" tIns="0" rIns="0" bIns="0" rtlCol="0" anchor="ctr"/>
+          <a:lstStyle/>
+          <a:p>
+            <a:pPr marL="0" indent="0">
+              <a:buFont typeface="Wingdings" pitchFamily="2" charset="2"/>
+              <a:buChar char="§"/>
+            </a:pPr>
+            <a:r>
+              <a:rPr lang="en-US" sz="1100" b="1" kern="0" spc="100" dirty="0" smtClean="0">
+                <a:solidFill>
+                  <a:schemeClr val="accent3">
+                    <a:lumMod val="50000"/>
+                  </a:schemeClr>
+                </a:solidFill>
+                <a:latin typeface="Calibri" pitchFamily="34" charset="0"/>
+                <a:ea typeface="Calibri" pitchFamily="34" charset="-122"/>
+                <a:cs typeface="Calibri" pitchFamily="34" charset="-120"/>
+              </a:rPr>
+              <a:t> SIMULATION </a:t>
+            </a:r>
+            <a:r>
+              <a:rPr lang="en-US" sz="1100" b="1" kern="0" spc="100" dirty="0">
+                <a:solidFill>
+                  <a:schemeClr val="accent3">
+                    <a:lumMod val="50000"/>
+                  </a:schemeClr>
+                </a:solidFill>
+                <a:latin typeface="Calibri" pitchFamily="34" charset="0"/>
+                <a:ea typeface="Calibri" pitchFamily="34" charset="-122"/>
+                <a:cs typeface="Calibri" pitchFamily="34" charset="-120"/>
+              </a:rPr>
+              <a:t>&amp; VALIDATION SETUP</a:t>
+            </a:r>
+            <a:endParaRPr lang="en-US" sz="1100" dirty="0">
+              <a:solidFill>
+                <a:schemeClr val="accent3">
+                  <a:lumMod val="50000"/>
+                </a:schemeClr>
+              </a:solidFill>
+            </a:endParaRPr>
+          </a:p>
+        </p:txBody>
+      </p:sp>
+      <p:sp>
+        <p:nvSpPr>
+          <p:cNvPr id="50" name="Text 33"/>
+          <p:cNvSpPr txBox="1"/>
+          <p:nvPr/>
+        </p:nvSpPr>
+        <p:spPr>
+          <a:xfrm>
+            <a:off x="4273431" y="2340864"/>
+            <a:ext cx="3143845" cy="219456"/>
+          </a:xfrm>
+          <a:prstGeom prst="rect">
+            <a:avLst/>
+          </a:prstGeom>
+          <a:noFill/>
+          <a:ln/>
+        </p:spPr>
+        <p:txBody>
+          <a:bodyPr wrap="square" lIns="0" tIns="0" rIns="0" bIns="0" rtlCol="0" anchor="ctr"/>
+          <a:lstStyle/>
+          <a:p>
+            <a:pPr marL="0" indent="0">
+              <a:buFont typeface="Wingdings" pitchFamily="2" charset="2"/>
+              <a:buChar char="Ø"/>
+            </a:pPr>
+            <a:r>
+              <a:rPr lang="en-US" sz="1100" b="1" dirty="0">
+                <a:solidFill>
+                  <a:srgbClr val="12213B"/>
+                </a:solidFill>
+                <a:latin typeface="Calibri" pitchFamily="34" charset="0"/>
+                <a:ea typeface="Calibri" pitchFamily="34" charset="-122"/>
+                <a:cs typeface="Calibri" pitchFamily="34" charset="-120"/>
+              </a:rPr>
+              <a:t>Simulated world</a:t>
+            </a:r>
+            <a:endParaRPr lang="en-US" sz="1100" dirty="0"/>
+          </a:p>
+        </p:txBody>
+      </p:sp>
+      <p:sp>
+        <p:nvSpPr>
+          <p:cNvPr id="51" name="Text 34"/>
+          <p:cNvSpPr txBox="1"/>
+          <p:nvPr/>
+        </p:nvSpPr>
+        <p:spPr>
+          <a:xfrm>
+            <a:off x="4408900" y="2551176"/>
+            <a:ext cx="3008376" cy="292608"/>
+          </a:xfrm>
+          <a:prstGeom prst="rect">
+            <a:avLst/>
+          </a:prstGeom>
+          <a:noFill/>
+          <a:ln/>
+        </p:spPr>
+        <p:txBody>
+          <a:bodyPr wrap="square" lIns="0" tIns="0" rIns="0" bIns="0" rtlCol="0" anchor="ctr"/>
+          <a:lstStyle/>
+          <a:p>
+            <a:pPr marL="0" indent="0">
+              <a:buNone/>
+            </a:pPr>
+            <a:r>
+              <a:rPr lang="en-US" sz="900" dirty="0">
+                <a:solidFill>
+                  <a:srgbClr val="6B7280"/>
+                </a:solidFill>
+                <a:latin typeface="Calibri" pitchFamily="34" charset="0"/>
+                <a:ea typeface="Calibri" pitchFamily="34" charset="-122"/>
+                <a:cs typeface="Calibri" pitchFamily="34" charset="-120"/>
+              </a:rPr>
+              <a:t>Gazebo/Ignition warehouse map — aisles, shelves, dynamic obstacles</a:t>
+            </a:r>
+            <a:endParaRPr lang="en-US" sz="900" dirty="0"/>
+          </a:p>
+        </p:txBody>
+      </p:sp>
+      <p:sp>
+        <p:nvSpPr>
+          <p:cNvPr id="45" name="Text 36"/>
+          <p:cNvSpPr txBox="1"/>
+          <p:nvPr/>
+        </p:nvSpPr>
+        <p:spPr>
+          <a:xfrm>
+            <a:off x="4273430" y="2944368"/>
+            <a:ext cx="3143846" cy="219456"/>
+          </a:xfrm>
+          <a:prstGeom prst="rect">
+            <a:avLst/>
+          </a:prstGeom>
+          <a:noFill/>
+          <a:ln/>
+        </p:spPr>
+        <p:txBody>
+          <a:bodyPr wrap="square" lIns="0" tIns="0" rIns="0" bIns="0" rtlCol="0" anchor="ctr"/>
+          <a:lstStyle/>
+          <a:p>
+            <a:pPr marL="0" indent="0">
+              <a:buFont typeface="Wingdings" pitchFamily="2" charset="2"/>
+              <a:buChar char="Ø"/>
+            </a:pPr>
+            <a:r>
+              <a:rPr lang="en-US" sz="1100" b="1" dirty="0">
+                <a:solidFill>
+                  <a:srgbClr val="12213B"/>
+                </a:solidFill>
+                <a:latin typeface="Calibri" pitchFamily="34" charset="0"/>
+                <a:ea typeface="Calibri" pitchFamily="34" charset="-122"/>
+                <a:cs typeface="Calibri" pitchFamily="34" charset="-120"/>
+              </a:rPr>
+              <a:t>Simulated agents</a:t>
+            </a:r>
+            <a:endParaRPr lang="en-US" sz="1100" dirty="0"/>
+          </a:p>
+        </p:txBody>
+      </p:sp>
+      <p:sp>
+        <p:nvSpPr>
+          <p:cNvPr id="46" name="Text 37"/>
+          <p:cNvSpPr txBox="1"/>
+          <p:nvPr/>
+        </p:nvSpPr>
+        <p:spPr>
+          <a:xfrm>
+            <a:off x="4408900" y="3154680"/>
+            <a:ext cx="3008376" cy="182880"/>
+          </a:xfrm>
+          <a:prstGeom prst="rect">
+            <a:avLst/>
+          </a:prstGeom>
+          <a:noFill/>
+          <a:ln/>
+        </p:spPr>
+        <p:txBody>
+          <a:bodyPr wrap="square" lIns="0" tIns="0" rIns="0" bIns="0" rtlCol="0" anchor="ctr"/>
+          <a:lstStyle/>
+          <a:p>
+            <a:pPr marL="0" indent="0">
+              <a:buNone/>
+            </a:pPr>
+            <a:r>
+              <a:rPr lang="en-US" sz="900" dirty="0">
+                <a:solidFill>
+                  <a:srgbClr val="6B7280"/>
+                </a:solidFill>
+                <a:latin typeface="Calibri" pitchFamily="34" charset="0"/>
+                <a:ea typeface="Calibri" pitchFamily="34" charset="-122"/>
+                <a:cs typeface="Calibri" pitchFamily="34" charset="-120"/>
+              </a:rPr>
+              <a:t>N AMR instances, each running the full ROS 2 stack</a:t>
+            </a:r>
+            <a:endParaRPr lang="en-US" sz="900" dirty="0"/>
+          </a:p>
+        </p:txBody>
+      </p:sp>
+      <p:sp>
+        <p:nvSpPr>
+          <p:cNvPr id="40" name="Text 39"/>
+          <p:cNvSpPr txBox="1"/>
+          <p:nvPr/>
+        </p:nvSpPr>
+        <p:spPr>
+          <a:xfrm>
+            <a:off x="4273431" y="3438144"/>
+            <a:ext cx="3143845" cy="219456"/>
+          </a:xfrm>
+          <a:prstGeom prst="rect">
+            <a:avLst/>
+          </a:prstGeom>
+          <a:noFill/>
+          <a:ln/>
+        </p:spPr>
+        <p:txBody>
+          <a:bodyPr wrap="square" lIns="0" tIns="0" rIns="0" bIns="0" rtlCol="0" anchor="ctr"/>
+          <a:lstStyle/>
+          <a:p>
+            <a:pPr marL="0" indent="0">
+              <a:buFont typeface="Wingdings" pitchFamily="2" charset="2"/>
+              <a:buChar char="Ø"/>
+            </a:pPr>
+            <a:r>
+              <a:rPr lang="en-US" sz="1100" b="1" dirty="0">
+                <a:solidFill>
+                  <a:srgbClr val="12213B"/>
+                </a:solidFill>
+                <a:latin typeface="Calibri" pitchFamily="34" charset="0"/>
+                <a:ea typeface="Calibri" pitchFamily="34" charset="-122"/>
+                <a:cs typeface="Calibri" pitchFamily="34" charset="-120"/>
+              </a:rPr>
+              <a:t>Network emulation</a:t>
+            </a:r>
+            <a:endParaRPr lang="en-US" sz="1100" dirty="0"/>
+          </a:p>
+        </p:txBody>
+      </p:sp>
+      <p:sp>
+        <p:nvSpPr>
+          <p:cNvPr id="41" name="Text 40"/>
+          <p:cNvSpPr txBox="1"/>
+          <p:nvPr/>
+        </p:nvSpPr>
+        <p:spPr>
+          <a:xfrm>
+            <a:off x="4408900" y="3618286"/>
+            <a:ext cx="3008376" cy="250557"/>
+          </a:xfrm>
+          <a:prstGeom prst="rect">
+            <a:avLst/>
+          </a:prstGeom>
+          <a:noFill/>
+          <a:ln/>
+        </p:spPr>
+        <p:txBody>
+          <a:bodyPr wrap="square" lIns="0" tIns="0" rIns="0" bIns="0" rtlCol="0" anchor="ctr"/>
+          <a:lstStyle/>
+          <a:p>
+            <a:pPr marL="0" indent="0">
+              <a:buNone/>
+            </a:pPr>
+            <a:r>
+              <a:rPr lang="en-US" sz="900" dirty="0">
+                <a:solidFill>
+                  <a:srgbClr val="6B7280"/>
+                </a:solidFill>
+                <a:latin typeface="Calibri" pitchFamily="34" charset="0"/>
+                <a:ea typeface="Calibri" pitchFamily="34" charset="-122"/>
+                <a:cs typeface="Calibri" pitchFamily="34" charset="-120"/>
+              </a:rPr>
+              <a:t>Software fault injection triggers P2P / isolated-mode transitions</a:t>
+            </a:r>
+            <a:endParaRPr lang="en-US" sz="900" dirty="0"/>
+          </a:p>
+        </p:txBody>
+      </p:sp>
+      <p:sp>
+        <p:nvSpPr>
+          <p:cNvPr id="36" name="Text 42"/>
+          <p:cNvSpPr txBox="1"/>
+          <p:nvPr/>
+        </p:nvSpPr>
+        <p:spPr>
+          <a:xfrm>
+            <a:off x="4244308" y="3941064"/>
+            <a:ext cx="3143845" cy="219456"/>
+          </a:xfrm>
+          <a:prstGeom prst="rect">
+            <a:avLst/>
+          </a:prstGeom>
+          <a:noFill/>
+          <a:ln/>
+        </p:spPr>
+        <p:txBody>
+          <a:bodyPr wrap="square" lIns="0" tIns="0" rIns="0" bIns="0" rtlCol="0" anchor="ctr"/>
+          <a:lstStyle/>
+          <a:p>
+            <a:pPr marL="0" indent="0">
+              <a:buFont typeface="Wingdings" pitchFamily="2" charset="2"/>
+              <a:buChar char="Ø"/>
+            </a:pPr>
+            <a:r>
+              <a:rPr lang="en-US" sz="1100" b="1" dirty="0">
+                <a:solidFill>
+                  <a:srgbClr val="12213B"/>
+                </a:solidFill>
+                <a:latin typeface="Calibri" pitchFamily="34" charset="0"/>
+                <a:ea typeface="Calibri" pitchFamily="34" charset="-122"/>
+                <a:cs typeface="Calibri" pitchFamily="34" charset="-120"/>
+              </a:rPr>
+              <a:t>Metrics logging</a:t>
+            </a:r>
+            <a:endParaRPr lang="en-US" sz="1100" dirty="0"/>
+          </a:p>
+        </p:txBody>
+      </p:sp>
+      <p:sp>
+        <p:nvSpPr>
+          <p:cNvPr id="55" name="Text 14"/>
+          <p:cNvSpPr txBox="1"/>
+          <p:nvPr/>
+        </p:nvSpPr>
+        <p:spPr>
+          <a:xfrm>
+            <a:off x="365760" y="2066544"/>
+            <a:ext cx="3657600" cy="256032"/>
+          </a:xfrm>
+          <a:prstGeom prst="rect">
+            <a:avLst/>
+          </a:prstGeom>
+          <a:noFill/>
+          <a:ln/>
+        </p:spPr>
+        <p:txBody>
+          <a:bodyPr wrap="square" lIns="0" tIns="0" rIns="0" bIns="0" rtlCol="0" anchor="ctr"/>
+          <a:lstStyle/>
+          <a:p>
+            <a:pPr marL="0" indent="0">
+              <a:buFont typeface="Wingdings" pitchFamily="2" charset="2"/>
+              <a:buChar char="§"/>
+            </a:pPr>
+            <a:r>
+              <a:rPr lang="en-US" sz="1100" b="1" kern="0" spc="100" dirty="0" smtClean="0">
+                <a:solidFill>
+                  <a:srgbClr val="0F6E56"/>
+                </a:solidFill>
+                <a:latin typeface="Calibri" pitchFamily="34" charset="0"/>
+                <a:ea typeface="Calibri" pitchFamily="34" charset="-122"/>
+                <a:cs typeface="Calibri" pitchFamily="34" charset="-120"/>
+              </a:rPr>
+              <a:t> SOFTWARE </a:t>
+            </a:r>
+            <a:r>
+              <a:rPr lang="en-US" sz="1200" b="1" kern="0" spc="100" dirty="0">
+                <a:solidFill>
+                  <a:srgbClr val="0F6E56"/>
+                </a:solidFill>
+                <a:latin typeface="Calibri" pitchFamily="34" charset="0"/>
+                <a:ea typeface="Calibri" pitchFamily="34" charset="-122"/>
+                <a:cs typeface="Calibri" pitchFamily="34" charset="-120"/>
+              </a:rPr>
+              <a:t>ARCHITECTURE</a:t>
+            </a:r>
+            <a:endParaRPr lang="en-US" sz="1200" dirty="0"/>
+          </a:p>
+        </p:txBody>
+      </p:sp>
+      <p:sp>
+        <p:nvSpPr>
+          <p:cNvPr id="74" name="Shape 15"/>
+          <p:cNvSpPr/>
+          <p:nvPr/>
+        </p:nvSpPr>
+        <p:spPr>
           <a:xfrm>
             <a:off x="365760" y="2340864"/>
             <a:ext cx="3657600" cy="566928"/>
-            <a:chOff x="457200" y="2240280"/>
-            <a:chExt cx="3657600" cy="566928"/>
-          </a:xfrm>
-        </p:grpSpPr>
-        <p:sp>
-          <p:nvSpPr>
-            <p:cNvPr id="74" name="Shape 15"/>
-            <p:cNvSpPr/>
-            <p:nvPr/>
-          </p:nvSpPr>
-          <p:spPr>
-            <a:xfrm>
-              <a:off x="457200" y="2240280"/>
-              <a:ext cx="3657600" cy="566928"/>
-            </a:xfrm>
-            <a:prstGeom prst="roundRect">
-              <a:avLst>
-                <a:gd name="adj" fmla="val 13813"/>
-              </a:avLst>
-            </a:prstGeom>
+          </a:xfrm>
+          <a:prstGeom prst="roundRect">
+            <a:avLst>
+              <a:gd name="adj" fmla="val 13813"/>
+            </a:avLst>
+          </a:prstGeom>
+          <a:solidFill>
+            <a:schemeClr val="accent6">
+              <a:lumMod val="20000"/>
+              <a:lumOff val="80000"/>
+            </a:schemeClr>
+          </a:solidFill>
+          <a:ln w="12700">
             <a:solidFill>
               <a:schemeClr val="accent6">
-                <a:lumMod val="60000"/>
-                <a:lumOff val="40000"/>
+                <a:lumMod val="50000"/>
               </a:schemeClr>
             </a:solidFill>
-            <a:ln w="12700">
-              <a:solidFill>
-                <a:schemeClr val="accent2">
-                  <a:lumMod val="75000"/>
-                </a:schemeClr>
-              </a:solidFill>
-              <a:prstDash val="solid"/>
-            </a:ln>
-          </p:spPr>
-        </p:sp>
-        <p:pic>
-          <p:nvPicPr>
-            <p:cNvPr id="75" name="Image 1" descr="/home/claude/harmoni_ppt/icons/brain.png"/>
-            <p:cNvPicPr>
-              <a:picLocks noChangeAspect="1"/>
-            </p:cNvPicPr>
-            <p:nvPr/>
-          </p:nvPicPr>
-          <p:blipFill>
-            <a:blip r:embed="rId8"/>
-            <a:stretch>
-              <a:fillRect/>
-            </a:stretch>
-          </p:blipFill>
-          <p:spPr>
-            <a:xfrm>
-              <a:off x="585216" y="2368296"/>
-              <a:ext cx="274320" cy="274320"/>
-            </a:xfrm>
-            <a:prstGeom prst="rect">
-              <a:avLst/>
-            </a:prstGeom>
-          </p:spPr>
-        </p:pic>
-        <p:sp>
-          <p:nvSpPr>
-            <p:cNvPr id="76" name="Text 16"/>
-            <p:cNvSpPr txBox="1"/>
-            <p:nvPr/>
-          </p:nvSpPr>
-          <p:spPr>
-            <a:xfrm>
-              <a:off x="960120" y="2286000"/>
-              <a:ext cx="3063240" cy="201168"/>
-            </a:xfrm>
-            <a:prstGeom prst="rect">
-              <a:avLst/>
-            </a:prstGeom>
-            <a:noFill/>
-            <a:ln/>
-          </p:spPr>
-          <p:txBody>
-            <a:bodyPr wrap="square" lIns="0" tIns="0" rIns="0" bIns="0" rtlCol="0" anchor="ctr"/>
-            <a:lstStyle/>
-            <a:p>
-              <a:pPr marL="0" indent="0">
-                <a:buNone/>
-              </a:pPr>
-              <a:r>
-                <a:rPr lang="en-US" sz="1050" b="1" dirty="0">
-                  <a:solidFill>
-                    <a:srgbClr val="6B4E0A"/>
-                  </a:solidFill>
-                  <a:latin typeface="Calibri" pitchFamily="34" charset="0"/>
-                  <a:ea typeface="Calibri" pitchFamily="34" charset="-122"/>
-                  <a:cs typeface="Calibri" pitchFamily="34" charset="-120"/>
-                </a:rPr>
-                <a:t>Edge </a:t>
-              </a:r>
-              <a:r>
-                <a:rPr lang="en-US" sz="1050" b="1" dirty="0" smtClean="0">
-                  <a:solidFill>
-                    <a:srgbClr val="6B4E0A"/>
-                  </a:solidFill>
-                  <a:latin typeface="Calibri" pitchFamily="34" charset="0"/>
-                  <a:ea typeface="Calibri" pitchFamily="34" charset="-122"/>
-                  <a:cs typeface="Calibri" pitchFamily="34" charset="-120"/>
-                </a:rPr>
-                <a:t>AI</a:t>
-              </a:r>
-              <a:endParaRPr lang="en-US" sz="1050" dirty="0"/>
-            </a:p>
-          </p:txBody>
-        </p:sp>
-        <p:sp>
-          <p:nvSpPr>
-            <p:cNvPr id="77" name="Text 17"/>
-            <p:cNvSpPr txBox="1"/>
-            <p:nvPr/>
-          </p:nvSpPr>
-          <p:spPr>
-            <a:xfrm>
-              <a:off x="960120" y="2496312"/>
-              <a:ext cx="3063240" cy="274320"/>
-            </a:xfrm>
-            <a:prstGeom prst="rect">
-              <a:avLst/>
-            </a:prstGeom>
-            <a:noFill/>
-            <a:ln/>
-          </p:spPr>
-          <p:txBody>
-            <a:bodyPr wrap="square" lIns="0" tIns="0" rIns="0" bIns="0" rtlCol="0" anchor="ctr"/>
-            <a:lstStyle/>
-            <a:p>
-              <a:pPr marL="0" indent="0">
-                <a:buNone/>
-              </a:pPr>
-              <a:r>
-                <a:rPr lang="en-US" sz="850" dirty="0">
-                  <a:solidFill>
-                    <a:srgbClr val="6B4E0A"/>
-                  </a:solidFill>
-                  <a:latin typeface="Calibri" pitchFamily="34" charset="0"/>
-                  <a:ea typeface="Calibri" pitchFamily="34" charset="-122"/>
-                  <a:cs typeface="Calibri" pitchFamily="34" charset="-120"/>
-                </a:rPr>
-                <a:t>ETA/congestion prediction feeds route cost</a:t>
-              </a:r>
-              <a:r>
-                <a:rPr lang="en-US" sz="850" dirty="0" smtClean="0">
-                  <a:solidFill>
-                    <a:srgbClr val="6B4E0A"/>
-                  </a:solidFill>
-                  <a:latin typeface="Calibri" pitchFamily="34" charset="0"/>
-                  <a:ea typeface="Calibri" pitchFamily="34" charset="-122"/>
-                  <a:cs typeface="Calibri" pitchFamily="34" charset="-120"/>
-                </a:rPr>
-                <a:t>.</a:t>
-              </a:r>
-              <a:endParaRPr lang="en-US" sz="850" dirty="0"/>
-            </a:p>
-          </p:txBody>
-        </p:sp>
-      </p:grpSp>
-      <p:grpSp>
-        <p:nvGrpSpPr>
-          <p:cNvPr id="58" name="Group 59"/>
-          <p:cNvGrpSpPr/>
+            <a:prstDash val="solid"/>
+          </a:ln>
+        </p:spPr>
+      </p:sp>
+      <p:sp>
+        <p:nvSpPr>
+          <p:cNvPr id="76" name="Text 16"/>
+          <p:cNvSpPr txBox="1"/>
           <p:nvPr/>
-        </p:nvGrpSpPr>
-        <p:grpSpPr>
+        </p:nvSpPr>
+        <p:spPr>
+          <a:xfrm>
+            <a:off x="493776" y="2450592"/>
+            <a:ext cx="3063240" cy="201168"/>
+          </a:xfrm>
+          <a:prstGeom prst="rect">
+            <a:avLst/>
+          </a:prstGeom>
+          <a:noFill/>
+          <a:ln/>
+        </p:spPr>
+        <p:txBody>
+          <a:bodyPr wrap="square" lIns="0" tIns="0" rIns="0" bIns="0" rtlCol="0" anchor="ctr"/>
+          <a:lstStyle/>
+          <a:p>
+            <a:pPr marL="0" indent="0">
+              <a:buNone/>
+            </a:pPr>
+            <a:r>
+              <a:rPr lang="en-US" sz="1150" b="1" dirty="0">
+                <a:latin typeface="Calibri" pitchFamily="34" charset="0"/>
+                <a:ea typeface="Calibri" pitchFamily="34" charset="-122"/>
+                <a:cs typeface="Calibri" pitchFamily="34" charset="-120"/>
+              </a:rPr>
+              <a:t>Edge</a:t>
+            </a:r>
+            <a:r>
+              <a:rPr lang="en-US" sz="1150" b="1" dirty="0">
+                <a:solidFill>
+                  <a:srgbClr val="6B4E0A"/>
+                </a:solidFill>
+                <a:latin typeface="Calibri" pitchFamily="34" charset="0"/>
+                <a:ea typeface="Calibri" pitchFamily="34" charset="-122"/>
+                <a:cs typeface="Calibri" pitchFamily="34" charset="-120"/>
+              </a:rPr>
+              <a:t> </a:t>
+            </a:r>
+            <a:r>
+              <a:rPr lang="en-US" sz="1150" b="1" dirty="0" smtClean="0">
+                <a:latin typeface="Calibri" pitchFamily="34" charset="0"/>
+                <a:ea typeface="Calibri" pitchFamily="34" charset="-122"/>
+                <a:cs typeface="Calibri" pitchFamily="34" charset="-120"/>
+              </a:rPr>
+              <a:t>AI</a:t>
+            </a:r>
+            <a:endParaRPr lang="en-US" sz="1150" dirty="0"/>
+          </a:p>
+        </p:txBody>
+      </p:sp>
+      <p:sp>
+        <p:nvSpPr>
+          <p:cNvPr id="77" name="Text 17"/>
+          <p:cNvSpPr txBox="1"/>
+          <p:nvPr/>
+        </p:nvSpPr>
+        <p:spPr>
+          <a:xfrm>
+            <a:off x="493776" y="2596896"/>
+            <a:ext cx="3438144" cy="274320"/>
+          </a:xfrm>
+          <a:prstGeom prst="rect">
+            <a:avLst/>
+          </a:prstGeom>
+          <a:noFill/>
+          <a:ln/>
+        </p:spPr>
+        <p:txBody>
+          <a:bodyPr wrap="square" lIns="0" tIns="0" rIns="0" bIns="0" rtlCol="0" anchor="ctr"/>
+          <a:lstStyle/>
+          <a:p>
+            <a:pPr marL="0" indent="0">
+              <a:buNone/>
+            </a:pPr>
+            <a:r>
+              <a:rPr lang="en-US" sz="850" dirty="0">
+                <a:solidFill>
+                  <a:srgbClr val="6B4E0A"/>
+                </a:solidFill>
+                <a:latin typeface="Calibri" pitchFamily="34" charset="0"/>
+                <a:ea typeface="Calibri" pitchFamily="34" charset="-122"/>
+                <a:cs typeface="Calibri" pitchFamily="34" charset="-120"/>
+              </a:rPr>
+              <a:t>ETA/congestion prediction feeds route cost</a:t>
+            </a:r>
+            <a:r>
+              <a:rPr lang="en-US" sz="850" dirty="0" smtClean="0">
+                <a:solidFill>
+                  <a:srgbClr val="6B4E0A"/>
+                </a:solidFill>
+                <a:latin typeface="Calibri" pitchFamily="34" charset="0"/>
+                <a:ea typeface="Calibri" pitchFamily="34" charset="-122"/>
+                <a:cs typeface="Calibri" pitchFamily="34" charset="-120"/>
+              </a:rPr>
+              <a:t>.</a:t>
+            </a:r>
+            <a:endParaRPr lang="en-US" sz="850" dirty="0"/>
+          </a:p>
+        </p:txBody>
+      </p:sp>
+      <p:sp>
+        <p:nvSpPr>
+          <p:cNvPr id="71" name="Shape 19"/>
+          <p:cNvSpPr/>
+          <p:nvPr/>
+        </p:nvSpPr>
+        <p:spPr>
           <a:xfrm>
             <a:off x="365760" y="3072384"/>
             <a:ext cx="3657600" cy="530352"/>
-            <a:chOff x="457200" y="2971800"/>
-            <a:chExt cx="3657600" cy="530352"/>
-          </a:xfrm>
-        </p:grpSpPr>
-        <p:sp>
-          <p:nvSpPr>
-            <p:cNvPr id="71" name="Shape 19"/>
-            <p:cNvSpPr/>
-            <p:nvPr/>
-          </p:nvSpPr>
-          <p:spPr>
-            <a:xfrm>
-              <a:off x="457200" y="2971800"/>
-              <a:ext cx="3657600" cy="530352"/>
-            </a:xfrm>
-            <a:prstGeom prst="roundRect">
-              <a:avLst>
-                <a:gd name="adj" fmla="val 10345"/>
-              </a:avLst>
-            </a:prstGeom>
+          </a:xfrm>
+          <a:prstGeom prst="roundRect">
+            <a:avLst>
+              <a:gd name="adj" fmla="val 10345"/>
+            </a:avLst>
+          </a:prstGeom>
+          <a:solidFill>
+            <a:schemeClr val="accent6">
+              <a:lumMod val="20000"/>
+              <a:lumOff val="80000"/>
+            </a:schemeClr>
+          </a:solidFill>
+          <a:ln>
             <a:solidFill>
-              <a:srgbClr val="1D9E75"/>
+              <a:schemeClr val="accent6">
+                <a:lumMod val="50000"/>
+              </a:schemeClr>
             </a:solidFill>
-            <a:ln/>
-          </p:spPr>
-        </p:sp>
-        <p:sp>
-          <p:nvSpPr>
-            <p:cNvPr id="72" name="Text 20"/>
-            <p:cNvSpPr txBox="1"/>
-            <p:nvPr/>
-          </p:nvSpPr>
-          <p:spPr>
-            <a:xfrm>
-              <a:off x="585216" y="2999232"/>
-              <a:ext cx="3401568" cy="237744"/>
-            </a:xfrm>
-            <a:prstGeom prst="rect">
-              <a:avLst/>
-            </a:prstGeom>
-            <a:noFill/>
-            <a:ln/>
-          </p:spPr>
-          <p:txBody>
-            <a:bodyPr wrap="square" lIns="0" tIns="0" rIns="0" bIns="0" rtlCol="0" anchor="ctr"/>
-            <a:lstStyle/>
-            <a:p>
-              <a:pPr marL="0" indent="0">
-                <a:buNone/>
-              </a:pPr>
-              <a:r>
-                <a:rPr lang="en-US" sz="1150" b="1" dirty="0">
-                  <a:solidFill>
-                    <a:srgbClr val="FFFFFF"/>
-                  </a:solidFill>
-                  <a:latin typeface="Calibri" pitchFamily="34" charset="0"/>
-                  <a:ea typeface="Calibri" pitchFamily="34" charset="-122"/>
-                  <a:cs typeface="Calibri" pitchFamily="34" charset="-120"/>
-                </a:rPr>
-                <a:t>Fleet coordination</a:t>
-              </a:r>
-              <a:endParaRPr lang="en-US" sz="1150" dirty="0"/>
-            </a:p>
-          </p:txBody>
-        </p:sp>
-        <p:sp>
-          <p:nvSpPr>
-            <p:cNvPr id="73" name="Text 21"/>
-            <p:cNvSpPr txBox="1"/>
-            <p:nvPr/>
-          </p:nvSpPr>
-          <p:spPr>
-            <a:xfrm>
-              <a:off x="585216" y="3236976"/>
-              <a:ext cx="3401568" cy="237744"/>
-            </a:xfrm>
-            <a:prstGeom prst="rect">
-              <a:avLst/>
-            </a:prstGeom>
-            <a:noFill/>
-            <a:ln/>
-          </p:spPr>
-          <p:txBody>
-            <a:bodyPr wrap="square" lIns="0" tIns="0" rIns="0" bIns="0" rtlCol="0" anchor="ctr"/>
-            <a:lstStyle/>
-            <a:p>
-              <a:pPr marL="0" indent="0">
-                <a:buNone/>
-              </a:pPr>
-              <a:r>
-                <a:rPr lang="en-US" sz="850" dirty="0">
-                  <a:solidFill>
-                    <a:srgbClr val="F1F1F1"/>
-                  </a:solidFill>
-                  <a:latin typeface="Calibri" pitchFamily="34" charset="0"/>
-                  <a:ea typeface="Calibri" pitchFamily="34" charset="-122"/>
-                  <a:cs typeface="Calibri" pitchFamily="34" charset="-120"/>
-                </a:rPr>
-                <a:t>Intent, reservations, deadlock detect, auction</a:t>
-              </a:r>
-              <a:endParaRPr lang="en-US" sz="850" dirty="0"/>
-            </a:p>
-          </p:txBody>
-        </p:sp>
-      </p:grpSp>
-      <p:grpSp>
-        <p:nvGrpSpPr>
-          <p:cNvPr id="59" name="Group 60"/>
-          <p:cNvGrpSpPr/>
+          </a:ln>
+        </p:spPr>
+      </p:sp>
+      <p:sp>
+        <p:nvSpPr>
+          <p:cNvPr id="72" name="Text 20"/>
+          <p:cNvSpPr txBox="1"/>
           <p:nvPr/>
-        </p:nvGrpSpPr>
-        <p:grpSpPr>
+        </p:nvSpPr>
+        <p:spPr>
+          <a:xfrm>
+            <a:off x="493775" y="3154680"/>
+            <a:ext cx="3364655" cy="237744"/>
+          </a:xfrm>
+          <a:prstGeom prst="rect">
+            <a:avLst/>
+          </a:prstGeom>
+          <a:noFill/>
+          <a:ln/>
+        </p:spPr>
+        <p:txBody>
+          <a:bodyPr wrap="square" lIns="0" tIns="0" rIns="0" bIns="0" rtlCol="0" anchor="ctr"/>
+          <a:lstStyle/>
+          <a:p>
+            <a:pPr marL="0" indent="0">
+              <a:buNone/>
+            </a:pPr>
+            <a:r>
+              <a:rPr lang="en-US" sz="1150" b="1" dirty="0">
+                <a:latin typeface="Calibri" pitchFamily="34" charset="0"/>
+                <a:ea typeface="Calibri" pitchFamily="34" charset="-122"/>
+                <a:cs typeface="Calibri" pitchFamily="34" charset="-120"/>
+              </a:rPr>
+              <a:t>Fleet coordination</a:t>
+            </a:r>
+            <a:endParaRPr lang="en-US" sz="1150" dirty="0"/>
+          </a:p>
+        </p:txBody>
+      </p:sp>
+      <p:sp>
+        <p:nvSpPr>
+          <p:cNvPr id="73" name="Text 21"/>
+          <p:cNvSpPr txBox="1"/>
+          <p:nvPr/>
+        </p:nvSpPr>
+        <p:spPr>
+          <a:xfrm>
+            <a:off x="493776" y="3337560"/>
+            <a:ext cx="3401568" cy="237744"/>
+          </a:xfrm>
+          <a:prstGeom prst="rect">
+            <a:avLst/>
+          </a:prstGeom>
+          <a:noFill/>
+          <a:ln/>
+        </p:spPr>
+        <p:txBody>
+          <a:bodyPr wrap="square" lIns="0" tIns="0" rIns="0" bIns="0" rtlCol="0" anchor="ctr"/>
+          <a:lstStyle/>
+          <a:p>
+            <a:pPr marL="0" indent="0">
+              <a:buNone/>
+            </a:pPr>
+            <a:r>
+              <a:rPr lang="en-US" sz="850" dirty="0">
+                <a:latin typeface="Calibri" pitchFamily="34" charset="0"/>
+                <a:ea typeface="Calibri" pitchFamily="34" charset="-122"/>
+                <a:cs typeface="Calibri" pitchFamily="34" charset="-120"/>
+              </a:rPr>
+              <a:t>Intent, reservations, deadlock detect, auction</a:t>
+            </a:r>
+            <a:endParaRPr lang="en-US" sz="850" dirty="0"/>
+          </a:p>
+        </p:txBody>
+      </p:sp>
+      <p:sp>
+        <p:nvSpPr>
+          <p:cNvPr id="68" name="Shape 22"/>
+          <p:cNvSpPr/>
+          <p:nvPr/>
+        </p:nvSpPr>
+        <p:spPr>
           <a:xfrm>
             <a:off x="365760" y="3743565"/>
             <a:ext cx="3657600" cy="530352"/>
-            <a:chOff x="457200" y="3557016"/>
-            <a:chExt cx="3657600" cy="530352"/>
-          </a:xfrm>
-        </p:grpSpPr>
-        <p:sp>
-          <p:nvSpPr>
-            <p:cNvPr id="68" name="Shape 22"/>
-            <p:cNvSpPr/>
-            <p:nvPr/>
-          </p:nvSpPr>
-          <p:spPr>
-            <a:xfrm>
-              <a:off x="457200" y="3557016"/>
-              <a:ext cx="3657600" cy="530352"/>
-            </a:xfrm>
-            <a:prstGeom prst="roundRect">
-              <a:avLst>
-                <a:gd name="adj" fmla="val 10345"/>
-              </a:avLst>
-            </a:prstGeom>
+          </a:xfrm>
+          <a:prstGeom prst="roundRect">
+            <a:avLst>
+              <a:gd name="adj" fmla="val 10345"/>
+            </a:avLst>
+          </a:prstGeom>
+          <a:solidFill>
+            <a:schemeClr val="accent6">
+              <a:lumMod val="20000"/>
+              <a:lumOff val="80000"/>
+            </a:schemeClr>
+          </a:solidFill>
+          <a:ln>
             <a:solidFill>
-              <a:srgbClr val="534AB7"/>
+              <a:schemeClr val="accent6">
+                <a:lumMod val="50000"/>
+              </a:schemeClr>
             </a:solidFill>
-            <a:ln/>
-          </p:spPr>
-        </p:sp>
-        <p:sp>
-          <p:nvSpPr>
-            <p:cNvPr id="69" name="Text 23"/>
-            <p:cNvSpPr txBox="1"/>
-            <p:nvPr/>
-          </p:nvSpPr>
-          <p:spPr>
-            <a:xfrm>
-              <a:off x="585216" y="3584448"/>
-              <a:ext cx="3401568" cy="237744"/>
-            </a:xfrm>
-            <a:prstGeom prst="rect">
-              <a:avLst/>
-            </a:prstGeom>
-            <a:noFill/>
-            <a:ln/>
-          </p:spPr>
-          <p:txBody>
-            <a:bodyPr wrap="square" lIns="0" tIns="0" rIns="0" bIns="0" rtlCol="0" anchor="ctr"/>
-            <a:lstStyle/>
-            <a:p>
-              <a:pPr marL="0" indent="0">
-                <a:buNone/>
-              </a:pPr>
-              <a:r>
-                <a:rPr lang="en-US" sz="1150" b="1" dirty="0">
-                  <a:solidFill>
-                    <a:srgbClr val="FFFFFF"/>
-                  </a:solidFill>
-                  <a:latin typeface="Calibri" pitchFamily="34" charset="0"/>
-                  <a:ea typeface="Calibri" pitchFamily="34" charset="-122"/>
-                  <a:cs typeface="Calibri" pitchFamily="34" charset="-120"/>
-                </a:rPr>
-                <a:t>Local autonomy (Nav2)</a:t>
-              </a:r>
-              <a:endParaRPr lang="en-US" sz="1150" dirty="0"/>
-            </a:p>
-          </p:txBody>
-        </p:sp>
-        <p:sp>
-          <p:nvSpPr>
-            <p:cNvPr id="70" name="Text 24"/>
-            <p:cNvSpPr txBox="1"/>
-            <p:nvPr/>
-          </p:nvSpPr>
-          <p:spPr>
-            <a:xfrm>
-              <a:off x="585216" y="3822192"/>
-              <a:ext cx="3401568" cy="237744"/>
-            </a:xfrm>
-            <a:prstGeom prst="rect">
-              <a:avLst/>
-            </a:prstGeom>
-            <a:noFill/>
-            <a:ln/>
-          </p:spPr>
-          <p:txBody>
-            <a:bodyPr wrap="square" lIns="0" tIns="0" rIns="0" bIns="0" rtlCol="0" anchor="ctr"/>
-            <a:lstStyle/>
-            <a:p>
-              <a:pPr marL="0" indent="0">
-                <a:buNone/>
-              </a:pPr>
-              <a:r>
-                <a:rPr lang="en-US" sz="850" dirty="0">
-                  <a:solidFill>
-                    <a:srgbClr val="F1F1F1"/>
-                  </a:solidFill>
-                  <a:latin typeface="Calibri" pitchFamily="34" charset="0"/>
-                  <a:ea typeface="Calibri" pitchFamily="34" charset="-122"/>
-                  <a:cs typeface="Calibri" pitchFamily="34" charset="-120"/>
-                </a:rPr>
-                <a:t>Global/local planning + costmaps</a:t>
-              </a:r>
-              <a:endParaRPr lang="en-US" sz="850" dirty="0"/>
-            </a:p>
-          </p:txBody>
-        </p:sp>
-      </p:grpSp>
-      <p:grpSp>
-        <p:nvGrpSpPr>
-          <p:cNvPr id="60" name="Group 61"/>
-          <p:cNvGrpSpPr/>
+          </a:ln>
+        </p:spPr>
+      </p:sp>
+      <p:sp>
+        <p:nvSpPr>
+          <p:cNvPr id="69" name="Text 23"/>
+          <p:cNvSpPr txBox="1"/>
           <p:nvPr/>
-        </p:nvGrpSpPr>
-        <p:grpSpPr>
+        </p:nvSpPr>
+        <p:spPr>
+          <a:xfrm>
+            <a:off x="493776" y="3813048"/>
+            <a:ext cx="3364654" cy="237744"/>
+          </a:xfrm>
+          <a:prstGeom prst="rect">
+            <a:avLst/>
+          </a:prstGeom>
+          <a:noFill/>
+          <a:ln/>
+        </p:spPr>
+        <p:txBody>
+          <a:bodyPr wrap="square" lIns="0" tIns="0" rIns="0" bIns="0" rtlCol="0" anchor="ctr"/>
+          <a:lstStyle/>
+          <a:p>
+            <a:pPr marL="0" indent="0">
+              <a:buNone/>
+            </a:pPr>
+            <a:r>
+              <a:rPr lang="en-US" sz="1150" b="1" dirty="0">
+                <a:latin typeface="Calibri" pitchFamily="34" charset="0"/>
+                <a:ea typeface="Calibri" pitchFamily="34" charset="-122"/>
+                <a:cs typeface="Calibri" pitchFamily="34" charset="-120"/>
+              </a:rPr>
+              <a:t>Local autonomy (Nav2)</a:t>
+            </a:r>
+            <a:endParaRPr lang="en-US" sz="1150" dirty="0"/>
+          </a:p>
+        </p:txBody>
+      </p:sp>
+      <p:sp>
+        <p:nvSpPr>
+          <p:cNvPr id="70" name="Text 24"/>
+          <p:cNvSpPr txBox="1"/>
+          <p:nvPr/>
+        </p:nvSpPr>
+        <p:spPr>
+          <a:xfrm>
+            <a:off x="493776" y="4008741"/>
+            <a:ext cx="3401567" cy="237744"/>
+          </a:xfrm>
+          <a:prstGeom prst="rect">
+            <a:avLst/>
+          </a:prstGeom>
+          <a:noFill/>
+          <a:ln/>
+        </p:spPr>
+        <p:txBody>
+          <a:bodyPr wrap="square" lIns="0" tIns="0" rIns="0" bIns="0" rtlCol="0" anchor="ctr"/>
+          <a:lstStyle/>
+          <a:p>
+            <a:pPr marL="0" indent="0">
+              <a:buNone/>
+            </a:pPr>
+            <a:r>
+              <a:rPr lang="en-US" sz="850" dirty="0">
+                <a:latin typeface="Calibri" pitchFamily="34" charset="0"/>
+                <a:ea typeface="Calibri" pitchFamily="34" charset="-122"/>
+                <a:cs typeface="Calibri" pitchFamily="34" charset="-120"/>
+              </a:rPr>
+              <a:t>Global/local planning + costmaps</a:t>
+            </a:r>
+            <a:endParaRPr lang="en-US" sz="850" dirty="0"/>
+          </a:p>
+        </p:txBody>
+      </p:sp>
+      <p:sp>
+        <p:nvSpPr>
+          <p:cNvPr id="65" name="Shape 25"/>
+          <p:cNvSpPr/>
+          <p:nvPr/>
+        </p:nvSpPr>
+        <p:spPr>
           <a:xfrm>
             <a:off x="365760" y="4406931"/>
             <a:ext cx="3657600" cy="530352"/>
-            <a:chOff x="457200" y="4142232"/>
-            <a:chExt cx="3657600" cy="530352"/>
-          </a:xfrm>
-        </p:grpSpPr>
-        <p:sp>
-          <p:nvSpPr>
-            <p:cNvPr id="65" name="Shape 25"/>
-            <p:cNvSpPr/>
-            <p:nvPr/>
-          </p:nvSpPr>
-          <p:spPr>
-            <a:xfrm>
-              <a:off x="457200" y="4142232"/>
-              <a:ext cx="3657600" cy="530352"/>
-            </a:xfrm>
-            <a:prstGeom prst="roundRect">
-              <a:avLst>
-                <a:gd name="adj" fmla="val 10345"/>
-              </a:avLst>
-            </a:prstGeom>
+          </a:xfrm>
+          <a:prstGeom prst="roundRect">
+            <a:avLst>
+              <a:gd name="adj" fmla="val 10345"/>
+            </a:avLst>
+          </a:prstGeom>
+          <a:solidFill>
+            <a:schemeClr val="accent6">
+              <a:lumMod val="20000"/>
+              <a:lumOff val="80000"/>
+            </a:schemeClr>
+          </a:solidFill>
+          <a:ln>
             <a:solidFill>
-              <a:srgbClr val="D85A30"/>
+              <a:schemeClr val="accent6">
+                <a:lumMod val="50000"/>
+              </a:schemeClr>
             </a:solidFill>
-            <a:ln/>
-          </p:spPr>
-        </p:sp>
-        <p:sp>
-          <p:nvSpPr>
-            <p:cNvPr id="66" name="Text 26"/>
-            <p:cNvSpPr txBox="1"/>
-            <p:nvPr/>
-          </p:nvSpPr>
-          <p:spPr>
-            <a:xfrm>
-              <a:off x="585216" y="4169664"/>
-              <a:ext cx="3401568" cy="237744"/>
-            </a:xfrm>
-            <a:prstGeom prst="rect">
-              <a:avLst/>
-            </a:prstGeom>
-            <a:noFill/>
-            <a:ln/>
-          </p:spPr>
-          <p:txBody>
-            <a:bodyPr wrap="square" lIns="0" tIns="0" rIns="0" bIns="0" rtlCol="0" anchor="ctr"/>
-            <a:lstStyle/>
-            <a:p>
-              <a:pPr marL="0" indent="0">
-                <a:buNone/>
-              </a:pPr>
-              <a:r>
-                <a:rPr lang="en-US" sz="1150" b="1" dirty="0">
-                  <a:solidFill>
-                    <a:srgbClr val="FFFFFF"/>
-                  </a:solidFill>
-                  <a:latin typeface="Calibri" pitchFamily="34" charset="0"/>
-                  <a:ea typeface="Calibri" pitchFamily="34" charset="-122"/>
-                  <a:cs typeface="Calibri" pitchFamily="34" charset="-120"/>
-                </a:rPr>
-                <a:t>Perception &amp; safety</a:t>
-              </a:r>
-              <a:endParaRPr lang="en-US" sz="1150" dirty="0"/>
-            </a:p>
-          </p:txBody>
-        </p:sp>
-        <p:sp>
-          <p:nvSpPr>
-            <p:cNvPr id="67" name="Text 27"/>
-            <p:cNvSpPr txBox="1"/>
-            <p:nvPr/>
-          </p:nvSpPr>
-          <p:spPr>
-            <a:xfrm>
-              <a:off x="585216" y="4407408"/>
-              <a:ext cx="3401568" cy="237744"/>
-            </a:xfrm>
-            <a:prstGeom prst="rect">
-              <a:avLst/>
-            </a:prstGeom>
-            <a:noFill/>
-            <a:ln/>
-          </p:spPr>
-          <p:txBody>
-            <a:bodyPr wrap="square" lIns="0" tIns="0" rIns="0" bIns="0" rtlCol="0" anchor="ctr"/>
-            <a:lstStyle/>
-            <a:p>
-              <a:pPr marL="0" indent="0">
-                <a:buNone/>
-              </a:pPr>
-              <a:r>
-                <a:rPr lang="en-US" sz="850" dirty="0">
-                  <a:solidFill>
-                    <a:srgbClr val="F1F1F1"/>
-                  </a:solidFill>
-                  <a:latin typeface="Calibri" pitchFamily="34" charset="0"/>
-                  <a:ea typeface="Calibri" pitchFamily="34" charset="-122"/>
-                  <a:cs typeface="Calibri" pitchFamily="34" charset="-120"/>
-                </a:rPr>
-                <a:t>Sensor-processing pipeline, collision monitor — overrides above</a:t>
-              </a:r>
-              <a:endParaRPr lang="en-US" sz="850" dirty="0"/>
-            </a:p>
-          </p:txBody>
-        </p:sp>
-      </p:grpSp>
-      <p:grpSp>
-        <p:nvGrpSpPr>
-          <p:cNvPr id="61" name="Group 62"/>
-          <p:cNvGrpSpPr/>
+          </a:ln>
+        </p:spPr>
+      </p:sp>
+      <p:sp>
+        <p:nvSpPr>
+          <p:cNvPr id="66" name="Text 26"/>
+          <p:cNvSpPr txBox="1"/>
           <p:nvPr/>
-        </p:nvGrpSpPr>
-        <p:grpSpPr>
+        </p:nvSpPr>
+        <p:spPr>
+          <a:xfrm>
+            <a:off x="493776" y="4434363"/>
+            <a:ext cx="3401568" cy="237744"/>
+          </a:xfrm>
+          <a:prstGeom prst="rect">
+            <a:avLst/>
+          </a:prstGeom>
+          <a:noFill/>
+          <a:ln/>
+        </p:spPr>
+        <p:txBody>
+          <a:bodyPr wrap="square" lIns="0" tIns="0" rIns="0" bIns="0" rtlCol="0" anchor="ctr"/>
+          <a:lstStyle/>
+          <a:p>
+            <a:pPr marL="0" indent="0">
+              <a:buNone/>
+            </a:pPr>
+            <a:r>
+              <a:rPr lang="en-US" sz="1150" b="1" dirty="0">
+                <a:latin typeface="Calibri" pitchFamily="34" charset="0"/>
+                <a:ea typeface="Calibri" pitchFamily="34" charset="-122"/>
+                <a:cs typeface="Calibri" pitchFamily="34" charset="-120"/>
+              </a:rPr>
+              <a:t>Perception &amp; safety</a:t>
+            </a:r>
+            <a:endParaRPr lang="en-US" sz="1150" dirty="0"/>
+          </a:p>
+        </p:txBody>
+      </p:sp>
+      <p:sp>
+        <p:nvSpPr>
+          <p:cNvPr id="67" name="Text 27"/>
+          <p:cNvSpPr txBox="1"/>
+          <p:nvPr/>
+        </p:nvSpPr>
+        <p:spPr>
+          <a:xfrm>
+            <a:off x="493776" y="4672107"/>
+            <a:ext cx="3401568" cy="237744"/>
+          </a:xfrm>
+          <a:prstGeom prst="rect">
+            <a:avLst/>
+          </a:prstGeom>
+          <a:noFill/>
+          <a:ln/>
+        </p:spPr>
+        <p:txBody>
+          <a:bodyPr wrap="square" lIns="0" tIns="0" rIns="0" bIns="0" rtlCol="0" anchor="ctr"/>
+          <a:lstStyle/>
+          <a:p>
+            <a:pPr marL="0" indent="0">
+              <a:buNone/>
+            </a:pPr>
+            <a:r>
+              <a:rPr lang="en-US" sz="850" dirty="0">
+                <a:latin typeface="Calibri" pitchFamily="34" charset="0"/>
+                <a:ea typeface="Calibri" pitchFamily="34" charset="-122"/>
+                <a:cs typeface="Calibri" pitchFamily="34" charset="-120"/>
+              </a:rPr>
+              <a:t>Sensor-processing pipeline, collision monitor — overrides above</a:t>
+            </a:r>
+            <a:endParaRPr lang="en-US" sz="850" dirty="0"/>
+          </a:p>
+        </p:txBody>
+      </p:sp>
+      <p:sp>
+        <p:nvSpPr>
+          <p:cNvPr id="62" name="Shape 28"/>
+          <p:cNvSpPr/>
+          <p:nvPr/>
+        </p:nvSpPr>
+        <p:spPr>
           <a:xfrm>
             <a:off x="365760" y="5093742"/>
             <a:ext cx="3657600" cy="530352"/>
-            <a:chOff x="457200" y="4727448"/>
-            <a:chExt cx="3657600" cy="530352"/>
-          </a:xfrm>
-        </p:grpSpPr>
-        <p:sp>
-          <p:nvSpPr>
-            <p:cNvPr id="62" name="Shape 28"/>
-            <p:cNvSpPr/>
-            <p:nvPr/>
-          </p:nvSpPr>
-          <p:spPr>
-            <a:xfrm>
-              <a:off x="457200" y="4727448"/>
-              <a:ext cx="3657600" cy="530352"/>
-            </a:xfrm>
-            <a:prstGeom prst="roundRect">
-              <a:avLst>
-                <a:gd name="adj" fmla="val 10345"/>
-              </a:avLst>
-            </a:prstGeom>
+          </a:xfrm>
+          <a:prstGeom prst="roundRect">
+            <a:avLst>
+              <a:gd name="adj" fmla="val 10345"/>
+            </a:avLst>
+          </a:prstGeom>
+          <a:solidFill>
+            <a:schemeClr val="accent6">
+              <a:lumMod val="20000"/>
+              <a:lumOff val="80000"/>
+            </a:schemeClr>
+          </a:solidFill>
+          <a:ln>
             <a:solidFill>
-              <a:srgbClr val="5F5E5A"/>
+              <a:schemeClr val="accent6">
+                <a:lumMod val="50000"/>
+              </a:schemeClr>
             </a:solidFill>
-            <a:ln/>
-          </p:spPr>
-        </p:sp>
-        <p:sp>
-          <p:nvSpPr>
-            <p:cNvPr id="63" name="Text 29"/>
-            <p:cNvSpPr txBox="1"/>
-            <p:nvPr/>
-          </p:nvSpPr>
-          <p:spPr>
-            <a:xfrm>
-              <a:off x="585216" y="4754880"/>
-              <a:ext cx="3401568" cy="237744"/>
-            </a:xfrm>
-            <a:prstGeom prst="rect">
-              <a:avLst/>
-            </a:prstGeom>
-            <a:noFill/>
-            <a:ln/>
-          </p:spPr>
-          <p:txBody>
-            <a:bodyPr wrap="square" lIns="0" tIns="0" rIns="0" bIns="0" rtlCol="0" anchor="ctr"/>
-            <a:lstStyle/>
-            <a:p>
-              <a:pPr marL="0" indent="0">
-                <a:buNone/>
-              </a:pPr>
-              <a:r>
-                <a:rPr lang="en-US" sz="1150" b="1" dirty="0">
-                  <a:solidFill>
-                    <a:srgbClr val="FFFFFF"/>
-                  </a:solidFill>
-                  <a:latin typeface="Calibri" pitchFamily="34" charset="0"/>
-                  <a:ea typeface="Calibri" pitchFamily="34" charset="-122"/>
-                  <a:cs typeface="Calibri" pitchFamily="34" charset="-120"/>
-                </a:rPr>
-                <a:t>Simulated robot interface</a:t>
-              </a:r>
-              <a:endParaRPr lang="en-US" sz="1150" dirty="0"/>
-            </a:p>
-          </p:txBody>
-        </p:sp>
-        <p:sp>
-          <p:nvSpPr>
-            <p:cNvPr id="64" name="Text 30"/>
-            <p:cNvSpPr txBox="1"/>
-            <p:nvPr/>
-          </p:nvSpPr>
-          <p:spPr>
-            <a:xfrm>
-              <a:off x="585216" y="4992624"/>
-              <a:ext cx="3401568" cy="237744"/>
-            </a:xfrm>
-            <a:prstGeom prst="rect">
-              <a:avLst/>
-            </a:prstGeom>
-            <a:noFill/>
-            <a:ln/>
-          </p:spPr>
-          <p:txBody>
-            <a:bodyPr wrap="square" lIns="0" tIns="0" rIns="0" bIns="0" rtlCol="0" anchor="ctr"/>
-            <a:lstStyle/>
-            <a:p>
-              <a:pPr marL="0" indent="0">
-                <a:buNone/>
-              </a:pPr>
-              <a:r>
-                <a:rPr lang="en-US" sz="850" dirty="0">
-                  <a:solidFill>
-                    <a:srgbClr val="F1F1F1"/>
-                  </a:solidFill>
-                  <a:latin typeface="Calibri" pitchFamily="34" charset="0"/>
-                  <a:ea typeface="Calibri" pitchFamily="34" charset="-122"/>
-                  <a:cs typeface="Calibri" pitchFamily="34" charset="-120"/>
-                </a:rPr>
-                <a:t>Gazebo/Ignition plugins emulating motors, sensors, network</a:t>
-              </a:r>
-              <a:endParaRPr lang="en-US" sz="850" dirty="0"/>
-            </a:p>
-          </p:txBody>
-        </p:sp>
-      </p:grpSp>
+          </a:ln>
+        </p:spPr>
+      </p:sp>
+      <p:sp>
+        <p:nvSpPr>
+          <p:cNvPr id="63" name="Text 29"/>
+          <p:cNvSpPr txBox="1"/>
+          <p:nvPr/>
+        </p:nvSpPr>
+        <p:spPr>
+          <a:xfrm>
+            <a:off x="493776" y="5121174"/>
+            <a:ext cx="3401568" cy="237744"/>
+          </a:xfrm>
+          <a:prstGeom prst="rect">
+            <a:avLst/>
+          </a:prstGeom>
+          <a:noFill/>
+          <a:ln/>
+        </p:spPr>
+        <p:txBody>
+          <a:bodyPr wrap="square" lIns="0" tIns="0" rIns="0" bIns="0" rtlCol="0" anchor="ctr"/>
+          <a:lstStyle/>
+          <a:p>
+            <a:pPr marL="0" indent="0">
+              <a:buNone/>
+            </a:pPr>
+            <a:r>
+              <a:rPr lang="en-US" sz="1150" b="1" dirty="0">
+                <a:latin typeface="Calibri" pitchFamily="34" charset="0"/>
+                <a:ea typeface="Calibri" pitchFamily="34" charset="-122"/>
+                <a:cs typeface="Calibri" pitchFamily="34" charset="-120"/>
+              </a:rPr>
+              <a:t>Simulated robot interface</a:t>
+            </a:r>
+            <a:endParaRPr lang="en-US" sz="1150" dirty="0"/>
+          </a:p>
+        </p:txBody>
+      </p:sp>
+      <p:sp>
+        <p:nvSpPr>
+          <p:cNvPr id="64" name="Text 30"/>
+          <p:cNvSpPr txBox="1"/>
+          <p:nvPr/>
+        </p:nvSpPr>
+        <p:spPr>
+          <a:xfrm>
+            <a:off x="493776" y="5358918"/>
+            <a:ext cx="3401568" cy="237744"/>
+          </a:xfrm>
+          <a:prstGeom prst="rect">
+            <a:avLst/>
+          </a:prstGeom>
+          <a:noFill/>
+          <a:ln/>
+        </p:spPr>
+        <p:txBody>
+          <a:bodyPr wrap="square" lIns="0" tIns="0" rIns="0" bIns="0" rtlCol="0" anchor="ctr"/>
+          <a:lstStyle/>
+          <a:p>
+            <a:pPr marL="0" indent="0">
+              <a:buNone/>
+            </a:pPr>
+            <a:r>
+              <a:rPr lang="en-US" sz="850" dirty="0">
+                <a:latin typeface="Calibri" pitchFamily="34" charset="0"/>
+                <a:ea typeface="Calibri" pitchFamily="34" charset="-122"/>
+                <a:cs typeface="Calibri" pitchFamily="34" charset="-120"/>
+              </a:rPr>
+              <a:t>Gazebo/Ignition plugins emulating motors, sensors, network</a:t>
+            </a:r>
+            <a:endParaRPr lang="en-US" sz="850" dirty="0"/>
+          </a:p>
+        </p:txBody>
+      </p:sp>
       <p:sp>
         <p:nvSpPr>
           <p:cNvPr id="79" name="Shape 18"/>
@@ -10230,254 +9506,250 @@
           <a:ln/>
         </p:spPr>
       </p:sp>
-      <p:grpSp>
-        <p:nvGrpSpPr>
-          <p:cNvPr id="83" name="Group 82"/>
-          <p:cNvGrpSpPr/>
+      <p:sp>
+        <p:nvSpPr>
+          <p:cNvPr id="84" name="Shape 39"/>
+          <p:cNvSpPr/>
           <p:nvPr/>
-        </p:nvGrpSpPr>
-        <p:grpSpPr>
+        </p:nvSpPr>
+        <p:spPr>
           <a:xfrm>
             <a:off x="4148395" y="4659402"/>
             <a:ext cx="7708392" cy="964692"/>
-            <a:chOff x="457200" y="5257800"/>
-            <a:chExt cx="11274552" cy="964692"/>
-          </a:xfrm>
-        </p:grpSpPr>
-        <p:sp>
-          <p:nvSpPr>
-            <p:cNvPr id="84" name="Shape 39"/>
-            <p:cNvSpPr/>
-            <p:nvPr/>
-          </p:nvSpPr>
-          <p:spPr>
-            <a:xfrm>
-              <a:off x="457200" y="5257800"/>
-              <a:ext cx="11274552" cy="964692"/>
-            </a:xfrm>
-            <a:prstGeom prst="roundRect">
-              <a:avLst>
-                <a:gd name="adj" fmla="val 6316"/>
-              </a:avLst>
-            </a:prstGeom>
+          </a:xfrm>
+          <a:prstGeom prst="roundRect">
+            <a:avLst>
+              <a:gd name="adj" fmla="val 6316"/>
+            </a:avLst>
+          </a:prstGeom>
+          <a:solidFill>
+            <a:schemeClr val="bg1"/>
+          </a:solidFill>
+          <a:ln>
             <a:solidFill>
-              <a:srgbClr val="EDEFF3"/>
+              <a:schemeClr val="tx1"/>
             </a:solidFill>
-            <a:ln/>
-          </p:spPr>
-        </p:sp>
-        <p:sp>
-          <p:nvSpPr>
-            <p:cNvPr id="85" name="Text 40"/>
-            <p:cNvSpPr txBox="1"/>
-            <p:nvPr/>
-          </p:nvSpPr>
-          <p:spPr>
-            <a:xfrm>
-              <a:off x="640080" y="5330952"/>
-              <a:ext cx="10881360" cy="219456"/>
-            </a:xfrm>
-            <a:prstGeom prst="rect">
-              <a:avLst/>
-            </a:prstGeom>
-            <a:noFill/>
-            <a:ln/>
-          </p:spPr>
-          <p:txBody>
-            <a:bodyPr wrap="square" lIns="0" tIns="0" rIns="0" bIns="0" rtlCol="0" anchor="ctr"/>
-            <a:lstStyle/>
-            <a:p>
-              <a:pPr marL="0" indent="0">
-                <a:buNone/>
-              </a:pPr>
-              <a:r>
-                <a:rPr lang="en-US" sz="1000" b="1" kern="0" spc="50" dirty="0" smtClean="0">
-                  <a:solidFill>
-                    <a:srgbClr val="0F6E56"/>
-                  </a:solidFill>
-                  <a:latin typeface="Calibri" pitchFamily="34" charset="0"/>
-                  <a:ea typeface="Calibri" pitchFamily="34" charset="-122"/>
-                  <a:cs typeface="Calibri" pitchFamily="34" charset="-120"/>
-                </a:rPr>
-                <a:t>HARMONI </a:t>
-              </a:r>
-              <a:r>
-                <a:rPr lang="en-US" sz="1000" b="1" kern="0" spc="50" dirty="0">
-                  <a:solidFill>
-                    <a:srgbClr val="0F6E56"/>
-                  </a:solidFill>
-                  <a:latin typeface="Calibri" pitchFamily="34" charset="0"/>
-                  <a:ea typeface="Calibri" pitchFamily="34" charset="-122"/>
-                  <a:cs typeface="Calibri" pitchFamily="34" charset="-120"/>
-                </a:rPr>
-                <a:t>COMPONENT</a:t>
-              </a:r>
-              <a:endParaRPr lang="en-US" sz="1000" dirty="0"/>
-            </a:p>
-          </p:txBody>
-        </p:sp>
-        <p:sp>
-          <p:nvSpPr>
-            <p:cNvPr id="86" name="Text 41"/>
-            <p:cNvSpPr txBox="1"/>
-            <p:nvPr/>
-          </p:nvSpPr>
-          <p:spPr>
-            <a:xfrm>
-              <a:off x="640082" y="5559552"/>
-              <a:ext cx="5454927" cy="635508"/>
-            </a:xfrm>
-            <a:prstGeom prst="rect">
-              <a:avLst/>
-            </a:prstGeom>
-            <a:noFill/>
-            <a:ln/>
-          </p:spPr>
-          <p:txBody>
-            <a:bodyPr wrap="square" lIns="0" tIns="0" rIns="0" bIns="0" rtlCol="0" anchor="t"/>
-            <a:lstStyle/>
-            <a:p>
-              <a:pPr marL="0" indent="0">
-                <a:buFont typeface="Arial" pitchFamily="34" charset="0"/>
-                <a:buChar char="•"/>
-              </a:pPr>
-              <a:r>
-                <a:rPr lang="en-US" sz="1000" dirty="0">
-                  <a:solidFill>
-                    <a:srgbClr val="1F2937"/>
-                  </a:solidFill>
-                  <a:latin typeface="Calibri" pitchFamily="34" charset="0"/>
-                  <a:ea typeface="Calibri" pitchFamily="34" charset="-122"/>
-                  <a:cs typeface="Calibri" pitchFamily="34" charset="-120"/>
-                </a:rPr>
-                <a:t>Decentralized comms → Zenoh P2P </a:t>
-              </a:r>
-              <a:r>
-                <a:rPr lang="en-US" sz="1000" dirty="0" smtClean="0">
-                  <a:solidFill>
-                    <a:srgbClr val="1F2937"/>
-                  </a:solidFill>
-                  <a:latin typeface="Calibri" pitchFamily="34" charset="0"/>
-                  <a:ea typeface="Calibri" pitchFamily="34" charset="-122"/>
-                  <a:cs typeface="Calibri" pitchFamily="34" charset="-120"/>
-                </a:rPr>
-                <a:t>pub/sub</a:t>
-              </a:r>
-            </a:p>
-            <a:p>
-              <a:pPr marL="0" indent="0">
-                <a:buFont typeface="Arial" pitchFamily="34" charset="0"/>
-                <a:buChar char="•"/>
-              </a:pPr>
-              <a:r>
-                <a:rPr lang="en-US" sz="1000" dirty="0" smtClean="0">
-                  <a:solidFill>
-                    <a:srgbClr val="1F2937"/>
-                  </a:solidFill>
-                  <a:latin typeface="Calibri" pitchFamily="34" charset="0"/>
-                  <a:ea typeface="Calibri" pitchFamily="34" charset="-122"/>
-                  <a:cs typeface="Calibri" pitchFamily="34" charset="-120"/>
-                </a:rPr>
-                <a:t>Intent </a:t>
-              </a:r>
-              <a:r>
-                <a:rPr lang="en-US" sz="1000" dirty="0">
-                  <a:solidFill>
-                    <a:srgbClr val="1F2937"/>
-                  </a:solidFill>
-                  <a:latin typeface="Calibri" pitchFamily="34" charset="0"/>
-                  <a:ea typeface="Calibri" pitchFamily="34" charset="-122"/>
-                  <a:cs typeface="Calibri" pitchFamily="34" charset="-120"/>
-                </a:rPr>
-                <a:t>sharing → periodic intent </a:t>
-              </a:r>
-              <a:r>
-                <a:rPr lang="en-US" sz="1000" dirty="0" smtClean="0">
-                  <a:solidFill>
-                    <a:srgbClr val="1F2937"/>
-                  </a:solidFill>
-                  <a:latin typeface="Calibri" pitchFamily="34" charset="0"/>
-                  <a:ea typeface="Calibri" pitchFamily="34" charset="-122"/>
-                  <a:cs typeface="Calibri" pitchFamily="34" charset="-120"/>
-                </a:rPr>
-                <a:t>broadcast </a:t>
-              </a:r>
-            </a:p>
-            <a:p>
-              <a:pPr marL="0" indent="0">
-                <a:buFont typeface="Arial" pitchFamily="34" charset="0"/>
-                <a:buChar char="•"/>
-              </a:pPr>
-              <a:r>
-                <a:rPr lang="en-US" sz="1000" dirty="0" smtClean="0">
-                  <a:solidFill>
-                    <a:srgbClr val="1F2937"/>
-                  </a:solidFill>
-                  <a:latin typeface="Calibri" pitchFamily="34" charset="0"/>
-                  <a:ea typeface="Calibri" pitchFamily="34" charset="-122"/>
-                  <a:cs typeface="Calibri" pitchFamily="34" charset="-120"/>
-                </a:rPr>
-                <a:t>Collision </a:t>
-              </a:r>
-              <a:r>
-                <a:rPr lang="en-US" sz="1000" dirty="0">
-                  <a:solidFill>
-                    <a:srgbClr val="1F2937"/>
-                  </a:solidFill>
-                  <a:latin typeface="Calibri" pitchFamily="34" charset="0"/>
-                  <a:ea typeface="Calibri" pitchFamily="34" charset="-122"/>
-                  <a:cs typeface="Calibri" pitchFamily="34" charset="-120"/>
-                </a:rPr>
-                <a:t>avoidance → Nav2 + sensor-based safety layer </a:t>
-              </a:r>
-              <a:endParaRPr lang="en-US" sz="1000" dirty="0" smtClean="0">
+          </a:ln>
+          <a:effectLst>
+            <a:outerShdw blurRad="50800" dist="38100" dir="2700000" algn="tl" rotWithShape="0">
+              <a:prstClr val="black">
+                <a:alpha val="40000"/>
+              </a:prstClr>
+            </a:outerShdw>
+          </a:effectLst>
+        </p:spPr>
+      </p:sp>
+      <p:sp>
+        <p:nvSpPr>
+          <p:cNvPr id="85" name="Text 40"/>
+          <p:cNvSpPr txBox="1"/>
+          <p:nvPr/>
+        </p:nvSpPr>
+        <p:spPr>
+          <a:xfrm>
+            <a:off x="4273430" y="4732554"/>
+            <a:ext cx="7439567" cy="219456"/>
+          </a:xfrm>
+          <a:prstGeom prst="rect">
+            <a:avLst/>
+          </a:prstGeom>
+          <a:noFill/>
+          <a:ln/>
+        </p:spPr>
+        <p:txBody>
+          <a:bodyPr wrap="square" lIns="0" tIns="0" rIns="0" bIns="0" rtlCol="0" anchor="ctr"/>
+          <a:lstStyle/>
+          <a:p>
+            <a:pPr marL="0" indent="0">
+              <a:buNone/>
+            </a:pPr>
+            <a:r>
+              <a:rPr lang="en-US" sz="1000" b="1" kern="0" spc="50" dirty="0" smtClean="0">
+                <a:solidFill>
+                  <a:srgbClr val="0F6E56"/>
+                </a:solidFill>
+                <a:latin typeface="Calibri" pitchFamily="34" charset="0"/>
+                <a:ea typeface="Calibri" pitchFamily="34" charset="-122"/>
+                <a:cs typeface="Calibri" pitchFamily="34" charset="-120"/>
+              </a:rPr>
+              <a:t>HARMONI </a:t>
+            </a:r>
+            <a:r>
+              <a:rPr lang="en-US" sz="1000" b="1" kern="0" spc="50" dirty="0">
+                <a:solidFill>
+                  <a:srgbClr val="0F6E56"/>
+                </a:solidFill>
+                <a:latin typeface="Calibri" pitchFamily="34" charset="0"/>
+                <a:ea typeface="Calibri" pitchFamily="34" charset="-122"/>
+                <a:cs typeface="Calibri" pitchFamily="34" charset="-120"/>
+              </a:rPr>
+              <a:t>COMPONENT</a:t>
+            </a:r>
+            <a:endParaRPr lang="en-US" sz="1000" dirty="0"/>
+          </a:p>
+        </p:txBody>
+      </p:sp>
+      <p:sp>
+        <p:nvSpPr>
+          <p:cNvPr id="86" name="Text 41"/>
+          <p:cNvSpPr txBox="1"/>
+          <p:nvPr/>
+        </p:nvSpPr>
+        <p:spPr>
+          <a:xfrm>
+            <a:off x="4273431" y="4961154"/>
+            <a:ext cx="3729524" cy="635508"/>
+          </a:xfrm>
+          <a:prstGeom prst="rect">
+            <a:avLst/>
+          </a:prstGeom>
+          <a:noFill/>
+          <a:ln/>
+        </p:spPr>
+        <p:txBody>
+          <a:bodyPr wrap="square" lIns="0" tIns="0" rIns="0" bIns="0" rtlCol="0" anchor="t"/>
+          <a:lstStyle/>
+          <a:p>
+            <a:pPr marL="0" indent="0">
+              <a:buFont typeface="Arial" pitchFamily="34" charset="0"/>
+              <a:buChar char="•"/>
+            </a:pPr>
+            <a:r>
+              <a:rPr lang="en-US" sz="1000" dirty="0">
                 <a:solidFill>
                   <a:srgbClr val="1F2937"/>
                 </a:solidFill>
                 <a:latin typeface="Calibri" pitchFamily="34" charset="0"/>
                 <a:ea typeface="Calibri" pitchFamily="34" charset="-122"/>
                 <a:cs typeface="Calibri" pitchFamily="34" charset="-120"/>
-              </a:endParaRPr>
-            </a:p>
-            <a:p>
-              <a:pPr marL="0" indent="0">
-                <a:buFont typeface="Arial" pitchFamily="34" charset="0"/>
-                <a:buChar char="•"/>
-              </a:pPr>
-              <a:r>
-                <a:rPr lang="en-US" sz="1000" dirty="0" smtClean="0">
-                  <a:solidFill>
-                    <a:srgbClr val="1F2937"/>
-                  </a:solidFill>
-                  <a:latin typeface="Calibri" pitchFamily="34" charset="0"/>
-                  <a:ea typeface="Calibri" pitchFamily="34" charset="-122"/>
-                  <a:cs typeface="Calibri" pitchFamily="34" charset="-120"/>
-                </a:rPr>
-                <a:t>Deadlock </a:t>
-              </a:r>
-              <a:r>
-                <a:rPr lang="en-US" sz="1000" dirty="0">
-                  <a:solidFill>
-                    <a:srgbClr val="1F2937"/>
-                  </a:solidFill>
-                  <a:latin typeface="Calibri" pitchFamily="34" charset="0"/>
-                  <a:ea typeface="Calibri" pitchFamily="34" charset="-122"/>
-                  <a:cs typeface="Calibri" pitchFamily="34" charset="-120"/>
-                </a:rPr>
-                <a:t>resolution → wait-for-graph + priority yield </a:t>
-              </a:r>
-              <a:endParaRPr lang="en-US" sz="1000" dirty="0" smtClean="0">
+              </a:rPr>
+              <a:t>Decentralized comms → Zenoh P2P </a:t>
+            </a:r>
+            <a:r>
+              <a:rPr lang="en-US" sz="1000" dirty="0" smtClean="0">
                 <a:solidFill>
                   <a:srgbClr val="1F2937"/>
                 </a:solidFill>
                 <a:latin typeface="Calibri" pitchFamily="34" charset="0"/>
                 <a:ea typeface="Calibri" pitchFamily="34" charset="-122"/>
                 <a:cs typeface="Calibri" pitchFamily="34" charset="-120"/>
-              </a:endParaRPr>
-            </a:p>
-          </p:txBody>
-        </p:sp>
-      </p:grpSp>
+              </a:rPr>
+              <a:t>pub/sub</a:t>
+            </a:r>
+          </a:p>
+          <a:p>
+            <a:pPr marL="0" indent="0">
+              <a:buFont typeface="Arial" pitchFamily="34" charset="0"/>
+              <a:buChar char="•"/>
+            </a:pPr>
+            <a:r>
+              <a:rPr lang="en-US" sz="1000" dirty="0" smtClean="0">
+                <a:solidFill>
+                  <a:srgbClr val="1F2937"/>
+                </a:solidFill>
+                <a:latin typeface="Calibri" pitchFamily="34" charset="0"/>
+                <a:ea typeface="Calibri" pitchFamily="34" charset="-122"/>
+                <a:cs typeface="Calibri" pitchFamily="34" charset="-120"/>
+              </a:rPr>
+              <a:t>Intent </a:t>
+            </a:r>
+            <a:r>
+              <a:rPr lang="en-US" sz="1000" dirty="0">
+                <a:solidFill>
+                  <a:srgbClr val="1F2937"/>
+                </a:solidFill>
+                <a:latin typeface="Calibri" pitchFamily="34" charset="0"/>
+                <a:ea typeface="Calibri" pitchFamily="34" charset="-122"/>
+                <a:cs typeface="Calibri" pitchFamily="34" charset="-120"/>
+              </a:rPr>
+              <a:t>sharing → periodic intent </a:t>
+            </a:r>
+            <a:r>
+              <a:rPr lang="en-US" sz="1000" dirty="0" smtClean="0">
+                <a:solidFill>
+                  <a:srgbClr val="1F2937"/>
+                </a:solidFill>
+                <a:latin typeface="Calibri" pitchFamily="34" charset="0"/>
+                <a:ea typeface="Calibri" pitchFamily="34" charset="-122"/>
+                <a:cs typeface="Calibri" pitchFamily="34" charset="-120"/>
+              </a:rPr>
+              <a:t>broadcast </a:t>
+            </a:r>
+          </a:p>
+          <a:p>
+            <a:pPr marL="0" indent="0">
+              <a:buFont typeface="Arial" pitchFamily="34" charset="0"/>
+              <a:buChar char="•"/>
+            </a:pPr>
+            <a:r>
+              <a:rPr lang="en-US" sz="1000" dirty="0" smtClean="0">
+                <a:solidFill>
+                  <a:srgbClr val="1F2937"/>
+                </a:solidFill>
+                <a:latin typeface="Calibri" pitchFamily="34" charset="0"/>
+                <a:ea typeface="Calibri" pitchFamily="34" charset="-122"/>
+                <a:cs typeface="Calibri" pitchFamily="34" charset="-120"/>
+              </a:rPr>
+              <a:t>Collision </a:t>
+            </a:r>
+            <a:r>
+              <a:rPr lang="en-US" sz="1000" dirty="0">
+                <a:solidFill>
+                  <a:srgbClr val="1F2937"/>
+                </a:solidFill>
+                <a:latin typeface="Calibri" pitchFamily="34" charset="0"/>
+                <a:ea typeface="Calibri" pitchFamily="34" charset="-122"/>
+                <a:cs typeface="Calibri" pitchFamily="34" charset="-120"/>
+              </a:rPr>
+              <a:t>avoidance → Nav2 + sensor-based safety layer </a:t>
+            </a:r>
+            <a:endParaRPr lang="en-US" sz="1000" dirty="0" smtClean="0">
+              <a:solidFill>
+                <a:srgbClr val="1F2937"/>
+              </a:solidFill>
+              <a:latin typeface="Calibri" pitchFamily="34" charset="0"/>
+              <a:ea typeface="Calibri" pitchFamily="34" charset="-122"/>
+              <a:cs typeface="Calibri" pitchFamily="34" charset="-120"/>
+            </a:endParaRPr>
+          </a:p>
+          <a:p>
+            <a:pPr marL="0" indent="0">
+              <a:buFont typeface="Arial" pitchFamily="34" charset="0"/>
+              <a:buChar char="•"/>
+            </a:pPr>
+            <a:r>
+              <a:rPr lang="en-US" sz="1000" dirty="0" smtClean="0">
+                <a:solidFill>
+                  <a:srgbClr val="1F2937"/>
+                </a:solidFill>
+                <a:latin typeface="Calibri" pitchFamily="34" charset="0"/>
+                <a:ea typeface="Calibri" pitchFamily="34" charset="-122"/>
+                <a:cs typeface="Calibri" pitchFamily="34" charset="-120"/>
+              </a:rPr>
+              <a:t>Deadlock </a:t>
+            </a:r>
+            <a:r>
+              <a:rPr lang="en-US" sz="1000" dirty="0">
+                <a:solidFill>
+                  <a:srgbClr val="1F2937"/>
+                </a:solidFill>
+                <a:latin typeface="Calibri" pitchFamily="34" charset="0"/>
+                <a:ea typeface="Calibri" pitchFamily="34" charset="-122"/>
+                <a:cs typeface="Calibri" pitchFamily="34" charset="-120"/>
+              </a:rPr>
+              <a:t>resolution → wait-for-graph + priority yield </a:t>
+            </a:r>
+            <a:endParaRPr lang="en-US" sz="1000" dirty="0" smtClean="0">
+              <a:solidFill>
+                <a:srgbClr val="1F2937"/>
+              </a:solidFill>
+              <a:latin typeface="Calibri" pitchFamily="34" charset="0"/>
+              <a:ea typeface="Calibri" pitchFamily="34" charset="-122"/>
+              <a:cs typeface="Calibri" pitchFamily="34" charset="-120"/>
+            </a:endParaRPr>
+          </a:p>
+        </p:txBody>
+      </p:sp>
       <p:sp>
         <p:nvSpPr>
           <p:cNvPr id="87" name="TextBox 86"/>
@@ -10597,11 +9869,58 @@
           </a:p>
         </p:txBody>
       </p:sp>
+      <p:sp>
+        <p:nvSpPr>
+          <p:cNvPr id="17" name="Text 9"/>
+          <p:cNvSpPr txBox="1"/>
+          <p:nvPr/>
+        </p:nvSpPr>
+        <p:spPr>
+          <a:xfrm>
+            <a:off x="1976596" y="1627632"/>
+            <a:ext cx="2432304" cy="329184"/>
+          </a:xfrm>
+          <a:prstGeom prst="rect">
+            <a:avLst/>
+          </a:prstGeom>
+          <a:noFill/>
+          <a:ln/>
+          <a:effectLst/>
+        </p:spPr>
+        <p:txBody>
+          <a:bodyPr wrap="square" lIns="0" tIns="0" rIns="0" bIns="0" rtlCol="0" anchor="ctr"/>
+          <a:lstStyle/>
+          <a:p>
+            <a:pPr marL="0" indent="0" algn="ctr">
+              <a:buNone/>
+            </a:pPr>
+            <a:r>
+              <a:rPr lang="en-US" sz="1050" b="1" dirty="0">
+                <a:solidFill>
+                  <a:srgbClr val="0F6E56"/>
+                </a:solidFill>
+                <a:latin typeface="Calibri" pitchFamily="34" charset="0"/>
+                <a:ea typeface="Calibri" pitchFamily="34" charset="-122"/>
+                <a:cs typeface="Calibri" pitchFamily="34" charset="-120"/>
+              </a:rPr>
+              <a:t>Eclipse Zenoh (P2P middleware)</a:t>
+            </a:r>
+            <a:endParaRPr lang="en-US" sz="1050" dirty="0"/>
+          </a:p>
+        </p:txBody>
+      </p:sp>
     </p:spTree>
   </p:cSld>
   <p:clrMapOvr>
     <a:masterClrMapping/>
   </p:clrMapOvr>
+  <p:timing>
+    <p:tnLst>
+      <p:par>
+        <p:cTn id="1" dur="indefinite" restart="never" nodeType="tmRoot"/>
+      </p:par>
+    </p:tnLst>
+  </p:timing>
 </p:sld>
 </file>
 
@@ -10627,7 +9946,7 @@
           <p:cNvPr id="10" name="Rectangle 9">
             <a:extLst>
               <a:ext uri="{FF2B5EF4-FFF2-40B4-BE49-F238E27FC236}">
-                <a16:creationId xmlns:a16="http://schemas.microsoft.com/office/drawing/2014/main" xmlns="" id="{AD4F69D3-EEB0-4C4C-9434-B9960FB5854C}"/>
+                <a16:creationId xmlns="" xmlns:a16="http://schemas.microsoft.com/office/drawing/2014/main" id="{AD4F69D3-EEB0-4C4C-9434-B9960FB5854C}"/>
               </a:ext>
             </a:extLst>
           </p:cNvPr>
@@ -10887,10 +10206,10 @@
           <p:cNvPr id="12" name="Oval 11" descr="Your startup LOGO">
             <a:extLst>
               <a:ext uri="{FF2B5EF4-FFF2-40B4-BE49-F238E27FC236}">
-                <a16:creationId xmlns:a16="http://schemas.microsoft.com/office/drawing/2014/main" xmlns="" id="{5DBCE864-823D-4A13-9607-5DA1F0ED5FB8}"/>
+                <a16:creationId xmlns="" xmlns:a16="http://schemas.microsoft.com/office/drawing/2014/main" id="{5DBCE864-823D-4A13-9607-5DA1F0ED5FB8}"/>
               </a:ext>
               <a:ext uri="{C183D7F6-B498-43B3-948B-1728B52AA6E4}">
-                <adec:decorative xmlns="" xmlns:adec="http://schemas.microsoft.com/office/drawing/2017/decorative" val="0"/>
+                <adec:decorative xmlns:adec="http://schemas.microsoft.com/office/drawing/2017/decorative" xmlns="" val="0"/>
               </a:ext>
             </a:extLst>
           </p:cNvPr>
@@ -10945,7 +10264,7 @@
           <a:blip r:embed="rId3">
             <a:extLst>
               <a:ext uri="{28A0092B-C50C-407E-A947-70E740481C1C}">
-                <a14:useLocalDpi xmlns:a14="http://schemas.microsoft.com/office/drawing/2010/main" xmlns="" val="0"/>
+                <a14:useLocalDpi xmlns="" xmlns:a14="http://schemas.microsoft.com/office/drawing/2010/main" val="0"/>
               </a:ext>
             </a:extLst>
           </a:blip>
@@ -11316,7 +10635,7 @@
           <p:nvPr>
             <p:extLst>
               <p:ext uri="{D42A27DB-BD31-4B8C-83A1-F6EECF244321}">
-                <p14:modId xmlns:p14="http://schemas.microsoft.com/office/powerpoint/2010/main" xmlns="" val="1579011935"/>
+                <p14:modId xmlns="" xmlns:p14="http://schemas.microsoft.com/office/powerpoint/2010/main" val="1579011935"/>
               </p:ext>
             </p:extLst>
           </p:nvPr>
@@ -12090,7 +11409,7 @@
           <p:nvPr>
             <p:extLst>
               <p:ext uri="{D42A27DB-BD31-4B8C-83A1-F6EECF244321}">
-                <p14:modId xmlns:p14="http://schemas.microsoft.com/office/powerpoint/2010/main" xmlns="" val="1579011935"/>
+                <p14:modId xmlns="" xmlns:p14="http://schemas.microsoft.com/office/powerpoint/2010/main" val="1579011935"/>
               </p:ext>
             </p:extLst>
           </p:nvPr>
@@ -12688,13 +12007,20 @@
     </p:spTree>
     <p:extLst>
       <p:ext uri="{BB962C8B-B14F-4D97-AF65-F5344CB8AC3E}">
-        <p14:creationId xmlns:p14="http://schemas.microsoft.com/office/powerpoint/2010/main" xmlns="" val="3753387913"/>
+        <p14:creationId xmlns="" xmlns:p14="http://schemas.microsoft.com/office/powerpoint/2010/main" val="3753387913"/>
       </p:ext>
     </p:extLst>
   </p:cSld>
   <p:clrMapOvr>
     <a:masterClrMapping/>
   </p:clrMapOvr>
+  <p:timing>
+    <p:tnLst>
+      <p:par>
+        <p:cTn id="1" dur="indefinite" restart="never" nodeType="tmRoot"/>
+      </p:par>
+    </p:tnLst>
+  </p:timing>
 </p:sld>
 </file>
 
@@ -12720,7 +12046,7 @@
           <p:cNvPr id="10" name="Rectangle 9">
             <a:extLst>
               <a:ext uri="{FF2B5EF4-FFF2-40B4-BE49-F238E27FC236}">
-                <a16:creationId xmlns:a16="http://schemas.microsoft.com/office/drawing/2014/main" xmlns="" id="{AD4F69D3-EEB0-4C4C-9434-B9960FB5854C}"/>
+                <a16:creationId xmlns="" xmlns:a16="http://schemas.microsoft.com/office/drawing/2014/main" id="{AD4F69D3-EEB0-4C4C-9434-B9960FB5854C}"/>
               </a:ext>
             </a:extLst>
           </p:cNvPr>
@@ -13012,10 +12338,10 @@
           <p:cNvPr id="12" name="Oval 11" descr="Your startup LOGO">
             <a:extLst>
               <a:ext uri="{FF2B5EF4-FFF2-40B4-BE49-F238E27FC236}">
-                <a16:creationId xmlns:a16="http://schemas.microsoft.com/office/drawing/2014/main" xmlns="" id="{5DBCE864-823D-4A13-9607-5DA1F0ED5FB8}"/>
+                <a16:creationId xmlns="" xmlns:a16="http://schemas.microsoft.com/office/drawing/2014/main" id="{5DBCE864-823D-4A13-9607-5DA1F0ED5FB8}"/>
               </a:ext>
               <a:ext uri="{C183D7F6-B498-43B3-948B-1728B52AA6E4}">
-                <adec:decorative xmlns="" xmlns:adec="http://schemas.microsoft.com/office/drawing/2017/decorative" val="0"/>
+                <adec:decorative xmlns:adec="http://schemas.microsoft.com/office/drawing/2017/decorative" xmlns="" val="0"/>
               </a:ext>
             </a:extLst>
           </p:cNvPr>
@@ -13070,7 +12396,7 @@
           <a:blip r:embed="rId3">
             <a:extLst>
               <a:ext uri="{28A0092B-C50C-407E-A947-70E740481C1C}">
-                <a14:useLocalDpi xmlns:a14="http://schemas.microsoft.com/office/drawing/2010/main" xmlns="" val="0"/>
+                <a14:useLocalDpi xmlns="" xmlns:a14="http://schemas.microsoft.com/office/drawing/2010/main" val="0"/>
               </a:ext>
             </a:extLst>
           </a:blip>
@@ -13088,512 +12414,406 @@
           </a:prstGeom>
         </p:spPr>
       </p:pic>
-      <p:grpSp>
-        <p:nvGrpSpPr>
-          <p:cNvPr id="9" name="Group 8"/>
-          <p:cNvGrpSpPr/>
+      <p:sp>
+        <p:nvSpPr>
+          <p:cNvPr id="13" name="Text 3"/>
+          <p:cNvSpPr txBox="1"/>
           <p:nvPr/>
-        </p:nvGrpSpPr>
-        <p:grpSpPr>
+        </p:nvSpPr>
+        <p:spPr>
           <a:xfrm>
             <a:off x="457200" y="1536192"/>
-            <a:ext cx="5285232" cy="3621024"/>
-            <a:chOff x="457200" y="1188720"/>
-            <a:chExt cx="5285232" cy="3621024"/>
-          </a:xfrm>
-        </p:grpSpPr>
-        <p:sp>
-          <p:nvSpPr>
-            <p:cNvPr id="13" name="Text 3"/>
-            <p:cNvSpPr txBox="1"/>
-            <p:nvPr/>
-          </p:nvSpPr>
-          <p:spPr>
-            <a:xfrm>
-              <a:off x="457200" y="1188720"/>
-              <a:ext cx="5212080" cy="256032"/>
-            </a:xfrm>
-            <a:prstGeom prst="rect">
-              <a:avLst/>
-            </a:prstGeom>
-            <a:noFill/>
-            <a:ln/>
-          </p:spPr>
-          <p:txBody>
-            <a:bodyPr wrap="square" lIns="0" tIns="0" rIns="0" bIns="0" rtlCol="0" anchor="ctr"/>
-            <a:lstStyle/>
-            <a:p>
-              <a:pPr marL="0" indent="0">
-                <a:buNone/>
-              </a:pPr>
-              <a:r>
-                <a:rPr lang="en-US" sz="1100" b="1" kern="0" spc="100" dirty="0">
-                  <a:solidFill>
-                    <a:srgbClr val="0F6E56"/>
-                  </a:solidFill>
-                  <a:latin typeface="Calibri" pitchFamily="34" charset="0"/>
-                  <a:ea typeface="Calibri" pitchFamily="34" charset="-122"/>
-                  <a:cs typeface="Calibri" pitchFamily="34" charset="-120"/>
-                </a:rPr>
-                <a:t>WHO BENEFITS</a:t>
-              </a:r>
-              <a:endParaRPr lang="en-US" sz="1100" dirty="0"/>
-            </a:p>
-          </p:txBody>
-        </p:sp>
-        <p:grpSp>
-          <p:nvGrpSpPr>
-            <p:cNvPr id="14" name="Group 23"/>
-            <p:cNvGrpSpPr/>
-            <p:nvPr/>
-          </p:nvGrpSpPr>
-          <p:grpSpPr>
-            <a:xfrm>
-              <a:off x="457200" y="1463040"/>
-              <a:ext cx="5285232" cy="740664"/>
-              <a:chOff x="457200" y="1463040"/>
-              <a:chExt cx="5285232" cy="740664"/>
-            </a:xfrm>
-          </p:grpSpPr>
-          <p:sp>
-            <p:nvSpPr>
-              <p:cNvPr id="27" name="Shape 4"/>
-              <p:cNvSpPr/>
-              <p:nvPr/>
-            </p:nvSpPr>
-            <p:spPr>
-              <a:xfrm>
-                <a:off x="457200" y="1481328"/>
-                <a:ext cx="54864" cy="685800"/>
-              </a:xfrm>
-              <a:prstGeom prst="rect">
-                <a:avLst/>
-              </a:prstGeom>
+            <a:ext cx="5212080" cy="256032"/>
+          </a:xfrm>
+          <a:prstGeom prst="rect">
+            <a:avLst/>
+          </a:prstGeom>
+          <a:noFill/>
+          <a:ln/>
+        </p:spPr>
+        <p:txBody>
+          <a:bodyPr wrap="square" lIns="0" tIns="0" rIns="0" bIns="0" rtlCol="0" anchor="ctr"/>
+          <a:lstStyle/>
+          <a:p>
+            <a:pPr marL="0" indent="0">
+              <a:buNone/>
+            </a:pPr>
+            <a:r>
+              <a:rPr lang="en-US" sz="1100" b="1" kern="0" spc="100" dirty="0">
+                <a:solidFill>
+                  <a:srgbClr val="0F6E56"/>
+                </a:solidFill>
+                <a:latin typeface="Calibri" pitchFamily="34" charset="0"/>
+                <a:ea typeface="Calibri" pitchFamily="34" charset="-122"/>
+                <a:cs typeface="Calibri" pitchFamily="34" charset="-120"/>
+              </a:rPr>
+              <a:t>WHO BENEFITS</a:t>
+            </a:r>
+            <a:endParaRPr lang="en-US" sz="1100" dirty="0"/>
+          </a:p>
+        </p:txBody>
+      </p:sp>
+      <p:sp>
+        <p:nvSpPr>
+          <p:cNvPr id="28" name="Text 5"/>
+          <p:cNvSpPr txBox="1"/>
+          <p:nvPr/>
+        </p:nvSpPr>
+        <p:spPr>
+          <a:xfrm>
+            <a:off x="621792" y="1810512"/>
+            <a:ext cx="5120640" cy="256032"/>
+          </a:xfrm>
+          <a:prstGeom prst="rect">
+            <a:avLst/>
+          </a:prstGeom>
+          <a:noFill/>
+          <a:ln/>
+        </p:spPr>
+        <p:txBody>
+          <a:bodyPr wrap="square" lIns="0" tIns="0" rIns="0" bIns="0" rtlCol="0" anchor="ctr"/>
+          <a:lstStyle/>
+          <a:p>
+            <a:pPr marL="0" indent="0">
+              <a:buFont typeface="Wingdings" pitchFamily="2" charset="2"/>
+              <a:buChar char="Ø"/>
+            </a:pPr>
+            <a:r>
+              <a:rPr lang="en-US" sz="1300" b="1" dirty="0" smtClean="0">
+                <a:solidFill>
+                  <a:schemeClr val="accent6">
+                    <a:lumMod val="50000"/>
+                  </a:schemeClr>
+                </a:solidFill>
+                <a:latin typeface="Calibri" pitchFamily="34" charset="0"/>
+                <a:ea typeface="Calibri" pitchFamily="34" charset="-122"/>
+                <a:cs typeface="Calibri" pitchFamily="34" charset="-120"/>
+              </a:rPr>
+              <a:t> Economic</a:t>
+            </a:r>
+            <a:endParaRPr lang="en-US" sz="1300" dirty="0">
               <a:solidFill>
-                <a:srgbClr val="0F6E56"/>
+                <a:schemeClr val="accent6">
+                  <a:lumMod val="50000"/>
+                </a:schemeClr>
               </a:solidFill>
-              <a:ln/>
-            </p:spPr>
-          </p:sp>
-          <p:sp>
-            <p:nvSpPr>
-              <p:cNvPr id="28" name="Text 5"/>
-              <p:cNvSpPr txBox="1"/>
-              <p:nvPr/>
-            </p:nvSpPr>
-            <p:spPr>
-              <a:xfrm>
-                <a:off x="621792" y="1463040"/>
-                <a:ext cx="5120640" cy="256032"/>
-              </a:xfrm>
-              <a:prstGeom prst="rect">
-                <a:avLst/>
-              </a:prstGeom>
-              <a:noFill/>
-              <a:ln/>
-            </p:spPr>
-            <p:txBody>
-              <a:bodyPr wrap="square" lIns="0" tIns="0" rIns="0" bIns="0" rtlCol="0" anchor="ctr"/>
-              <a:lstStyle/>
-              <a:p>
-                <a:pPr marL="0" indent="0">
-                  <a:buNone/>
-                </a:pPr>
-                <a:r>
-                  <a:rPr lang="en-US" sz="1300" b="1" dirty="0">
-                    <a:solidFill>
-                      <a:srgbClr val="0F6E56"/>
-                    </a:solidFill>
-                    <a:latin typeface="Calibri" pitchFamily="34" charset="0"/>
-                    <a:ea typeface="Calibri" pitchFamily="34" charset="-122"/>
-                    <a:cs typeface="Calibri" pitchFamily="34" charset="-120"/>
-                  </a:rPr>
-                  <a:t>Economic</a:t>
-                </a:r>
-                <a:endParaRPr lang="en-US" sz="1300" dirty="0"/>
-              </a:p>
-            </p:txBody>
-          </p:sp>
-          <p:sp>
-            <p:nvSpPr>
-              <p:cNvPr id="29" name="Text 6"/>
-              <p:cNvSpPr txBox="1"/>
-              <p:nvPr/>
-            </p:nvSpPr>
-            <p:spPr>
-              <a:xfrm>
-                <a:off x="621792" y="1700784"/>
-                <a:ext cx="5120640" cy="502920"/>
-              </a:xfrm>
-              <a:prstGeom prst="rect">
-                <a:avLst/>
-              </a:prstGeom>
-              <a:noFill/>
-              <a:ln/>
-            </p:spPr>
-            <p:txBody>
-              <a:bodyPr wrap="square" lIns="0" tIns="0" rIns="0" bIns="0" rtlCol="0" anchor="t"/>
-              <a:lstStyle/>
-              <a:p>
-                <a:pPr marL="0" indent="0">
-                  <a:buNone/>
-                </a:pPr>
-                <a:r>
-                  <a:rPr lang="en-US" sz="1100" dirty="0">
-                    <a:solidFill>
-                      <a:srgbClr val="1F2937"/>
-                    </a:solidFill>
-                    <a:latin typeface="Calibri" pitchFamily="34" charset="0"/>
-                    <a:ea typeface="Calibri" pitchFamily="34" charset="-122"/>
-                    <a:cs typeface="Calibri" pitchFamily="34" charset="-120"/>
-                  </a:rPr>
-                  <a:t>Higher AMR throughput and lower idle/stop-and-wait time directly reduce per-unit warehouse operating cost.</a:t>
-                </a:r>
-                <a:endParaRPr lang="en-US" sz="1100" dirty="0"/>
-              </a:p>
-            </p:txBody>
-          </p:sp>
-        </p:grpSp>
-        <p:grpSp>
-          <p:nvGrpSpPr>
-            <p:cNvPr id="15" name="Group 24"/>
-            <p:cNvGrpSpPr/>
-            <p:nvPr/>
-          </p:nvGrpSpPr>
-          <p:grpSpPr>
-            <a:xfrm>
-              <a:off x="457200" y="2331720"/>
-              <a:ext cx="5285232" cy="740664"/>
-              <a:chOff x="457200" y="2331720"/>
-              <a:chExt cx="5285232" cy="740664"/>
-            </a:xfrm>
-          </p:grpSpPr>
-          <p:sp>
-            <p:nvSpPr>
-              <p:cNvPr id="24" name="Shape 7"/>
-              <p:cNvSpPr/>
-              <p:nvPr/>
-            </p:nvSpPr>
-            <p:spPr>
-              <a:xfrm>
-                <a:off x="457200" y="2350008"/>
-                <a:ext cx="54864" cy="685800"/>
-              </a:xfrm>
-              <a:prstGeom prst="rect">
-                <a:avLst/>
-              </a:prstGeom>
+            </a:endParaRPr>
+          </a:p>
+        </p:txBody>
+      </p:sp>
+      <p:sp>
+        <p:nvSpPr>
+          <p:cNvPr id="29" name="Text 6"/>
+          <p:cNvSpPr txBox="1"/>
+          <p:nvPr/>
+        </p:nvSpPr>
+        <p:spPr>
+          <a:xfrm>
+            <a:off x="802256" y="2048256"/>
+            <a:ext cx="4940175" cy="502920"/>
+          </a:xfrm>
+          <a:prstGeom prst="rect">
+            <a:avLst/>
+          </a:prstGeom>
+          <a:noFill/>
+          <a:ln/>
+        </p:spPr>
+        <p:txBody>
+          <a:bodyPr wrap="square" lIns="0" tIns="0" rIns="0" bIns="0" rtlCol="0" anchor="t"/>
+          <a:lstStyle/>
+          <a:p>
+            <a:pPr marL="0" indent="0">
+              <a:buNone/>
+            </a:pPr>
+            <a:r>
+              <a:rPr lang="en-US" sz="1100" dirty="0">
+                <a:solidFill>
+                  <a:srgbClr val="1F2937"/>
+                </a:solidFill>
+                <a:latin typeface="Calibri" pitchFamily="34" charset="0"/>
+                <a:ea typeface="Calibri" pitchFamily="34" charset="-122"/>
+                <a:cs typeface="Calibri" pitchFamily="34" charset="-120"/>
+              </a:rPr>
+              <a:t>Higher AMR throughput and lower idle/stop-and-wait time directly reduce per-unit warehouse operating cost.</a:t>
+            </a:r>
+            <a:endParaRPr lang="en-US" sz="1100" dirty="0"/>
+          </a:p>
+        </p:txBody>
+      </p:sp>
+      <p:sp>
+        <p:nvSpPr>
+          <p:cNvPr id="25" name="Text 8"/>
+          <p:cNvSpPr txBox="1"/>
+          <p:nvPr/>
+        </p:nvSpPr>
+        <p:spPr>
+          <a:xfrm>
+            <a:off x="621792" y="2679192"/>
+            <a:ext cx="5120640" cy="256032"/>
+          </a:xfrm>
+          <a:prstGeom prst="rect">
+            <a:avLst/>
+          </a:prstGeom>
+          <a:noFill/>
+          <a:ln/>
+        </p:spPr>
+        <p:txBody>
+          <a:bodyPr wrap="square" lIns="0" tIns="0" rIns="0" bIns="0" rtlCol="0" anchor="ctr"/>
+          <a:lstStyle/>
+          <a:p>
+            <a:pPr marL="0" indent="0">
+              <a:buFont typeface="Wingdings" pitchFamily="2" charset="2"/>
+              <a:buChar char="Ø"/>
+            </a:pPr>
+            <a:r>
+              <a:rPr lang="en-US" sz="1300" b="1" dirty="0" smtClean="0">
+                <a:solidFill>
+                  <a:schemeClr val="accent6">
+                    <a:lumMod val="50000"/>
+                  </a:schemeClr>
+                </a:solidFill>
+                <a:latin typeface="Calibri" pitchFamily="34" charset="0"/>
+                <a:ea typeface="Calibri" pitchFamily="34" charset="-122"/>
+                <a:cs typeface="Calibri" pitchFamily="34" charset="-120"/>
+              </a:rPr>
+              <a:t> Operational </a:t>
+            </a:r>
+            <a:r>
+              <a:rPr lang="en-US" sz="1300" b="1" dirty="0">
+                <a:solidFill>
+                  <a:schemeClr val="accent6">
+                    <a:lumMod val="50000"/>
+                  </a:schemeClr>
+                </a:solidFill>
+                <a:latin typeface="Calibri" pitchFamily="34" charset="0"/>
+                <a:ea typeface="Calibri" pitchFamily="34" charset="-122"/>
+                <a:cs typeface="Calibri" pitchFamily="34" charset="-120"/>
+              </a:rPr>
+              <a:t>resilience</a:t>
+            </a:r>
+            <a:endParaRPr lang="en-US" sz="1300" dirty="0">
               <a:solidFill>
-                <a:srgbClr val="12213B"/>
+                <a:schemeClr val="accent6">
+                  <a:lumMod val="50000"/>
+                </a:schemeClr>
               </a:solidFill>
-              <a:ln/>
-            </p:spPr>
-          </p:sp>
-          <p:sp>
-            <p:nvSpPr>
-              <p:cNvPr id="25" name="Text 8"/>
-              <p:cNvSpPr txBox="1"/>
-              <p:nvPr/>
-            </p:nvSpPr>
-            <p:spPr>
-              <a:xfrm>
-                <a:off x="621792" y="2331720"/>
-                <a:ext cx="5120640" cy="256032"/>
-              </a:xfrm>
-              <a:prstGeom prst="rect">
-                <a:avLst/>
-              </a:prstGeom>
-              <a:noFill/>
-              <a:ln/>
-            </p:spPr>
-            <p:txBody>
-              <a:bodyPr wrap="square" lIns="0" tIns="0" rIns="0" bIns="0" rtlCol="0" anchor="ctr"/>
-              <a:lstStyle/>
-              <a:p>
-                <a:pPr marL="0" indent="0">
-                  <a:buNone/>
-                </a:pPr>
-                <a:r>
-                  <a:rPr lang="en-US" sz="1300" b="1" dirty="0">
-                    <a:solidFill>
-                      <a:srgbClr val="12213B"/>
-                    </a:solidFill>
-                    <a:latin typeface="Calibri" pitchFamily="34" charset="0"/>
-                    <a:ea typeface="Calibri" pitchFamily="34" charset="-122"/>
-                    <a:cs typeface="Calibri" pitchFamily="34" charset="-120"/>
-                  </a:rPr>
-                  <a:t>Operational resilience</a:t>
-                </a:r>
-                <a:endParaRPr lang="en-US" sz="1300" dirty="0"/>
-              </a:p>
-            </p:txBody>
-          </p:sp>
-          <p:sp>
-            <p:nvSpPr>
-              <p:cNvPr id="26" name="Text 9"/>
-              <p:cNvSpPr txBox="1"/>
-              <p:nvPr/>
-            </p:nvSpPr>
-            <p:spPr>
-              <a:xfrm>
-                <a:off x="621792" y="2569464"/>
-                <a:ext cx="5120640" cy="502920"/>
-              </a:xfrm>
-              <a:prstGeom prst="rect">
-                <a:avLst/>
-              </a:prstGeom>
-              <a:noFill/>
-              <a:ln/>
-            </p:spPr>
-            <p:txBody>
-              <a:bodyPr wrap="square" lIns="0" tIns="0" rIns="0" bIns="0" rtlCol="0" anchor="t"/>
-              <a:lstStyle/>
-              <a:p>
-                <a:pPr marL="0" indent="0">
-                  <a:buNone/>
-                </a:pPr>
-                <a:r>
-                  <a:rPr lang="en-US" sz="1100" dirty="0">
-                    <a:solidFill>
-                      <a:srgbClr val="1F2937"/>
-                    </a:solidFill>
-                    <a:latin typeface="Calibri" pitchFamily="34" charset="0"/>
-                    <a:ea typeface="Calibri" pitchFamily="34" charset="-122"/>
-                    <a:cs typeface="Calibri" pitchFamily="34" charset="-120"/>
-                  </a:rPr>
-                  <a:t>Fleet keeps functioning during Wi-Fi/server outages — relevant to BEL's defense and strategic-logistics warehousing where infrastructure may be contested or unreliable.</a:t>
-                </a:r>
-                <a:endParaRPr lang="en-US" sz="1100" dirty="0"/>
-              </a:p>
-            </p:txBody>
-          </p:sp>
-        </p:grpSp>
-        <p:grpSp>
-          <p:nvGrpSpPr>
-            <p:cNvPr id="16" name="Group 25"/>
-            <p:cNvGrpSpPr/>
-            <p:nvPr/>
-          </p:nvGrpSpPr>
-          <p:grpSpPr>
-            <a:xfrm>
-              <a:off x="457200" y="3200400"/>
-              <a:ext cx="5285232" cy="740664"/>
-              <a:chOff x="457200" y="3200400"/>
-              <a:chExt cx="5285232" cy="740664"/>
-            </a:xfrm>
-          </p:grpSpPr>
-          <p:sp>
-            <p:nvSpPr>
-              <p:cNvPr id="21" name="Shape 10"/>
-              <p:cNvSpPr/>
-              <p:nvPr/>
-            </p:nvSpPr>
-            <p:spPr>
-              <a:xfrm>
-                <a:off x="457200" y="3218688"/>
-                <a:ext cx="54864" cy="685800"/>
-              </a:xfrm>
-              <a:prstGeom prst="rect">
-                <a:avLst/>
-              </a:prstGeom>
+            </a:endParaRPr>
+          </a:p>
+        </p:txBody>
+      </p:sp>
+      <p:sp>
+        <p:nvSpPr>
+          <p:cNvPr id="26" name="Text 9"/>
+          <p:cNvSpPr txBox="1"/>
+          <p:nvPr/>
+        </p:nvSpPr>
+        <p:spPr>
+          <a:xfrm>
+            <a:off x="802256" y="2916936"/>
+            <a:ext cx="4940176" cy="502920"/>
+          </a:xfrm>
+          <a:prstGeom prst="rect">
+            <a:avLst/>
+          </a:prstGeom>
+          <a:noFill/>
+          <a:ln/>
+        </p:spPr>
+        <p:txBody>
+          <a:bodyPr wrap="square" lIns="0" tIns="0" rIns="0" bIns="0" rtlCol="0" anchor="t"/>
+          <a:lstStyle/>
+          <a:p>
+            <a:pPr marL="0" indent="0">
+              <a:buNone/>
+            </a:pPr>
+            <a:r>
+              <a:rPr lang="en-US" sz="1100" dirty="0">
+                <a:solidFill>
+                  <a:srgbClr val="1F2937"/>
+                </a:solidFill>
+                <a:latin typeface="Calibri" pitchFamily="34" charset="0"/>
+                <a:ea typeface="Calibri" pitchFamily="34" charset="-122"/>
+                <a:cs typeface="Calibri" pitchFamily="34" charset="-120"/>
+              </a:rPr>
+              <a:t>Fleet keeps functioning during Wi-Fi/server outages — relevant to BEL's defense and strategic-logistics warehousing where infrastructure may be contested or unreliable.</a:t>
+            </a:r>
+            <a:endParaRPr lang="en-US" sz="1100" dirty="0"/>
+          </a:p>
+        </p:txBody>
+      </p:sp>
+      <p:sp>
+        <p:nvSpPr>
+          <p:cNvPr id="22" name="Text 11"/>
+          <p:cNvSpPr txBox="1"/>
+          <p:nvPr/>
+        </p:nvSpPr>
+        <p:spPr>
+          <a:xfrm>
+            <a:off x="621792" y="3547872"/>
+            <a:ext cx="5120640" cy="256032"/>
+          </a:xfrm>
+          <a:prstGeom prst="rect">
+            <a:avLst/>
+          </a:prstGeom>
+          <a:noFill/>
+          <a:ln/>
+        </p:spPr>
+        <p:txBody>
+          <a:bodyPr wrap="square" lIns="0" tIns="0" rIns="0" bIns="0" rtlCol="0" anchor="ctr"/>
+          <a:lstStyle/>
+          <a:p>
+            <a:pPr marL="0" indent="0">
+              <a:buFont typeface="Wingdings" pitchFamily="2" charset="2"/>
+              <a:buChar char="Ø"/>
+            </a:pPr>
+            <a:r>
+              <a:rPr lang="en-US" sz="1300" b="1" dirty="0" smtClean="0">
+                <a:solidFill>
+                  <a:schemeClr val="accent6">
+                    <a:lumMod val="50000"/>
+                  </a:schemeClr>
+                </a:solidFill>
+                <a:latin typeface="Calibri" pitchFamily="34" charset="0"/>
+                <a:ea typeface="Calibri" pitchFamily="34" charset="-122"/>
+                <a:cs typeface="Calibri" pitchFamily="34" charset="-120"/>
+              </a:rPr>
+              <a:t> Scalability</a:t>
+            </a:r>
+            <a:endParaRPr lang="en-US" sz="1300" dirty="0">
               <a:solidFill>
-                <a:srgbClr val="534AB7"/>
+                <a:schemeClr val="accent6">
+                  <a:lumMod val="50000"/>
+                </a:schemeClr>
               </a:solidFill>
-              <a:ln/>
-            </p:spPr>
-          </p:sp>
-          <p:sp>
-            <p:nvSpPr>
-              <p:cNvPr id="22" name="Text 11"/>
-              <p:cNvSpPr txBox="1"/>
-              <p:nvPr/>
-            </p:nvSpPr>
-            <p:spPr>
-              <a:xfrm>
-                <a:off x="621792" y="3200400"/>
-                <a:ext cx="5120640" cy="256032"/>
-              </a:xfrm>
-              <a:prstGeom prst="rect">
-                <a:avLst/>
-              </a:prstGeom>
-              <a:noFill/>
-              <a:ln/>
-            </p:spPr>
-            <p:txBody>
-              <a:bodyPr wrap="square" lIns="0" tIns="0" rIns="0" bIns="0" rtlCol="0" anchor="ctr"/>
-              <a:lstStyle/>
-              <a:p>
-                <a:pPr marL="0" indent="0">
-                  <a:buNone/>
-                </a:pPr>
-                <a:r>
-                  <a:rPr lang="en-US" sz="1300" b="1" dirty="0">
-                    <a:solidFill>
-                      <a:srgbClr val="534AB7"/>
-                    </a:solidFill>
-                    <a:latin typeface="Calibri" pitchFamily="34" charset="0"/>
-                    <a:ea typeface="Calibri" pitchFamily="34" charset="-122"/>
-                    <a:cs typeface="Calibri" pitchFamily="34" charset="-120"/>
-                  </a:rPr>
-                  <a:t>Scalability</a:t>
-                </a:r>
-                <a:endParaRPr lang="en-US" sz="1300" dirty="0"/>
-              </a:p>
-            </p:txBody>
-          </p:sp>
-          <p:sp>
-            <p:nvSpPr>
-              <p:cNvPr id="23" name="Text 12"/>
-              <p:cNvSpPr txBox="1"/>
-              <p:nvPr/>
-            </p:nvSpPr>
-            <p:spPr>
-              <a:xfrm>
-                <a:off x="621792" y="3438144"/>
-                <a:ext cx="5120640" cy="502920"/>
-              </a:xfrm>
-              <a:prstGeom prst="rect">
-                <a:avLst/>
-              </a:prstGeom>
-              <a:noFill/>
-              <a:ln/>
-            </p:spPr>
-            <p:txBody>
-              <a:bodyPr wrap="square" lIns="0" tIns="0" rIns="0" bIns="0" rtlCol="0" anchor="t"/>
-              <a:lstStyle/>
-              <a:p>
-                <a:pPr marL="0" indent="0">
-                  <a:buNone/>
-                </a:pPr>
-                <a:r>
-                  <a:rPr lang="en-US" sz="1100" dirty="0">
-                    <a:solidFill>
-                      <a:srgbClr val="1F2937"/>
-                    </a:solidFill>
-                    <a:latin typeface="Calibri" pitchFamily="34" charset="0"/>
-                    <a:ea typeface="Calibri" pitchFamily="34" charset="-122"/>
-                    <a:cs typeface="Calibri" pitchFamily="34" charset="-120"/>
-                  </a:rPr>
-                  <a:t>A software-only coordination layer — no added infrastructure or hardware dependency to scale to larger fleets.</a:t>
-                </a:r>
-                <a:endParaRPr lang="en-US" sz="1100" dirty="0"/>
-              </a:p>
-            </p:txBody>
-          </p:sp>
-        </p:grpSp>
-        <p:grpSp>
-          <p:nvGrpSpPr>
-            <p:cNvPr id="17" name="Group 26"/>
-            <p:cNvGrpSpPr/>
-            <p:nvPr/>
-          </p:nvGrpSpPr>
-          <p:grpSpPr>
-            <a:xfrm>
-              <a:off x="457200" y="4069080"/>
-              <a:ext cx="5285232" cy="740664"/>
-              <a:chOff x="457200" y="4069080"/>
-              <a:chExt cx="5285232" cy="740664"/>
-            </a:xfrm>
-          </p:grpSpPr>
-          <p:sp>
-            <p:nvSpPr>
-              <p:cNvPr id="18" name="Shape 13"/>
-              <p:cNvSpPr/>
-              <p:nvPr/>
-            </p:nvSpPr>
-            <p:spPr>
-              <a:xfrm>
-                <a:off x="457200" y="4087368"/>
-                <a:ext cx="54864" cy="685800"/>
-              </a:xfrm>
-              <a:prstGeom prst="rect">
-                <a:avLst/>
-              </a:prstGeom>
+            </a:endParaRPr>
+          </a:p>
+        </p:txBody>
+      </p:sp>
+      <p:sp>
+        <p:nvSpPr>
+          <p:cNvPr id="23" name="Text 12"/>
+          <p:cNvSpPr txBox="1"/>
+          <p:nvPr/>
+        </p:nvSpPr>
+        <p:spPr>
+          <a:xfrm>
+            <a:off x="802256" y="3785616"/>
+            <a:ext cx="4940176" cy="502920"/>
+          </a:xfrm>
+          <a:prstGeom prst="rect">
+            <a:avLst/>
+          </a:prstGeom>
+          <a:noFill/>
+          <a:ln/>
+        </p:spPr>
+        <p:txBody>
+          <a:bodyPr wrap="square" lIns="0" tIns="0" rIns="0" bIns="0" rtlCol="0" anchor="t"/>
+          <a:lstStyle/>
+          <a:p>
+            <a:pPr marL="0" indent="0">
+              <a:buNone/>
+            </a:pPr>
+            <a:r>
+              <a:rPr lang="en-US" sz="1100" dirty="0">
+                <a:solidFill>
+                  <a:srgbClr val="1F2937"/>
+                </a:solidFill>
+                <a:latin typeface="Calibri" pitchFamily="34" charset="0"/>
+                <a:ea typeface="Calibri" pitchFamily="34" charset="-122"/>
+                <a:cs typeface="Calibri" pitchFamily="34" charset="-120"/>
+              </a:rPr>
+              <a:t>A software-only coordination layer — no added infrastructure or hardware dependency to scale to larger fleets.</a:t>
+            </a:r>
+            <a:endParaRPr lang="en-US" sz="1100" dirty="0"/>
+          </a:p>
+        </p:txBody>
+      </p:sp>
+      <p:sp>
+        <p:nvSpPr>
+          <p:cNvPr id="19" name="Text 14"/>
+          <p:cNvSpPr txBox="1"/>
+          <p:nvPr/>
+        </p:nvSpPr>
+        <p:spPr>
+          <a:xfrm>
+            <a:off x="621792" y="4416552"/>
+            <a:ext cx="5120640" cy="256032"/>
+          </a:xfrm>
+          <a:prstGeom prst="rect">
+            <a:avLst/>
+          </a:prstGeom>
+          <a:noFill/>
+          <a:ln/>
+        </p:spPr>
+        <p:txBody>
+          <a:bodyPr wrap="square" lIns="0" tIns="0" rIns="0" bIns="0" rtlCol="0" anchor="ctr"/>
+          <a:lstStyle/>
+          <a:p>
+            <a:pPr marL="0" indent="0">
+              <a:buFont typeface="Wingdings" pitchFamily="2" charset="2"/>
+              <a:buChar char="Ø"/>
+            </a:pPr>
+            <a:r>
+              <a:rPr lang="en-US" sz="1300" b="1" dirty="0" smtClean="0">
+                <a:solidFill>
+                  <a:schemeClr val="accent6">
+                    <a:lumMod val="50000"/>
+                  </a:schemeClr>
+                </a:solidFill>
+                <a:latin typeface="Calibri" pitchFamily="34" charset="0"/>
+                <a:ea typeface="Calibri" pitchFamily="34" charset="-122"/>
+                <a:cs typeface="Calibri" pitchFamily="34" charset="-120"/>
+              </a:rPr>
+              <a:t> Environmental</a:t>
+            </a:r>
+            <a:endParaRPr lang="en-US" sz="1300" dirty="0">
               <a:solidFill>
-                <a:srgbClr val="639922"/>
+                <a:schemeClr val="accent6">
+                  <a:lumMod val="50000"/>
+                </a:schemeClr>
               </a:solidFill>
-              <a:ln/>
-            </p:spPr>
-          </p:sp>
-          <p:sp>
-            <p:nvSpPr>
-              <p:cNvPr id="19" name="Text 14"/>
-              <p:cNvSpPr txBox="1"/>
-              <p:nvPr/>
-            </p:nvSpPr>
-            <p:spPr>
-              <a:xfrm>
-                <a:off x="621792" y="4069080"/>
-                <a:ext cx="5120640" cy="256032"/>
-              </a:xfrm>
-              <a:prstGeom prst="rect">
-                <a:avLst/>
-              </a:prstGeom>
-              <a:noFill/>
-              <a:ln/>
-            </p:spPr>
-            <p:txBody>
-              <a:bodyPr wrap="square" lIns="0" tIns="0" rIns="0" bIns="0" rtlCol="0" anchor="ctr"/>
-              <a:lstStyle/>
-              <a:p>
-                <a:pPr marL="0" indent="0">
-                  <a:buNone/>
-                </a:pPr>
-                <a:r>
-                  <a:rPr lang="en-US" sz="1300" b="1" dirty="0">
-                    <a:solidFill>
-                      <a:srgbClr val="639922"/>
-                    </a:solidFill>
-                    <a:latin typeface="Calibri" pitchFamily="34" charset="0"/>
-                    <a:ea typeface="Calibri" pitchFamily="34" charset="-122"/>
-                    <a:cs typeface="Calibri" pitchFamily="34" charset="-120"/>
-                  </a:rPr>
-                  <a:t>Environmental</a:t>
-                </a:r>
-                <a:endParaRPr lang="en-US" sz="1300" dirty="0"/>
-              </a:p>
-            </p:txBody>
-          </p:sp>
-          <p:sp>
-            <p:nvSpPr>
-              <p:cNvPr id="20" name="Text 15"/>
-              <p:cNvSpPr txBox="1"/>
-              <p:nvPr/>
-            </p:nvSpPr>
-            <p:spPr>
-              <a:xfrm>
-                <a:off x="621792" y="4306824"/>
-                <a:ext cx="5120640" cy="502920"/>
-              </a:xfrm>
-              <a:prstGeom prst="rect">
-                <a:avLst/>
-              </a:prstGeom>
-              <a:noFill/>
-              <a:ln/>
-            </p:spPr>
-            <p:txBody>
-              <a:bodyPr wrap="square" lIns="0" tIns="0" rIns="0" bIns="0" rtlCol="0" anchor="t"/>
-              <a:lstStyle/>
-              <a:p>
-                <a:pPr marL="0" indent="0">
-                  <a:buNone/>
-                </a:pPr>
-                <a:r>
-                  <a:rPr lang="en-US" sz="1100" dirty="0">
-                    <a:solidFill>
-                      <a:srgbClr val="1F2937"/>
-                    </a:solidFill>
-                    <a:latin typeface="Calibri" pitchFamily="34" charset="0"/>
-                    <a:ea typeface="Calibri" pitchFamily="34" charset="-122"/>
-                    <a:cs typeface="Calibri" pitchFamily="34" charset="-120"/>
-                  </a:rPr>
-                  <a:t>Optimized routing and reduced idle dwell time lower energy consumption per completed task.</a:t>
-                </a:r>
-                <a:endParaRPr lang="en-US" sz="1100" dirty="0"/>
-              </a:p>
-            </p:txBody>
-          </p:sp>
-        </p:grpSp>
-      </p:grpSp>
+            </a:endParaRPr>
+          </a:p>
+        </p:txBody>
+      </p:sp>
+      <p:sp>
+        <p:nvSpPr>
+          <p:cNvPr id="20" name="Text 15"/>
+          <p:cNvSpPr txBox="1"/>
+          <p:nvPr/>
+        </p:nvSpPr>
+        <p:spPr>
+          <a:xfrm>
+            <a:off x="802256" y="4654296"/>
+            <a:ext cx="4940176" cy="502920"/>
+          </a:xfrm>
+          <a:prstGeom prst="rect">
+            <a:avLst/>
+          </a:prstGeom>
+          <a:noFill/>
+          <a:ln/>
+        </p:spPr>
+        <p:txBody>
+          <a:bodyPr wrap="square" lIns="0" tIns="0" rIns="0" bIns="0" rtlCol="0" anchor="t"/>
+          <a:lstStyle/>
+          <a:p>
+            <a:pPr marL="0" indent="0">
+              <a:buNone/>
+            </a:pPr>
+            <a:r>
+              <a:rPr lang="en-US" sz="1100" dirty="0">
+                <a:solidFill>
+                  <a:srgbClr val="1F2937"/>
+                </a:solidFill>
+                <a:latin typeface="Calibri" pitchFamily="34" charset="0"/>
+                <a:ea typeface="Calibri" pitchFamily="34" charset="-122"/>
+                <a:cs typeface="Calibri" pitchFamily="34" charset="-120"/>
+              </a:rPr>
+              <a:t>Optimized routing and reduced idle dwell time lower energy consumption per completed task.</a:t>
+            </a:r>
+            <a:endParaRPr lang="en-US" sz="1100" dirty="0"/>
+          </a:p>
+        </p:txBody>
+      </p:sp>
       <p:grpSp>
         <p:nvGrpSpPr>
           <p:cNvPr id="30" name="Group 29"/>
@@ -13745,13 +12965,20 @@
     </p:spTree>
     <p:extLst>
       <p:ext uri="{BB962C8B-B14F-4D97-AF65-F5344CB8AC3E}">
-        <p14:creationId xmlns:p14="http://schemas.microsoft.com/office/powerpoint/2010/main" xmlns="" val="2997144140"/>
+        <p14:creationId xmlns="" xmlns:p14="http://schemas.microsoft.com/office/powerpoint/2010/main" val="2997144140"/>
       </p:ext>
     </p:extLst>
   </p:cSld>
   <p:clrMapOvr>
     <a:masterClrMapping/>
   </p:clrMapOvr>
+  <p:timing>
+    <p:tnLst>
+      <p:par>
+        <p:cTn id="1" dur="indefinite" restart="never" nodeType="tmRoot"/>
+      </p:par>
+    </p:tnLst>
+  </p:timing>
 </p:sld>
 </file>
 
@@ -13777,7 +13004,7 @@
           <p:cNvPr id="10" name="Rectangle 9">
             <a:extLst>
               <a:ext uri="{FF2B5EF4-FFF2-40B4-BE49-F238E27FC236}">
-                <a16:creationId xmlns:a16="http://schemas.microsoft.com/office/drawing/2014/main" xmlns="" id="{AD4F69D3-EEB0-4C4C-9434-B9960FB5854C}"/>
+                <a16:creationId xmlns="" xmlns:a16="http://schemas.microsoft.com/office/drawing/2014/main" id="{AD4F69D3-EEB0-4C4C-9434-B9960FB5854C}"/>
               </a:ext>
             </a:extLst>
           </p:cNvPr>
@@ -14037,10 +13264,10 @@
           <p:cNvPr id="9" name="Oval 8" descr="Your startup LOGO">
             <a:extLst>
               <a:ext uri="{FF2B5EF4-FFF2-40B4-BE49-F238E27FC236}">
-                <a16:creationId xmlns:a16="http://schemas.microsoft.com/office/drawing/2014/main" xmlns="" id="{5DBCE864-823D-4A13-9607-5DA1F0ED5FB8}"/>
+                <a16:creationId xmlns="" xmlns:a16="http://schemas.microsoft.com/office/drawing/2014/main" id="{5DBCE864-823D-4A13-9607-5DA1F0ED5FB8}"/>
               </a:ext>
               <a:ext uri="{C183D7F6-B498-43B3-948B-1728B52AA6E4}">
-                <adec:decorative xmlns="" xmlns:adec="http://schemas.microsoft.com/office/drawing/2017/decorative" val="0"/>
+                <adec:decorative xmlns:adec="http://schemas.microsoft.com/office/drawing/2017/decorative" xmlns="" val="0"/>
               </a:ext>
             </a:extLst>
           </p:cNvPr>
@@ -14095,7 +13322,7 @@
           <a:blip r:embed="rId3">
             <a:extLst>
               <a:ext uri="{28A0092B-C50C-407E-A947-70E740481C1C}">
-                <a14:useLocalDpi xmlns:a14="http://schemas.microsoft.com/office/drawing/2010/main" xmlns="" val="0"/>
+                <a14:useLocalDpi xmlns="" xmlns:a14="http://schemas.microsoft.com/office/drawing/2010/main" val="0"/>
               </a:ext>
             </a:extLst>
           </a:blip>
@@ -14555,13 +13782,20 @@
     </p:spTree>
     <p:extLst>
       <p:ext uri="{BB962C8B-B14F-4D97-AF65-F5344CB8AC3E}">
-        <p14:creationId xmlns:p14="http://schemas.microsoft.com/office/powerpoint/2010/main" xmlns="" val="3916788613"/>
+        <p14:creationId xmlns="" xmlns:p14="http://schemas.microsoft.com/office/powerpoint/2010/main" val="3916788613"/>
       </p:ext>
     </p:extLst>
   </p:cSld>
   <p:clrMapOvr>
     <a:masterClrMapping/>
   </p:clrMapOvr>
+  <p:timing>
+    <p:tnLst>
+      <p:par>
+        <p:cTn id="1" dur="indefinite" restart="never" nodeType="tmRoot"/>
+      </p:par>
+    </p:tnLst>
+  </p:timing>
 </p:sld>
 </file>
 
